--- a/Philips-AMD-Content/agents-md/AGENTS_MD_Guide.pptx
+++ b/Philips-AMD-Content/agents-md/AGENTS_MD_Guide.pptx
@@ -23,9 +23,10 @@
     <p:sldId id="271" r:id="rId17"/>
     <p:sldId id="272" r:id="rId18"/>
     <p:sldId id="273" r:id="rId19"/>
+    <p:sldId id="274" r:id="rId20"/>
   </p:sldIdLst>
   <p:notesMasterIdLst>
-    <p:notesMasterId r:id="rId20"/>
+    <p:notesMasterId r:id="rId21"/>
   </p:notesMasterIdLst>
   <p:sldSz cx="12191695" cy="6858000"/>
   <p:notesSz cx="6858000" cy="12191695"/>
@@ -1335,6 +1336,94 @@
             <a:fld id="{F7021451-1387-4CA6-816F-3879F97B5CBC}" type="slidenum">
               <a:rPr lang="en-US"/>
               <a:t>18</a:t>
+            </a:fld>
+            <a:endParaRPr lang="en-US"/>
+          </a:p>
+        </p:txBody>
+      </p:sp>
+    </p:spTree>
+    <p:extLst>
+      <p:ext uri="{BB962C8B-B14F-4D97-AF65-F5344CB8AC3E}">
+        <p14:creationId xmlns:p14="http://schemas.microsoft.com/office/powerpoint/2010/main" val="1024086991"/>
+      </p:ext>
+    </p:extLst>
+  </p:cSld>
+  <p:clrMapOvr>
+    <a:masterClrMapping/>
+  </p:clrMapOvr>
+</p:notes>
+</file>
+
+<file path=ppt/notesSlides/notesSlide19.xml><?xml version="1.0" encoding="utf-8"?>
+<p:notes xmlns:a="http://schemas.openxmlformats.org/drawingml/2006/main" xmlns:r="http://schemas.openxmlformats.org/officeDocument/2006/relationships" xmlns:p="http://schemas.openxmlformats.org/presentationml/2006/main">
+  <p:cSld>
+    <p:spTree>
+      <p:nvGrpSpPr>
+        <p:cNvPr id="1" name=""/>
+        <p:cNvGrpSpPr/>
+        <p:nvPr/>
+      </p:nvGrpSpPr>
+      <p:grpSpPr>
+        <a:xfrm>
+          <a:off x="0" y="0"/>
+          <a:ext cx="0" cy="0"/>
+          <a:chOff x="0" y="0"/>
+          <a:chExt cx="0" cy="0"/>
+        </a:xfrm>
+      </p:grpSpPr>
+      <p:sp>
+        <p:nvSpPr>
+          <p:cNvPr id="2" name="Slide Image Placeholder 1"/>
+          <p:cNvSpPr>
+            <a:spLocks noGrp="1" noRot="1" noChangeAspect="1"/>
+          </p:cNvSpPr>
+          <p:nvPr>
+            <p:ph type="sldImg"/>
+          </p:nvPr>
+        </p:nvSpPr>
+        <p:spPr/>
+      </p:sp>
+      <p:sp>
+        <p:nvSpPr>
+          <p:cNvPr id="3" name="Notes Placeholder 2"/>
+          <p:cNvSpPr>
+            <a:spLocks noGrp="1"/>
+          </p:cNvSpPr>
+          <p:nvPr>
+            <p:ph type="body" idx="1"/>
+          </p:nvPr>
+        </p:nvSpPr>
+        <p:spPr/>
+        <p:txBody>
+          <a:bodyPr/>
+          <a:lstStyle/>
+          <a:p>
+            <a:r>
+              <a:rPr lang="en-US" dirty="0"/>
+              <a:t/>
+            </a:r>
+            <a:endParaRPr lang="en-US" dirty="0"/>
+          </a:p>
+        </p:txBody>
+      </p:sp>
+      <p:sp>
+        <p:nvSpPr>
+          <p:cNvPr id="4" name="Slide Number Placeholder 3"/>
+          <p:cNvSpPr>
+            <a:spLocks noGrp="1"/>
+          </p:cNvSpPr>
+          <p:nvPr>
+            <p:ph type="sldNum" sz="quarter" idx="10"/>
+          </p:nvPr>
+        </p:nvSpPr>
+        <p:spPr/>
+        <p:txBody>
+          <a:bodyPr/>
+          <a:lstStyle/>
+          <a:p>
+            <a:fld id="{F7021451-1387-4CA6-816F-3879F97B5CBC}" type="slidenum">
+              <a:rPr lang="en-US"/>
+              <a:t>19</a:t>
             </a:fld>
             <a:endParaRPr lang="en-US"/>
           </a:p>
@@ -3479,49 +3568,108 @@
       </p:grpSpPr>
       <p:sp>
         <p:nvSpPr>
-          <p:cNvPr id="2" name="Shape 0"/>
-          <p:cNvSpPr/>
-          <p:nvPr/>
-        </p:nvSpPr>
-        <p:spPr>
-          <a:xfrm>
-            <a:off x="0" y="0"/>
-            <a:ext cx="7406640" cy="6858000"/>
-          </a:xfrm>
-          <a:prstGeom prst="rect">
-            <a:avLst/>
-          </a:prstGeom>
-          <a:solidFill>
-            <a:srgbClr val="E8460E"/>
-          </a:solidFill>
-          <a:ln/>
-        </p:spPr>
-      </p:sp>
-      <p:sp>
-        <p:nvSpPr>
-          <p:cNvPr id="3" name="Shape 1"/>
-          <p:cNvSpPr/>
-          <p:nvPr/>
-        </p:nvSpPr>
-        <p:spPr>
-          <a:xfrm>
-            <a:off x="5394960" y="0"/>
-            <a:ext cx="2011680" cy="6858000"/>
-          </a:xfrm>
-          <a:prstGeom prst="rect">
-            <a:avLst/>
-          </a:prstGeom>
-          <a:solidFill>
-            <a:srgbClr val="FF6600">
-              <a:alpha val="70000"/>
-            </a:srgbClr>
-          </a:solidFill>
-          <a:ln/>
+          <p:cNvPr id="2" name="Text 0"/>
+          <p:cNvSpPr/>
+          <p:nvPr/>
+        </p:nvSpPr>
+        <p:spPr>
+          <a:xfrm>
+            <a:off x="548640" y="384048"/>
+            <a:ext cx="10058400" cy="274320"/>
+          </a:xfrm>
+          <a:prstGeom prst="rect">
+            <a:avLst/>
+          </a:prstGeom>
+          <a:noFill/>
+          <a:ln/>
+        </p:spPr>
+        <p:txBody>
+          <a:bodyPr wrap="square" rtlCol="0" anchor="ctr"/>
+          <a:lstStyle/>
+          <a:p>
+            <a:pPr indent="0" marL="0">
+              <a:buNone/>
+            </a:pPr>
+            <a:r>
+              <a:rPr lang="en-US" sz="1100" b="1" spc="200" kern="0" dirty="0">
+                <a:solidFill>
+                  <a:srgbClr val="E8460E"/>
+                </a:solidFill>
+                <a:latin typeface="Arial" pitchFamily="34" charset="0"/>
+                <a:ea typeface="Arial" pitchFamily="34" charset="-122"/>
+                <a:cs typeface="Arial" pitchFamily="34" charset="-120"/>
+              </a:rPr>
+              <a:t>SECTION 13 · THE METHOD</a:t>
+            </a:r>
+            <a:endParaRPr lang="en-US" sz="1100" dirty="0"/>
+          </a:p>
+        </p:txBody>
+      </p:sp>
+      <p:sp>
+        <p:nvSpPr>
+          <p:cNvPr id="3" name="Text 1"/>
+          <p:cNvSpPr/>
+          <p:nvPr/>
+        </p:nvSpPr>
+        <p:spPr>
+          <a:xfrm>
+            <a:off x="548640" y="621792"/>
+            <a:ext cx="10515600" cy="640080"/>
+          </a:xfrm>
+          <a:prstGeom prst="rect">
+            <a:avLst/>
+          </a:prstGeom>
+          <a:noFill/>
+          <a:ln/>
+        </p:spPr>
+        <p:txBody>
+          <a:bodyPr wrap="square" rtlCol="0" anchor="t"/>
+          <a:lstStyle/>
+          <a:p>
+            <a:pPr indent="0" marL="0">
+              <a:buNone/>
+            </a:pPr>
+            <a:r>
+              <a:rPr lang="en-US" sz="2500" b="1" dirty="0">
+                <a:solidFill>
+                  <a:srgbClr val="2E4552"/>
+                </a:solidFill>
+                <a:latin typeface="Arial" pitchFamily="34" charset="0"/>
+                <a:ea typeface="Arial" pitchFamily="34" charset="-122"/>
+                <a:cs typeface="Arial" pitchFamily="34" charset="-120"/>
+              </a:rPr>
+              <a:t>Spec-Driven Development &amp; Traceability</a:t>
+            </a:r>
+            <a:endParaRPr lang="en-US" sz="2500" dirty="0"/>
+          </a:p>
+        </p:txBody>
+      </p:sp>
+      <p:sp>
+        <p:nvSpPr>
+          <p:cNvPr id="4" name="Shape 2"/>
+          <p:cNvSpPr/>
+          <p:nvPr/>
+        </p:nvSpPr>
+        <p:spPr>
+          <a:xfrm>
+            <a:off x="548640" y="1298448"/>
+            <a:ext cx="11064240" cy="0"/>
+          </a:xfrm>
+          <a:prstGeom prst="line">
+            <a:avLst/>
+          </a:prstGeom>
+          <a:noFill/>
+          <a:ln w="19050">
+            <a:solidFill>
+              <a:srgbClr val="FF6600"/>
+            </a:solidFill>
+            <a:prstDash val="solid"/>
+          </a:ln>
         </p:spPr>
       </p:sp>
       <p:pic>
         <p:nvPicPr>
-          <p:cNvPr id="4" name="Image 0" descr="unext_white_lockup.png">    </p:cNvPr>
+          <p:cNvPr id="5" name="Image 0" descr="unext_icon.png">    </p:cNvPr>
           <p:cNvPicPr>
             <a:picLocks noChangeAspect="1"/>
           </p:cNvPicPr>
@@ -3535,17 +3683,79 @@
         </p:blipFill>
         <p:spPr>
           <a:xfrm>
-            <a:off x="502920" y="457200"/>
-            <a:ext cx="2194560" cy="457200"/>
+            <a:off x="11430000" y="365760"/>
+            <a:ext cx="329184" cy="493776"/>
           </a:xfrm>
           <a:prstGeom prst="rect">
             <a:avLst/>
           </a:prstGeom>
         </p:spPr>
       </p:pic>
+      <p:sp>
+        <p:nvSpPr>
+          <p:cNvPr id="6" name="Shape 3"/>
+          <p:cNvSpPr/>
+          <p:nvPr/>
+        </p:nvSpPr>
+        <p:spPr>
+          <a:xfrm>
+            <a:off x="548640" y="6400800"/>
+            <a:ext cx="9418320" cy="0"/>
+          </a:xfrm>
+          <a:prstGeom prst="line">
+            <a:avLst/>
+          </a:prstGeom>
+          <a:noFill/>
+          <a:ln w="9525">
+            <a:solidFill>
+              <a:srgbClr val="F0DCB8"/>
+            </a:solidFill>
+            <a:prstDash val="solid"/>
+          </a:ln>
+        </p:spPr>
+      </p:sp>
+      <p:sp>
+        <p:nvSpPr>
+          <p:cNvPr id="7" name="Text 4"/>
+          <p:cNvSpPr/>
+          <p:nvPr/>
+        </p:nvSpPr>
+        <p:spPr>
+          <a:xfrm>
+            <a:off x="548640" y="6437376"/>
+            <a:ext cx="9326880" cy="365760"/>
+          </a:xfrm>
+          <a:prstGeom prst="rect">
+            <a:avLst/>
+          </a:prstGeom>
+          <a:noFill/>
+          <a:ln/>
+        </p:spPr>
+        <p:txBody>
+          <a:bodyPr wrap="square" rtlCol="0" anchor="t"/>
+          <a:lstStyle/>
+          <a:p>
+            <a:pPr indent="0" marL="0">
+              <a:buNone/>
+            </a:pPr>
+            <a:r>
+              <a:rPr lang="en-US" sz="700" dirty="0">
+                <a:solidFill>
+                  <a:srgbClr val="767171"/>
+                </a:solidFill>
+                <a:latin typeface="Arial" pitchFamily="34" charset="0"/>
+                <a:ea typeface="Arial" pitchFamily="34" charset="-122"/>
+                <a:cs typeface="Arial" pitchFamily="34" charset="-120"/>
+              </a:rPr>
+              <a:t>The content and the program approach is strictly confidential. It is strictly forbidden to share any part of this program design approach with any third party</a:t>
+            </a:r>
+            <a:endParaRPr lang="en-US" sz="700" dirty="0"/>
+          </a:p>
+        </p:txBody>
+      </p:sp>
       <p:pic>
         <p:nvPicPr>
-          <p:cNvPr id="5" name="Image 1" descr="unext_icon.png">    </p:cNvPr>
+          <p:cNvPr id="8" name="Image 1" descr="unext_dark_lockup.png">    </p:cNvPr>
           <p:cNvPicPr>
             <a:picLocks noChangeAspect="1"/>
           </p:cNvPicPr>
@@ -3559,8 +3769,8 @@
         </p:blipFill>
         <p:spPr>
           <a:xfrm>
-            <a:off x="9646920" y="502920"/>
-            <a:ext cx="457200" cy="685800"/>
+            <a:off x="10195560" y="6419088"/>
+            <a:ext cx="1417320" cy="301752"/>
           </a:xfrm>
           <a:prstGeom prst="rect">
             <a:avLst/>
@@ -3569,14 +3779,14 @@
       </p:pic>
       <p:sp>
         <p:nvSpPr>
-          <p:cNvPr id="6" name="Text 2"/>
-          <p:cNvSpPr/>
-          <p:nvPr/>
-        </p:nvSpPr>
-        <p:spPr>
-          <a:xfrm>
-            <a:off x="548640" y="2514600"/>
-            <a:ext cx="6400800" cy="365760"/>
+          <p:cNvPr id="9" name="Text 5"/>
+          <p:cNvSpPr/>
+          <p:nvPr/>
+        </p:nvSpPr>
+        <p:spPr>
+          <a:xfrm>
+            <a:off x="548640" y="1417320"/>
+            <a:ext cx="11064240" cy="457200"/>
           </a:xfrm>
           <a:prstGeom prst="rect">
             <a:avLst/>
@@ -3589,83 +3799,48 @@
           <a:lstStyle/>
           <a:p>
             <a:pPr indent="0" marL="0">
-              <a:buNone/>
-            </a:pPr>
-            <a:r>
-              <a:rPr lang="en-US" sz="1400" b="1" spc="300" kern="0" dirty="0">
-                <a:solidFill>
-                  <a:srgbClr val="FFE9DC"/>
-                </a:solidFill>
-                <a:latin typeface="Arial" pitchFamily="34" charset="0"/>
-                <a:ea typeface="Arial" pitchFamily="34" charset="-122"/>
-                <a:cs typeface="Arial" pitchFamily="34" charset="-120"/>
-              </a:rPr>
-              <a:t>PART 3</a:t>
-            </a:r>
-            <a:endParaRPr lang="en-US" sz="1400" dirty="0"/>
-          </a:p>
-        </p:txBody>
-      </p:sp>
-      <p:sp>
-        <p:nvSpPr>
-          <p:cNvPr id="7" name="Text 3"/>
-          <p:cNvSpPr/>
-          <p:nvPr/>
-        </p:nvSpPr>
-        <p:spPr>
-          <a:xfrm>
-            <a:off x="548640" y="2880360"/>
-            <a:ext cx="6492240" cy="1463040"/>
-          </a:xfrm>
-          <a:prstGeom prst="rect">
-            <a:avLst/>
-          </a:prstGeom>
-          <a:noFill/>
-          <a:ln/>
-        </p:spPr>
-        <p:txBody>
-          <a:bodyPr wrap="square" rtlCol="0" anchor="t"/>
-          <a:lstStyle/>
-          <a:p>
-            <a:pPr indent="0" marL="0">
-              <a:lnSpc>
-                <a:spcPts val="3600"/>
-              </a:lnSpc>
-              <a:buNone/>
-            </a:pPr>
-            <a:r>
-              <a:rPr lang="en-US" sz="3200" b="1" dirty="0">
-                <a:solidFill>
-                  <a:srgbClr val="FFFFFF"/>
-                </a:solidFill>
-                <a:latin typeface="Arial" pitchFamily="34" charset="0"/>
-                <a:ea typeface="Arial" pitchFamily="34" charset="-122"/>
-                <a:cs typeface="Arial" pitchFamily="34" charset="-120"/>
-              </a:rPr>
-              <a:t>The Skeleton — Copy This to Start</a:t>
-            </a:r>
-            <a:endParaRPr lang="en-US" sz="3200" dirty="0"/>
-          </a:p>
-        </p:txBody>
-      </p:sp>
-      <p:sp>
-        <p:nvSpPr>
-          <p:cNvPr id="8" name="Shape 4"/>
-          <p:cNvSpPr/>
-          <p:nvPr/>
-        </p:nvSpPr>
-        <p:spPr>
-          <a:xfrm>
-            <a:off x="566928" y="4343400"/>
-            <a:ext cx="2926080" cy="0"/>
-          </a:xfrm>
-          <a:prstGeom prst="line">
-            <a:avLst/>
-          </a:prstGeom>
-          <a:noFill/>
-          <a:ln w="19050">
+              <a:lnSpc>
+                <a:spcPts val="1600"/>
+              </a:lnSpc>
+              <a:buNone/>
+            </a:pPr>
+            <a:r>
+              <a:rPr lang="en-US" sz="1250" i="1" dirty="0">
+                <a:solidFill>
+                  <a:srgbClr val="3A4556"/>
+                </a:solidFill>
+                <a:latin typeface="Arial" pitchFamily="34" charset="0"/>
+                <a:ea typeface="Arial" pitchFamily="34" charset="-122"/>
+                <a:cs typeface="Arial" pitchFamily="34" charset="-120"/>
+              </a:rPr>
+              <a:t>Build spec-first. No code without a spec ID — and that one ID is carried all the way to the PR, so spec → code → test → PR is greppable by a single string:</a:t>
+            </a:r>
+            <a:endParaRPr lang="en-US" sz="1250" dirty="0"/>
+          </a:p>
+        </p:txBody>
+      </p:sp>
+      <p:sp>
+        <p:nvSpPr>
+          <p:cNvPr id="10" name="Shape 6"/>
+          <p:cNvSpPr/>
+          <p:nvPr/>
+        </p:nvSpPr>
+        <p:spPr>
+          <a:xfrm>
+            <a:off x="548640" y="1965960"/>
+            <a:ext cx="5440680" cy="3246120"/>
+          </a:xfrm>
+          <a:prstGeom prst="roundRect">
+            <a:avLst>
+              <a:gd name="adj" fmla="val 1972"/>
+            </a:avLst>
+          </a:prstGeom>
+          <a:solidFill>
+            <a:srgbClr val="F5F7FA"/>
+          </a:solidFill>
+          <a:ln w="9525">
             <a:solidFill>
-              <a:srgbClr val="FFD9C2"/>
+              <a:srgbClr val="D7DEE8"/>
             </a:solidFill>
             <a:prstDash val="solid"/>
           </a:ln>
@@ -3673,14 +3848,53 @@
       </p:sp>
       <p:sp>
         <p:nvSpPr>
-          <p:cNvPr id="9" name="Text 5"/>
-          <p:cNvSpPr/>
-          <p:nvPr/>
-        </p:nvSpPr>
-        <p:spPr>
-          <a:xfrm>
-            <a:off x="7772400" y="2880360"/>
-            <a:ext cx="3931920" cy="2743200"/>
+          <p:cNvPr id="11" name="Text 7"/>
+          <p:cNvSpPr/>
+          <p:nvPr/>
+        </p:nvSpPr>
+        <p:spPr>
+          <a:xfrm>
+            <a:off x="777240" y="2121408"/>
+            <a:ext cx="4937760" cy="365760"/>
+          </a:xfrm>
+          <a:prstGeom prst="rect">
+            <a:avLst/>
+          </a:prstGeom>
+          <a:noFill/>
+          <a:ln/>
+        </p:spPr>
+        <p:txBody>
+          <a:bodyPr wrap="square" rtlCol="0" anchor="ctr"/>
+          <a:lstStyle/>
+          <a:p>
+            <a:pPr indent="0" marL="0">
+              <a:buNone/>
+            </a:pPr>
+            <a:r>
+              <a:rPr lang="en-US" sz="1450" b="1" dirty="0">
+                <a:solidFill>
+                  <a:srgbClr val="E8460E"/>
+                </a:solidFill>
+                <a:latin typeface="Arial" pitchFamily="34" charset="0"/>
+                <a:ea typeface="Arial" pitchFamily="34" charset="-122"/>
+                <a:cs typeface="Arial" pitchFamily="34" charset="-120"/>
+              </a:rPr>
+              <a:t>The method — every behaviour</a:t>
+            </a:r>
+            <a:endParaRPr lang="en-US" sz="1450" dirty="0"/>
+          </a:p>
+        </p:txBody>
+      </p:sp>
+      <p:sp>
+        <p:nvSpPr>
+          <p:cNvPr id="12" name="Text 8"/>
+          <p:cNvSpPr/>
+          <p:nvPr/>
+        </p:nvSpPr>
+        <p:spPr>
+          <a:xfrm>
+            <a:off x="777240" y="2542032"/>
+            <a:ext cx="4983480" cy="2606040"/>
           </a:xfrm>
           <a:prstGeom prst="rect">
             <a:avLst/>
@@ -3692,14 +3906,18 @@
           <a:bodyPr wrap="square" rtlCol="0" anchor="t"/>
           <a:lstStyle/>
           <a:p>
-            <a:pPr indent="0" marL="0">
-              <a:lnSpc>
-                <a:spcPts val="2100"/>
-              </a:lnSpc>
-              <a:buNone/>
-            </a:pPr>
-            <a:r>
-              <a:rPr lang="en-US" sz="1400" dirty="0">
+            <a:pPr marL="203200" indent="-203200">
+              <a:lnSpc>
+                <a:spcPts val="1500"/>
+              </a:lnSpc>
+              <a:spcAft>
+                <a:spcPts val="600"/>
+              </a:spcAft>
+              <a:buSzPct val="100000"/>
+              <a:buChar char="•"/>
+            </a:pPr>
+            <a:r>
+              <a:rPr lang="en-US" sz="1150" b="1" dirty="0">
                 <a:solidFill>
                   <a:srgbClr val="3A4556"/>
                 </a:solidFill>
@@ -3707,9 +3925,557 @@
                 <a:ea typeface="Arial" pitchFamily="34" charset="-122"/>
                 <a:cs typeface="Arial" pitchFamily="34" charset="-120"/>
               </a:rPr>
-              <a:t>Blank AGENTS.md + README.md skeletons you fill in per use case. We provide these plus three filled AGENTS.md versions (CS1, CS2, CS3) as a base.</a:t>
-            </a:r>
-            <a:endParaRPr lang="en-US" sz="1400" dirty="0"/>
+              <a:t>1 · Write the spec first</a:t>
+            </a:r>
+            <a:endParaRPr lang="en-US" sz="1150" dirty="0"/>
+          </a:p>
+          <a:p>
+            <a:pPr marL="203200" indent="-203200">
+              <a:lnSpc>
+                <a:spcPts val="1500"/>
+              </a:lnSpc>
+              <a:spcAft>
+                <a:spcPts val="600"/>
+              </a:spcAft>
+              <a:buSzPct val="100000"/>
+              <a:buChar char="•"/>
+            </a:pPr>
+            <a:r>
+              <a:rPr lang="en-US" sz="1150" dirty="0">
+                <a:solidFill>
+                  <a:srgbClr val="3A4556"/>
+                </a:solidFill>
+                <a:latin typeface="Arial" pitchFamily="34" charset="0"/>
+                <a:ea typeface="Arial" pitchFamily="34" charset="-122"/>
+                <a:cs typeface="Arial" pitchFamily="34" charset="-120"/>
+              </a:rPr>
+              <a:t>   specs/SPEC-&lt;CS&gt;-NNN.md — small + pass/fail testable</a:t>
+            </a:r>
+            <a:endParaRPr lang="en-US" sz="1150" dirty="0"/>
+          </a:p>
+          <a:p>
+            <a:pPr marL="203200" indent="-203200">
+              <a:lnSpc>
+                <a:spcPts val="1500"/>
+              </a:lnSpc>
+              <a:spcAft>
+                <a:spcPts val="600"/>
+              </a:spcAft>
+              <a:buSzPct val="100000"/>
+              <a:buChar char="•"/>
+            </a:pPr>
+            <a:r>
+              <a:rPr lang="en-US" sz="1150" b="1" dirty="0">
+                <a:solidFill>
+                  <a:srgbClr val="3A4556"/>
+                </a:solidFill>
+                <a:latin typeface="Arial" pitchFamily="34" charset="0"/>
+                <a:ea typeface="Arial" pitchFamily="34" charset="-122"/>
+                <a:cs typeface="Arial" pitchFamily="34" charset="-120"/>
+              </a:rPr>
+              <a:t>2 · Implement + tag the code</a:t>
+            </a:r>
+            <a:endParaRPr lang="en-US" sz="1150" dirty="0"/>
+          </a:p>
+          <a:p>
+            <a:pPr marL="203200" indent="-203200">
+              <a:lnSpc>
+                <a:spcPts val="1500"/>
+              </a:lnSpc>
+              <a:spcAft>
+                <a:spcPts val="600"/>
+              </a:spcAft>
+              <a:buSzPct val="100000"/>
+              <a:buChar char="•"/>
+            </a:pPr>
+            <a:r>
+              <a:rPr lang="en-US" sz="1150" dirty="0">
+                <a:solidFill>
+                  <a:srgbClr val="3A4556"/>
+                </a:solidFill>
+                <a:latin typeface="Arial" pitchFamily="34" charset="0"/>
+                <a:ea typeface="Arial" pitchFamily="34" charset="-122"/>
+                <a:cs typeface="Arial" pitchFamily="34" charset="-120"/>
+              </a:rPr>
+              <a:t>   # [SPEC-&lt;CS&gt;-NNN] on the relevant line(s)</a:t>
+            </a:r>
+            <a:endParaRPr lang="en-US" sz="1150" dirty="0"/>
+          </a:p>
+          <a:p>
+            <a:pPr marL="203200" indent="-203200">
+              <a:lnSpc>
+                <a:spcPts val="1500"/>
+              </a:lnSpc>
+              <a:spcAft>
+                <a:spcPts val="600"/>
+              </a:spcAft>
+              <a:buSzPct val="100000"/>
+              <a:buChar char="•"/>
+            </a:pPr>
+            <a:r>
+              <a:rPr lang="en-US" sz="1150" b="1" dirty="0">
+                <a:solidFill>
+                  <a:srgbClr val="3A4556"/>
+                </a:solidFill>
+                <a:latin typeface="Arial" pitchFamily="34" charset="0"/>
+                <a:ea typeface="Arial" pitchFamily="34" charset="-122"/>
+                <a:cs typeface="Arial" pitchFamily="34" charset="-120"/>
+              </a:rPr>
+              <a:t>3 · Write the test with the ID</a:t>
+            </a:r>
+            <a:endParaRPr lang="en-US" sz="1150" dirty="0"/>
+          </a:p>
+          <a:p>
+            <a:pPr marL="203200" indent="-203200">
+              <a:lnSpc>
+                <a:spcPts val="1500"/>
+              </a:lnSpc>
+              <a:spcAft>
+                <a:spcPts val="600"/>
+              </a:spcAft>
+              <a:buSzPct val="100000"/>
+              <a:buChar char="•"/>
+            </a:pPr>
+            <a:r>
+              <a:rPr lang="en-US" sz="1150" dirty="0">
+                <a:solidFill>
+                  <a:srgbClr val="3A4556"/>
+                </a:solidFill>
+                <a:latin typeface="Arial" pitchFamily="34" charset="0"/>
+                <a:ea typeface="Arial" pitchFamily="34" charset="-122"/>
+                <a:cs typeface="Arial" pitchFamily="34" charset="-120"/>
+              </a:rPr>
+              <a:t>   def test_spec_&lt;cs&gt;_&lt;nnn&gt;_&lt;behaviour&gt;()</a:t>
+            </a:r>
+            <a:endParaRPr lang="en-US" sz="1150" dirty="0"/>
+          </a:p>
+          <a:p>
+            <a:pPr marL="203200" indent="-203200">
+              <a:lnSpc>
+                <a:spcPts val="1500"/>
+              </a:lnSpc>
+              <a:spcAft>
+                <a:spcPts val="600"/>
+              </a:spcAft>
+              <a:buSzPct val="100000"/>
+              <a:buChar char="•"/>
+            </a:pPr>
+            <a:r>
+              <a:rPr lang="en-US" sz="1150" b="1" dirty="0">
+                <a:solidFill>
+                  <a:srgbClr val="3A4556"/>
+                </a:solidFill>
+                <a:latin typeface="Arial" pitchFamily="34" charset="0"/>
+                <a:ea typeface="Arial" pitchFamily="34" charset="-122"/>
+                <a:cs typeface="Arial" pitchFamily="34" charset="-120"/>
+              </a:rPr>
+              <a:t>4 · Carry the ID into the PR title</a:t>
+            </a:r>
+            <a:endParaRPr lang="en-US" sz="1150" dirty="0"/>
+          </a:p>
+          <a:p>
+            <a:pPr marL="203200" indent="-203200">
+              <a:lnSpc>
+                <a:spcPts val="1500"/>
+              </a:lnSpc>
+              <a:spcAft>
+                <a:spcPts val="600"/>
+              </a:spcAft>
+              <a:buSzPct val="100000"/>
+              <a:buChar char="•"/>
+            </a:pPr>
+            <a:r>
+              <a:rPr lang="en-US" sz="1150" dirty="0">
+                <a:solidFill>
+                  <a:srgbClr val="3A4556"/>
+                </a:solidFill>
+                <a:latin typeface="Arial" pitchFamily="34" charset="0"/>
+                <a:ea typeface="Arial" pitchFamily="34" charset="-122"/>
+                <a:cs typeface="Arial" pitchFamily="34" charset="-120"/>
+              </a:rPr>
+              <a:t>   feat(...): ... [SPEC-&lt;CS&gt;-NNN]</a:t>
+            </a:r>
+            <a:endParaRPr lang="en-US" sz="1150" dirty="0"/>
+          </a:p>
+        </p:txBody>
+      </p:sp>
+      <p:sp>
+        <p:nvSpPr>
+          <p:cNvPr id="13" name="Shape 9"/>
+          <p:cNvSpPr/>
+          <p:nvPr/>
+        </p:nvSpPr>
+        <p:spPr>
+          <a:xfrm>
+            <a:off x="6172200" y="1965960"/>
+            <a:ext cx="5440680" cy="3246120"/>
+          </a:xfrm>
+          <a:prstGeom prst="roundRect">
+            <a:avLst>
+              <a:gd name="adj" fmla="val 1972"/>
+            </a:avLst>
+          </a:prstGeom>
+          <a:solidFill>
+            <a:srgbClr val="FDF1E7"/>
+          </a:solidFill>
+          <a:ln w="9525">
+            <a:solidFill>
+              <a:srgbClr val="F0DCB8"/>
+            </a:solidFill>
+            <a:prstDash val="solid"/>
+          </a:ln>
+        </p:spPr>
+      </p:sp>
+      <p:sp>
+        <p:nvSpPr>
+          <p:cNvPr id="14" name="Text 10"/>
+          <p:cNvSpPr/>
+          <p:nvPr/>
+        </p:nvSpPr>
+        <p:spPr>
+          <a:xfrm>
+            <a:off x="6400800" y="2121408"/>
+            <a:ext cx="4937760" cy="365760"/>
+          </a:xfrm>
+          <a:prstGeom prst="rect">
+            <a:avLst/>
+          </a:prstGeom>
+          <a:noFill/>
+          <a:ln/>
+        </p:spPr>
+        <p:txBody>
+          <a:bodyPr wrap="square" rtlCol="0" anchor="ctr"/>
+          <a:lstStyle/>
+          <a:p>
+            <a:pPr indent="0" marL="0">
+              <a:buNone/>
+            </a:pPr>
+            <a:r>
+              <a:rPr lang="en-US" sz="1450" b="1" dirty="0">
+                <a:solidFill>
+                  <a:srgbClr val="2E4552"/>
+                </a:solidFill>
+                <a:latin typeface="Arial" pitchFamily="34" charset="0"/>
+                <a:ea typeface="Arial" pitchFamily="34" charset="-122"/>
+                <a:cs typeface="Arial" pitchFamily="34" charset="-120"/>
+              </a:rPr>
+              <a:t>One ID · four anchors</a:t>
+            </a:r>
+            <a:endParaRPr lang="en-US" sz="1450" dirty="0"/>
+          </a:p>
+        </p:txBody>
+      </p:sp>
+      <p:sp>
+        <p:nvSpPr>
+          <p:cNvPr id="15" name="Shape 11"/>
+          <p:cNvSpPr/>
+          <p:nvPr/>
+        </p:nvSpPr>
+        <p:spPr>
+          <a:xfrm>
+            <a:off x="6400800" y="2542032"/>
+            <a:ext cx="4983480" cy="2606040"/>
+          </a:xfrm>
+          <a:prstGeom prst="roundRect">
+            <a:avLst>
+              <a:gd name="adj" fmla="val 2105"/>
+            </a:avLst>
+          </a:prstGeom>
+          <a:solidFill>
+            <a:srgbClr val="13212B"/>
+          </a:solidFill>
+          <a:ln w="9525">
+            <a:solidFill>
+              <a:srgbClr val="2C3E4A"/>
+            </a:solidFill>
+            <a:prstDash val="solid"/>
+          </a:ln>
+        </p:spPr>
+      </p:sp>
+      <p:sp>
+        <p:nvSpPr>
+          <p:cNvPr id="16" name="Text 12"/>
+          <p:cNvSpPr/>
+          <p:nvPr/>
+        </p:nvSpPr>
+        <p:spPr>
+          <a:xfrm>
+            <a:off x="6537960" y="2615184"/>
+            <a:ext cx="4709160" cy="237744"/>
+          </a:xfrm>
+          <a:prstGeom prst="rect">
+            <a:avLst/>
+          </a:prstGeom>
+          <a:noFill/>
+          <a:ln/>
+        </p:spPr>
+        <p:txBody>
+          <a:bodyPr wrap="square" rtlCol="0" anchor="ctr"/>
+          <a:lstStyle/>
+          <a:p>
+            <a:pPr indent="0" marL="0">
+              <a:buNone/>
+            </a:pPr>
+            <a:r>
+              <a:rPr lang="en-US" sz="900" b="1" spc="100" kern="0" dirty="0">
+                <a:solidFill>
+                  <a:srgbClr val="7FA8BD"/>
+                </a:solidFill>
+                <a:latin typeface="Arial" pitchFamily="34" charset="0"/>
+                <a:ea typeface="Arial" pitchFamily="34" charset="-122"/>
+                <a:cs typeface="Arial" pitchFamily="34" charset="-120"/>
+              </a:rPr>
+              <a:t>SPEC-CS3-007</a:t>
+            </a:r>
+            <a:endParaRPr lang="en-US" sz="900" dirty="0"/>
+          </a:p>
+        </p:txBody>
+      </p:sp>
+      <p:sp>
+        <p:nvSpPr>
+          <p:cNvPr id="17" name="Text 13"/>
+          <p:cNvSpPr/>
+          <p:nvPr/>
+        </p:nvSpPr>
+        <p:spPr>
+          <a:xfrm>
+            <a:off x="6537960" y="2871216"/>
+            <a:ext cx="4709160" cy="2185416"/>
+          </a:xfrm>
+          <a:prstGeom prst="rect">
+            <a:avLst/>
+          </a:prstGeom>
+          <a:noFill/>
+          <a:ln/>
+        </p:spPr>
+        <p:txBody>
+          <a:bodyPr wrap="square" rtlCol="0" anchor="t"/>
+          <a:lstStyle/>
+          <a:p>
+            <a:pPr indent="0" marL="0">
+              <a:lnSpc>
+                <a:spcPts val="1330"/>
+              </a:lnSpc>
+              <a:buNone/>
+            </a:pPr>
+            <a:r>
+              <a:rPr lang="en-US" sz="950" dirty="0">
+                <a:solidFill>
+                  <a:srgbClr val="E7EEF2"/>
+                </a:solidFill>
+                <a:latin typeface="Courier New" pitchFamily="34" charset="0"/>
+                <a:ea typeface="Courier New" pitchFamily="34" charset="-122"/>
+                <a:cs typeface="Courier New" pitchFamily="34" charset="-120"/>
+              </a:rPr>
+              <a:t>Spec   specs/SPEC-CS3-007.md</a:t>
+            </a:r>
+            <a:endParaRPr lang="en-US" sz="950" dirty="0"/>
+          </a:p>
+          <a:p>
+            <a:pPr indent="0" marL="0">
+              <a:lnSpc>
+                <a:spcPts val="1330"/>
+              </a:lnSpc>
+              <a:buNone/>
+            </a:pPr>
+            <a:r>
+              <a:rPr lang="en-US" sz="950" dirty="0">
+                <a:solidFill>
+                  <a:srgbClr val="E7EEF2"/>
+                </a:solidFill>
+                <a:latin typeface="Courier New" pitchFamily="34" charset="0"/>
+                <a:ea typeface="Courier New" pitchFamily="34" charset="-122"/>
+                <a:cs typeface="Courier New" pitchFamily="34" charset="-120"/>
+              </a:rPr>
+              <a:t>         "no prod change without L4 gate"</a:t>
+            </a:r>
+            <a:endParaRPr lang="en-US" sz="950" dirty="0"/>
+          </a:p>
+          <a:p>
+            <a:pPr indent="0" marL="0">
+              <a:lnSpc>
+                <a:spcPts val="1330"/>
+              </a:lnSpc>
+              <a:buNone/>
+            </a:pPr>
+            <a:r>
+              <a:rPr lang="en-US" sz="950" dirty="0">
+                <a:solidFill>
+                  <a:srgbClr val="E7EEF2"/>
+                </a:solidFill>
+                <a:latin typeface="Courier New" pitchFamily="34" charset="0"/>
+                <a:ea typeface="Courier New" pitchFamily="34" charset="-122"/>
+                <a:cs typeface="Courier New" pitchFamily="34" charset="-120"/>
+              </a:rPr>
+              <a:t>Code   # [SPEC-CS3-007] L4 gate blocks</a:t>
+            </a:r>
+            <a:endParaRPr lang="en-US" sz="950" dirty="0"/>
+          </a:p>
+          <a:p>
+            <a:pPr indent="0" marL="0">
+              <a:lnSpc>
+                <a:spcPts val="1330"/>
+              </a:lnSpc>
+              <a:buNone/>
+            </a:pPr>
+            <a:r>
+              <a:rPr lang="en-US" sz="950" dirty="0">
+                <a:solidFill>
+                  <a:srgbClr val="E7EEF2"/>
+                </a:solidFill>
+                <a:latin typeface="Courier New" pitchFamily="34" charset="0"/>
+                <a:ea typeface="Courier New" pitchFamily="34" charset="-122"/>
+                <a:cs typeface="Courier New" pitchFamily="34" charset="-120"/>
+              </a:rPr>
+              <a:t>         apply without human approval</a:t>
+            </a:r>
+            <a:endParaRPr lang="en-US" sz="950" dirty="0"/>
+          </a:p>
+          <a:p>
+            <a:pPr indent="0" marL="0">
+              <a:lnSpc>
+                <a:spcPts val="1330"/>
+              </a:lnSpc>
+              <a:buNone/>
+            </a:pPr>
+            <a:r>
+              <a:rPr lang="en-US" sz="950" dirty="0">
+                <a:solidFill>
+                  <a:srgbClr val="E7EEF2"/>
+                </a:solidFill>
+                <a:latin typeface="Courier New" pitchFamily="34" charset="0"/>
+                <a:ea typeface="Courier New" pitchFamily="34" charset="-122"/>
+                <a:cs typeface="Courier New" pitchFamily="34" charset="-120"/>
+              </a:rPr>
+              <a:t>Test   def test_spec_cs3_007_apply_</a:t>
+            </a:r>
+            <a:endParaRPr lang="en-US" sz="950" dirty="0"/>
+          </a:p>
+          <a:p>
+            <a:pPr indent="0" marL="0">
+              <a:lnSpc>
+                <a:spcPts val="1330"/>
+              </a:lnSpc>
+              <a:buNone/>
+            </a:pPr>
+            <a:r>
+              <a:rPr lang="en-US" sz="950" dirty="0">
+                <a:solidFill>
+                  <a:srgbClr val="E7EEF2"/>
+                </a:solidFill>
+                <a:latin typeface="Courier New" pitchFamily="34" charset="0"/>
+                <a:ea typeface="Courier New" pitchFamily="34" charset="-122"/>
+                <a:cs typeface="Courier New" pitchFamily="34" charset="-120"/>
+              </a:rPr>
+              <a:t>         blocked_without_approval()</a:t>
+            </a:r>
+            <a:endParaRPr lang="en-US" sz="950" dirty="0"/>
+          </a:p>
+          <a:p>
+            <a:pPr indent="0" marL="0">
+              <a:lnSpc>
+                <a:spcPts val="1330"/>
+              </a:lnSpc>
+              <a:buNone/>
+            </a:pPr>
+            <a:r>
+              <a:rPr lang="en-US" sz="950" dirty="0">
+                <a:solidFill>
+                  <a:srgbClr val="E7EEF2"/>
+                </a:solidFill>
+                <a:latin typeface="Courier New" pitchFamily="34" charset="0"/>
+                <a:ea typeface="Courier New" pitchFamily="34" charset="-122"/>
+                <a:cs typeface="Courier New" pitchFamily="34" charset="-120"/>
+              </a:rPr>
+              <a:t>PR     feat(gov): human gate [SPEC-CS3-007]</a:t>
+            </a:r>
+            <a:endParaRPr lang="en-US" sz="950" dirty="0"/>
+          </a:p>
+        </p:txBody>
+      </p:sp>
+      <p:sp>
+        <p:nvSpPr>
+          <p:cNvPr id="18" name="Shape 14"/>
+          <p:cNvSpPr/>
+          <p:nvPr/>
+        </p:nvSpPr>
+        <p:spPr>
+          <a:xfrm>
+            <a:off x="548640" y="5349240"/>
+            <a:ext cx="11064240" cy="868680"/>
+          </a:xfrm>
+          <a:prstGeom prst="roundRect">
+            <a:avLst>
+              <a:gd name="adj" fmla="val 7368"/>
+            </a:avLst>
+          </a:prstGeom>
+          <a:solidFill>
+            <a:srgbClr val="FDF1E7"/>
+          </a:solidFill>
+          <a:ln w="9525">
+            <a:solidFill>
+              <a:srgbClr val="F0DCB8"/>
+            </a:solidFill>
+            <a:prstDash val="solid"/>
+          </a:ln>
+        </p:spPr>
+      </p:sp>
+      <p:sp>
+        <p:nvSpPr>
+          <p:cNvPr id="19" name="Text 15"/>
+          <p:cNvSpPr/>
+          <p:nvPr/>
+        </p:nvSpPr>
+        <p:spPr>
+          <a:xfrm>
+            <a:off x="777240" y="5458968"/>
+            <a:ext cx="10607040" cy="640080"/>
+          </a:xfrm>
+          <a:prstGeom prst="rect">
+            <a:avLst/>
+          </a:prstGeom>
+          <a:noFill/>
+          <a:ln/>
+        </p:spPr>
+        <p:txBody>
+          <a:bodyPr wrap="square" rtlCol="0" anchor="ctr"/>
+          <a:lstStyle/>
+          <a:p>
+            <a:pPr indent="0" marL="0">
+              <a:lnSpc>
+                <a:spcPts val="1500"/>
+              </a:lnSpc>
+              <a:buNone/>
+            </a:pPr>
+            <a:r>
+              <a:rPr lang="en-US" sz="1150" b="1" dirty="0">
+                <a:solidFill>
+                  <a:srgbClr val="E8460E"/>
+                </a:solidFill>
+                <a:latin typeface="Arial" pitchFamily="34" charset="0"/>
+                <a:ea typeface="Arial" pitchFamily="34" charset="-122"/>
+                <a:cs typeface="Arial" pitchFamily="34" charset="-120"/>
+              </a:rPr>
+              <a:t>Traceability check in CI:  </a:t>
+            </a:r>
+            <a:pPr indent="0" marL="0">
+              <a:lnSpc>
+                <a:spcPts val="1500"/>
+              </a:lnSpc>
+              <a:buNone/>
+            </a:pPr>
+            <a:r>
+              <a:rPr lang="en-US" sz="1150" dirty="0">
+                <a:solidFill>
+                  <a:srgbClr val="1F2937"/>
+                </a:solidFill>
+                <a:latin typeface="Arial" pitchFamily="34" charset="0"/>
+                <a:ea typeface="Arial" pitchFamily="34" charset="-122"/>
+                <a:cs typeface="Arial" pitchFamily="34" charset="-120"/>
+              </a:rPr>
+              <a:t>scripts/trace_check.py — every spec ID must appear in ≥1 code file AND ≥1 test. An orphan spec, or an ID with no spec, FAILS the build. grep one ID → spec + code + test + PR.</a:t>
+            </a:r>
+            <a:endParaRPr lang="en-US" sz="1150" dirty="0"/>
           </a:p>
         </p:txBody>
       </p:sp>
@@ -3747,108 +4513,49 @@
       </p:grpSpPr>
       <p:sp>
         <p:nvSpPr>
-          <p:cNvPr id="2" name="Text 0"/>
-          <p:cNvSpPr/>
-          <p:nvPr/>
-        </p:nvSpPr>
-        <p:spPr>
-          <a:xfrm>
-            <a:off x="548640" y="384048"/>
-            <a:ext cx="10058400" cy="274320"/>
-          </a:xfrm>
-          <a:prstGeom prst="rect">
-            <a:avLst/>
-          </a:prstGeom>
-          <a:noFill/>
-          <a:ln/>
-        </p:spPr>
-        <p:txBody>
-          <a:bodyPr wrap="square" rtlCol="0" anchor="ctr"/>
-          <a:lstStyle/>
-          <a:p>
-            <a:pPr indent="0" marL="0">
-              <a:buNone/>
-            </a:pPr>
-            <a:r>
-              <a:rPr lang="en-US" sz="1100" b="1" spc="200" kern="0" dirty="0">
-                <a:solidFill>
-                  <a:srgbClr val="E8460E"/>
-                </a:solidFill>
-                <a:latin typeface="Arial" pitchFamily="34" charset="0"/>
-                <a:ea typeface="Arial" pitchFamily="34" charset="-122"/>
-                <a:cs typeface="Arial" pitchFamily="34" charset="-120"/>
-              </a:rPr>
-              <a:t>SKELETON</a:t>
-            </a:r>
-            <a:endParaRPr lang="en-US" sz="1100" dirty="0"/>
-          </a:p>
-        </p:txBody>
-      </p:sp>
-      <p:sp>
-        <p:nvSpPr>
-          <p:cNvPr id="3" name="Text 1"/>
-          <p:cNvSpPr/>
-          <p:nvPr/>
-        </p:nvSpPr>
-        <p:spPr>
-          <a:xfrm>
-            <a:off x="548640" y="621792"/>
-            <a:ext cx="10515600" cy="640080"/>
-          </a:xfrm>
-          <a:prstGeom prst="rect">
-            <a:avLst/>
-          </a:prstGeom>
-          <a:noFill/>
-          <a:ln/>
-        </p:spPr>
-        <p:txBody>
-          <a:bodyPr wrap="square" rtlCol="0" anchor="t"/>
-          <a:lstStyle/>
-          <a:p>
-            <a:pPr indent="0" marL="0">
-              <a:buNone/>
-            </a:pPr>
-            <a:r>
-              <a:rPr lang="en-US" sz="2500" b="1" dirty="0">
-                <a:solidFill>
-                  <a:srgbClr val="2E4552"/>
-                </a:solidFill>
-                <a:latin typeface="Arial" pitchFamily="34" charset="0"/>
-                <a:ea typeface="Arial" pitchFamily="34" charset="-122"/>
-                <a:cs typeface="Arial" pitchFamily="34" charset="-120"/>
-              </a:rPr>
-              <a:t>AGENTS.md Skeleton (1 of 2)</a:t>
-            </a:r>
-            <a:endParaRPr lang="en-US" sz="2500" dirty="0"/>
-          </a:p>
-        </p:txBody>
-      </p:sp>
-      <p:sp>
-        <p:nvSpPr>
-          <p:cNvPr id="4" name="Shape 2"/>
-          <p:cNvSpPr/>
-          <p:nvPr/>
-        </p:nvSpPr>
-        <p:spPr>
-          <a:xfrm>
-            <a:off x="548640" y="1298448"/>
-            <a:ext cx="11064240" cy="0"/>
-          </a:xfrm>
-          <a:prstGeom prst="line">
-            <a:avLst/>
-          </a:prstGeom>
-          <a:noFill/>
-          <a:ln w="19050">
-            <a:solidFill>
-              <a:srgbClr val="FF6600"/>
-            </a:solidFill>
-            <a:prstDash val="solid"/>
-          </a:ln>
+          <p:cNvPr id="2" name="Shape 0"/>
+          <p:cNvSpPr/>
+          <p:nvPr/>
+        </p:nvSpPr>
+        <p:spPr>
+          <a:xfrm>
+            <a:off x="0" y="0"/>
+            <a:ext cx="7406640" cy="6858000"/>
+          </a:xfrm>
+          <a:prstGeom prst="rect">
+            <a:avLst/>
+          </a:prstGeom>
+          <a:solidFill>
+            <a:srgbClr val="E8460E"/>
+          </a:solidFill>
+          <a:ln/>
+        </p:spPr>
+      </p:sp>
+      <p:sp>
+        <p:nvSpPr>
+          <p:cNvPr id="3" name="Shape 1"/>
+          <p:cNvSpPr/>
+          <p:nvPr/>
+        </p:nvSpPr>
+        <p:spPr>
+          <a:xfrm>
+            <a:off x="5394960" y="0"/>
+            <a:ext cx="2011680" cy="6858000"/>
+          </a:xfrm>
+          <a:prstGeom prst="rect">
+            <a:avLst/>
+          </a:prstGeom>
+          <a:solidFill>
+            <a:srgbClr val="FF6600">
+              <a:alpha val="70000"/>
+            </a:srgbClr>
+          </a:solidFill>
+          <a:ln/>
         </p:spPr>
       </p:sp>
       <p:pic>
         <p:nvPicPr>
-          <p:cNvPr id="5" name="Image 0" descr="unext_icon.png">    </p:cNvPr>
+          <p:cNvPr id="4" name="Image 0" descr="unext_white_lockup.png">    </p:cNvPr>
           <p:cNvPicPr>
             <a:picLocks noChangeAspect="1"/>
           </p:cNvPicPr>
@@ -3862,79 +4569,17 @@
         </p:blipFill>
         <p:spPr>
           <a:xfrm>
-            <a:off x="11430000" y="365760"/>
-            <a:ext cx="329184" cy="493776"/>
+            <a:off x="502920" y="457200"/>
+            <a:ext cx="2194560" cy="457200"/>
           </a:xfrm>
           <a:prstGeom prst="rect">
             <a:avLst/>
           </a:prstGeom>
         </p:spPr>
       </p:pic>
-      <p:sp>
-        <p:nvSpPr>
-          <p:cNvPr id="6" name="Shape 3"/>
-          <p:cNvSpPr/>
-          <p:nvPr/>
-        </p:nvSpPr>
-        <p:spPr>
-          <a:xfrm>
-            <a:off x="548640" y="6400800"/>
-            <a:ext cx="9418320" cy="0"/>
-          </a:xfrm>
-          <a:prstGeom prst="line">
-            <a:avLst/>
-          </a:prstGeom>
-          <a:noFill/>
-          <a:ln w="9525">
-            <a:solidFill>
-              <a:srgbClr val="F0DCB8"/>
-            </a:solidFill>
-            <a:prstDash val="solid"/>
-          </a:ln>
-        </p:spPr>
-      </p:sp>
-      <p:sp>
-        <p:nvSpPr>
-          <p:cNvPr id="7" name="Text 4"/>
-          <p:cNvSpPr/>
-          <p:nvPr/>
-        </p:nvSpPr>
-        <p:spPr>
-          <a:xfrm>
-            <a:off x="548640" y="6437376"/>
-            <a:ext cx="9326880" cy="365760"/>
-          </a:xfrm>
-          <a:prstGeom prst="rect">
-            <a:avLst/>
-          </a:prstGeom>
-          <a:noFill/>
-          <a:ln/>
-        </p:spPr>
-        <p:txBody>
-          <a:bodyPr wrap="square" rtlCol="0" anchor="t"/>
-          <a:lstStyle/>
-          <a:p>
-            <a:pPr indent="0" marL="0">
-              <a:buNone/>
-            </a:pPr>
-            <a:r>
-              <a:rPr lang="en-US" sz="700" dirty="0">
-                <a:solidFill>
-                  <a:srgbClr val="767171"/>
-                </a:solidFill>
-                <a:latin typeface="Arial" pitchFamily="34" charset="0"/>
-                <a:ea typeface="Arial" pitchFamily="34" charset="-122"/>
-                <a:cs typeface="Arial" pitchFamily="34" charset="-120"/>
-              </a:rPr>
-              <a:t>The content and the program approach is strictly confidential. It is strictly forbidden to share any part of this program design approach with any third party</a:t>
-            </a:r>
-            <a:endParaRPr lang="en-US" sz="700" dirty="0"/>
-          </a:p>
-        </p:txBody>
-      </p:sp>
       <p:pic>
         <p:nvPicPr>
-          <p:cNvPr id="8" name="Image 1" descr="unext_dark_lockup.png">    </p:cNvPr>
+          <p:cNvPr id="5" name="Image 1" descr="unext_icon.png">    </p:cNvPr>
           <p:cNvPicPr>
             <a:picLocks noChangeAspect="1"/>
           </p:cNvPicPr>
@@ -3948,8 +4593,8 @@
         </p:blipFill>
         <p:spPr>
           <a:xfrm>
-            <a:off x="10195560" y="6419088"/>
-            <a:ext cx="1417320" cy="301752"/>
+            <a:off x="9646920" y="502920"/>
+            <a:ext cx="457200" cy="685800"/>
           </a:xfrm>
           <a:prstGeom prst="rect">
             <a:avLst/>
@@ -3958,26 +4603,103 @@
       </p:pic>
       <p:sp>
         <p:nvSpPr>
-          <p:cNvPr id="9" name="Shape 5"/>
-          <p:cNvSpPr/>
-          <p:nvPr/>
-        </p:nvSpPr>
-        <p:spPr>
-          <a:xfrm>
-            <a:off x="548640" y="1508760"/>
-            <a:ext cx="11064240" cy="4526280"/>
-          </a:xfrm>
-          <a:prstGeom prst="roundRect">
-            <a:avLst>
-              <a:gd name="adj" fmla="val 1212"/>
-            </a:avLst>
-          </a:prstGeom>
-          <a:solidFill>
-            <a:srgbClr val="13212B"/>
-          </a:solidFill>
-          <a:ln w="9525">
+          <p:cNvPr id="6" name="Text 2"/>
+          <p:cNvSpPr/>
+          <p:nvPr/>
+        </p:nvSpPr>
+        <p:spPr>
+          <a:xfrm>
+            <a:off x="548640" y="2514600"/>
+            <a:ext cx="6400800" cy="365760"/>
+          </a:xfrm>
+          <a:prstGeom prst="rect">
+            <a:avLst/>
+          </a:prstGeom>
+          <a:noFill/>
+          <a:ln/>
+        </p:spPr>
+        <p:txBody>
+          <a:bodyPr wrap="square" rtlCol="0" anchor="ctr"/>
+          <a:lstStyle/>
+          <a:p>
+            <a:pPr indent="0" marL="0">
+              <a:buNone/>
+            </a:pPr>
+            <a:r>
+              <a:rPr lang="en-US" sz="1400" b="1" spc="300" kern="0" dirty="0">
+                <a:solidFill>
+                  <a:srgbClr val="FFE9DC"/>
+                </a:solidFill>
+                <a:latin typeface="Arial" pitchFamily="34" charset="0"/>
+                <a:ea typeface="Arial" pitchFamily="34" charset="-122"/>
+                <a:cs typeface="Arial" pitchFamily="34" charset="-120"/>
+              </a:rPr>
+              <a:t>PART 3</a:t>
+            </a:r>
+            <a:endParaRPr lang="en-US" sz="1400" dirty="0"/>
+          </a:p>
+        </p:txBody>
+      </p:sp>
+      <p:sp>
+        <p:nvSpPr>
+          <p:cNvPr id="7" name="Text 3"/>
+          <p:cNvSpPr/>
+          <p:nvPr/>
+        </p:nvSpPr>
+        <p:spPr>
+          <a:xfrm>
+            <a:off x="548640" y="2880360"/>
+            <a:ext cx="6492240" cy="1463040"/>
+          </a:xfrm>
+          <a:prstGeom prst="rect">
+            <a:avLst/>
+          </a:prstGeom>
+          <a:noFill/>
+          <a:ln/>
+        </p:spPr>
+        <p:txBody>
+          <a:bodyPr wrap="square" rtlCol="0" anchor="t"/>
+          <a:lstStyle/>
+          <a:p>
+            <a:pPr indent="0" marL="0">
+              <a:lnSpc>
+                <a:spcPts val="3600"/>
+              </a:lnSpc>
+              <a:buNone/>
+            </a:pPr>
+            <a:r>
+              <a:rPr lang="en-US" sz="3200" b="1" dirty="0">
+                <a:solidFill>
+                  <a:srgbClr val="FFFFFF"/>
+                </a:solidFill>
+                <a:latin typeface="Arial" pitchFamily="34" charset="0"/>
+                <a:ea typeface="Arial" pitchFamily="34" charset="-122"/>
+                <a:cs typeface="Arial" pitchFamily="34" charset="-120"/>
+              </a:rPr>
+              <a:t>The Skeleton — Copy This to Start</a:t>
+            </a:r>
+            <a:endParaRPr lang="en-US" sz="3200" dirty="0"/>
+          </a:p>
+        </p:txBody>
+      </p:sp>
+      <p:sp>
+        <p:nvSpPr>
+          <p:cNvPr id="8" name="Shape 4"/>
+          <p:cNvSpPr/>
+          <p:nvPr/>
+        </p:nvSpPr>
+        <p:spPr>
+          <a:xfrm>
+            <a:off x="566928" y="4343400"/>
+            <a:ext cx="2926080" cy="0"/>
+          </a:xfrm>
+          <a:prstGeom prst="line">
+            <a:avLst/>
+          </a:prstGeom>
+          <a:noFill/>
+          <a:ln w="19050">
             <a:solidFill>
-              <a:srgbClr val="2C3E4A"/>
+              <a:srgbClr val="FFD9C2"/>
             </a:solidFill>
             <a:prstDash val="solid"/>
           </a:ln>
@@ -3985,53 +4707,14 @@
       </p:sp>
       <p:sp>
         <p:nvSpPr>
-          <p:cNvPr id="10" name="Text 6"/>
-          <p:cNvSpPr/>
-          <p:nvPr/>
-        </p:nvSpPr>
-        <p:spPr>
-          <a:xfrm>
-            <a:off x="685800" y="1581912"/>
-            <a:ext cx="10789920" cy="237744"/>
-          </a:xfrm>
-          <a:prstGeom prst="rect">
-            <a:avLst/>
-          </a:prstGeom>
-          <a:noFill/>
-          <a:ln/>
-        </p:spPr>
-        <p:txBody>
-          <a:bodyPr wrap="square" rtlCol="0" anchor="ctr"/>
-          <a:lstStyle/>
-          <a:p>
-            <a:pPr indent="0" marL="0">
-              <a:buNone/>
-            </a:pPr>
-            <a:r>
-              <a:rPr lang="en-US" sz="900" b="1" spc="100" kern="0" dirty="0">
-                <a:solidFill>
-                  <a:srgbClr val="7FA8BD"/>
-                </a:solidFill>
-                <a:latin typeface="Arial" pitchFamily="34" charset="0"/>
-                <a:ea typeface="Arial" pitchFamily="34" charset="-122"/>
-                <a:cs typeface="Arial" pitchFamily="34" charset="-120"/>
-              </a:rPr>
-              <a:t>AGENTS.md</a:t>
-            </a:r>
-            <a:endParaRPr lang="en-US" sz="900" dirty="0"/>
-          </a:p>
-        </p:txBody>
-      </p:sp>
-      <p:sp>
-        <p:nvSpPr>
-          <p:cNvPr id="11" name="Text 7"/>
-          <p:cNvSpPr/>
-          <p:nvPr/>
-        </p:nvSpPr>
-        <p:spPr>
-          <a:xfrm>
-            <a:off x="685800" y="1837944"/>
-            <a:ext cx="10789920" cy="4105656"/>
+          <p:cNvPr id="9" name="Text 5"/>
+          <p:cNvSpPr/>
+          <p:nvPr/>
+        </p:nvSpPr>
+        <p:spPr>
+          <a:xfrm>
+            <a:off x="7772400" y="2880360"/>
+            <a:ext cx="3931920" cy="2743200"/>
           </a:xfrm>
           <a:prstGeom prst="rect">
             <a:avLst/>
@@ -4045,327 +4728,22 @@
           <a:p>
             <a:pPr indent="0" marL="0">
               <a:lnSpc>
-                <a:spcPts val="1470"/>
-              </a:lnSpc>
-              <a:buNone/>
-            </a:pPr>
-            <a:r>
-              <a:rPr lang="en-US" sz="1050" dirty="0">
-                <a:solidFill>
-                  <a:srgbClr val="E7EEF2"/>
-                </a:solidFill>
-                <a:latin typeface="Courier New" pitchFamily="34" charset="0"/>
-                <a:ea typeface="Courier New" pitchFamily="34" charset="-122"/>
-                <a:cs typeface="Courier New" pitchFamily="34" charset="-120"/>
-              </a:rPr>
-              <a:t># AGENTS.md — &lt;USE CASE NAME&gt;</a:t>
-            </a:r>
-            <a:endParaRPr lang="en-US" sz="1050" dirty="0"/>
-          </a:p>
-          <a:p>
-            <a:pPr indent="0" marL="0">
-              <a:lnSpc>
-                <a:spcPts val="1470"/>
-              </a:lnSpc>
-              <a:buNone/>
-            </a:pPr>
-            <a:endParaRPr lang="en-US" sz="1050" dirty="0"/>
-          </a:p>
-          <a:p>
-            <a:pPr indent="0" marL="0">
-              <a:lnSpc>
-                <a:spcPts val="1470"/>
-              </a:lnSpc>
-              <a:buNone/>
-            </a:pPr>
-            <a:r>
-              <a:rPr lang="en-US" sz="1050" dirty="0">
-                <a:solidFill>
-                  <a:srgbClr val="E7EEF2"/>
-                </a:solidFill>
-                <a:latin typeface="Courier New" pitchFamily="34" charset="0"/>
-                <a:ea typeface="Courier New" pitchFamily="34" charset="-122"/>
-                <a:cs typeface="Courier New" pitchFamily="34" charset="-120"/>
-              </a:rPr>
-              <a:t>## 1. Project</a:t>
-            </a:r>
-            <a:endParaRPr lang="en-US" sz="1050" dirty="0"/>
-          </a:p>
-          <a:p>
-            <a:pPr indent="0" marL="0">
-              <a:lnSpc>
-                <a:spcPts val="1470"/>
-              </a:lnSpc>
-              <a:buNone/>
-            </a:pPr>
-            <a:r>
-              <a:rPr lang="en-US" sz="1050" dirty="0">
-                <a:solidFill>
-                  <a:srgbClr val="E7EEF2"/>
-                </a:solidFill>
-                <a:latin typeface="Courier New" pitchFamily="34" charset="0"/>
-                <a:ea typeface="Courier New" pitchFamily="34" charset="-122"/>
-                <a:cs typeface="Courier New" pitchFamily="34" charset="-120"/>
-              </a:rPr>
-              <a:t>- Goal (one line): &lt;what this system does&gt;</a:t>
-            </a:r>
-            <a:endParaRPr lang="en-US" sz="1050" dirty="0"/>
-          </a:p>
-          <a:p>
-            <a:pPr indent="0" marL="0">
-              <a:lnSpc>
-                <a:spcPts val="1470"/>
-              </a:lnSpc>
-              <a:buNone/>
-            </a:pPr>
-            <a:r>
-              <a:rPr lang="en-US" sz="1050" dirty="0">
-                <a:solidFill>
-                  <a:srgbClr val="E7EEF2"/>
-                </a:solidFill>
-                <a:latin typeface="Courier New" pitchFamily="34" charset="0"/>
-                <a:ea typeface="Courier New" pitchFamily="34" charset="-122"/>
-                <a:cs typeface="Courier New" pitchFamily="34" charset="-120"/>
-              </a:rPr>
-              <a:t>- Use case: &lt;CS1/CS2/CS3&gt;   Owner: &lt;name&gt;</a:t>
-            </a:r>
-            <a:endParaRPr lang="en-US" sz="1050" dirty="0"/>
-          </a:p>
-          <a:p>
-            <a:pPr indent="0" marL="0">
-              <a:lnSpc>
-                <a:spcPts val="1470"/>
-              </a:lnSpc>
-              <a:buNone/>
-            </a:pPr>
-            <a:endParaRPr lang="en-US" sz="1050" dirty="0"/>
-          </a:p>
-          <a:p>
-            <a:pPr indent="0" marL="0">
-              <a:lnSpc>
-                <a:spcPts val="1470"/>
-              </a:lnSpc>
-              <a:buNone/>
-            </a:pPr>
-            <a:r>
-              <a:rPr lang="en-US" sz="1050" dirty="0">
-                <a:solidFill>
-                  <a:srgbClr val="E7EEF2"/>
-                </a:solidFill>
-                <a:latin typeface="Courier New" pitchFamily="34" charset="0"/>
-                <a:ea typeface="Courier New" pitchFamily="34" charset="-122"/>
-                <a:cs typeface="Courier New" pitchFamily="34" charset="-120"/>
-              </a:rPr>
-              <a:t>## 2. Tech stack &amp; runtime</a:t>
-            </a:r>
-            <a:endParaRPr lang="en-US" sz="1050" dirty="0"/>
-          </a:p>
-          <a:p>
-            <a:pPr indent="0" marL="0">
-              <a:lnSpc>
-                <a:spcPts val="1470"/>
-              </a:lnSpc>
-              <a:buNone/>
-            </a:pPr>
-            <a:r>
-              <a:rPr lang="en-US" sz="1050" dirty="0">
-                <a:solidFill>
-                  <a:srgbClr val="E7EEF2"/>
-                </a:solidFill>
-                <a:latin typeface="Courier New" pitchFamily="34" charset="0"/>
-                <a:ea typeface="Courier New" pitchFamily="34" charset="-122"/>
-                <a:cs typeface="Courier New" pitchFamily="34" charset="-120"/>
-              </a:rPr>
-              <a:t>- Python 3.11 · uv (uv sync --frozen) · FastAPI (async) · &lt;LangGraph/CrewAI&gt;</a:t>
-            </a:r>
-            <a:endParaRPr lang="en-US" sz="1050" dirty="0"/>
-          </a:p>
-          <a:p>
-            <a:pPr indent="0" marL="0">
-              <a:lnSpc>
-                <a:spcPts val="1470"/>
-              </a:lnSpc>
-              <a:buNone/>
-            </a:pPr>
-            <a:r>
-              <a:rPr lang="en-US" sz="1050" dirty="0">
-                <a:solidFill>
-                  <a:srgbClr val="E7EEF2"/>
-                </a:solidFill>
-                <a:latin typeface="Courier New" pitchFamily="34" charset="0"/>
-                <a:ea typeface="Courier New" pitchFamily="34" charset="-122"/>
-                <a:cs typeface="Courier New" pitchFamily="34" charset="-120"/>
-              </a:rPr>
-              <a:t>- Runtime model: LiteLLM gateway http://&lt;gateway&gt;:4000/v1  (NO external APIs)</a:t>
-            </a:r>
-            <a:endParaRPr lang="en-US" sz="1050" dirty="0"/>
-          </a:p>
-          <a:p>
-            <a:pPr indent="0" marL="0">
-              <a:lnSpc>
-                <a:spcPts val="1470"/>
-              </a:lnSpc>
-              <a:buNone/>
-            </a:pPr>
-            <a:r>
-              <a:rPr lang="en-US" sz="1050" dirty="0">
-                <a:solidFill>
-                  <a:srgbClr val="E7EEF2"/>
-                </a:solidFill>
-                <a:latin typeface="Courier New" pitchFamily="34" charset="0"/>
-                <a:ea typeface="Courier New" pitchFamily="34" charset="-122"/>
-                <a:cs typeface="Courier New" pitchFamily="34" charset="-120"/>
-              </a:rPr>
-              <a:t>- Coding agent: OpenCode + Kimi-K2.5 · Secrets from .env only</a:t>
-            </a:r>
-            <a:endParaRPr lang="en-US" sz="1050" dirty="0"/>
-          </a:p>
-          <a:p>
-            <a:pPr indent="0" marL="0">
-              <a:lnSpc>
-                <a:spcPts val="1470"/>
-              </a:lnSpc>
-              <a:buNone/>
-            </a:pPr>
-            <a:endParaRPr lang="en-US" sz="1050" dirty="0"/>
-          </a:p>
-          <a:p>
-            <a:pPr indent="0" marL="0">
-              <a:lnSpc>
-                <a:spcPts val="1470"/>
-              </a:lnSpc>
-              <a:buNone/>
-            </a:pPr>
-            <a:r>
-              <a:rPr lang="en-US" sz="1050" dirty="0">
-                <a:solidFill>
-                  <a:srgbClr val="E7EEF2"/>
-                </a:solidFill>
-                <a:latin typeface="Courier New" pitchFamily="34" charset="0"/>
-                <a:ea typeface="Courier New" pitchFamily="34" charset="-122"/>
-                <a:cs typeface="Courier New" pitchFamily="34" charset="-120"/>
-              </a:rPr>
-              <a:t>## 3. Golden rules for the coding agent</a:t>
-            </a:r>
-            <a:endParaRPr lang="en-US" sz="1050" dirty="0"/>
-          </a:p>
-          <a:p>
-            <a:pPr indent="0" marL="0">
-              <a:lnSpc>
-                <a:spcPts val="1470"/>
-              </a:lnSpc>
-              <a:buNone/>
-            </a:pPr>
-            <a:r>
-              <a:rPr lang="en-US" sz="1050" dirty="0">
-                <a:solidFill>
-                  <a:srgbClr val="E7EEF2"/>
-                </a:solidFill>
-                <a:latin typeface="Courier New" pitchFamily="34" charset="0"/>
-                <a:ea typeface="Courier New" pitchFamily="34" charset="-122"/>
-                <a:cs typeface="Courier New" pitchFamily="34" charset="-120"/>
-              </a:rPr>
-              <a:t>- Build first · never blind-accept · 6-step cycle · scaffold is non-negotiable</a:t>
-            </a:r>
-            <a:endParaRPr lang="en-US" sz="1050" dirty="0"/>
-          </a:p>
-          <a:p>
-            <a:pPr indent="0" marL="0">
-              <a:lnSpc>
-                <a:spcPts val="1470"/>
-              </a:lnSpc>
-              <a:buNone/>
-            </a:pPr>
-            <a:endParaRPr lang="en-US" sz="1050" dirty="0"/>
-          </a:p>
-          <a:p>
-            <a:pPr indent="0" marL="0">
-              <a:lnSpc>
-                <a:spcPts val="1470"/>
-              </a:lnSpc>
-              <a:buNone/>
-            </a:pPr>
-            <a:r>
-              <a:rPr lang="en-US" sz="1050" dirty="0">
-                <a:solidFill>
-                  <a:srgbClr val="E7EEF2"/>
-                </a:solidFill>
-                <a:latin typeface="Courier New" pitchFamily="34" charset="0"/>
-                <a:ea typeface="Courier New" pitchFamily="34" charset="-122"/>
-                <a:cs typeface="Courier New" pitchFamily="34" charset="-120"/>
-              </a:rPr>
-              <a:t>## 4. Architecture to build</a:t>
-            </a:r>
-            <a:endParaRPr lang="en-US" sz="1050" dirty="0"/>
-          </a:p>
-          <a:p>
-            <a:pPr indent="0" marL="0">
-              <a:lnSpc>
-                <a:spcPts val="1470"/>
-              </a:lnSpc>
-              <a:buNone/>
-            </a:pPr>
-            <a:r>
-              <a:rPr lang="en-US" sz="1050" dirty="0">
-                <a:solidFill>
-                  <a:srgbClr val="E7EEF2"/>
-                </a:solidFill>
-                <a:latin typeface="Courier New" pitchFamily="34" charset="0"/>
-                <a:ea typeface="Courier New" pitchFamily="34" charset="-122"/>
-                <a:cs typeface="Courier New" pitchFamily="34" charset="-120"/>
-              </a:rPr>
-              <a:t>- Orchestrator -&gt; domain agents &lt;list&gt; with typed hand-offs; bound the loop</a:t>
-            </a:r>
-            <a:endParaRPr lang="en-US" sz="1050" dirty="0"/>
-          </a:p>
-          <a:p>
-            <a:pPr indent="0" marL="0">
-              <a:lnSpc>
-                <a:spcPts val="1470"/>
-              </a:lnSpc>
-              <a:buNone/>
-            </a:pPr>
-            <a:endParaRPr lang="en-US" sz="1050" dirty="0"/>
-          </a:p>
-          <a:p>
-            <a:pPr indent="0" marL="0">
-              <a:lnSpc>
-                <a:spcPts val="1470"/>
-              </a:lnSpc>
-              <a:buNone/>
-            </a:pPr>
-            <a:r>
-              <a:rPr lang="en-US" sz="1050" dirty="0">
-                <a:solidFill>
-                  <a:srgbClr val="E7EEF2"/>
-                </a:solidFill>
-                <a:latin typeface="Courier New" pitchFamily="34" charset="0"/>
-                <a:ea typeface="Courier New" pitchFamily="34" charset="-122"/>
-                <a:cs typeface="Courier New" pitchFamily="34" charset="-120"/>
-              </a:rPr>
-              <a:t>## 5. The 10-point scaffold — MUST pass  (list all ten)</a:t>
-            </a:r>
-            <a:endParaRPr lang="en-US" sz="1050" dirty="0"/>
-          </a:p>
-          <a:p>
-            <a:pPr indent="0" marL="0">
-              <a:lnSpc>
-                <a:spcPts val="1470"/>
-              </a:lnSpc>
-              <a:buNone/>
-            </a:pPr>
-            <a:r>
-              <a:rPr lang="en-US" sz="1050" dirty="0">
-                <a:solidFill>
-                  <a:srgbClr val="E7EEF2"/>
-                </a:solidFill>
-                <a:latin typeface="Courier New" pitchFamily="34" charset="0"/>
-                <a:ea typeface="Courier New" pitchFamily="34" charset="-122"/>
-                <a:cs typeface="Courier New" pitchFamily="34" charset="-120"/>
-              </a:rPr>
-              <a:t>## 6. Guardrails — the 4 layers  (L1 input · L2 tool · L3 output · L4 gate)</a:t>
-            </a:r>
-            <a:endParaRPr lang="en-US" sz="1050" dirty="0"/>
+                <a:spcPts val="2100"/>
+              </a:lnSpc>
+              <a:buNone/>
+            </a:pPr>
+            <a:r>
+              <a:rPr lang="en-US" sz="1400" dirty="0">
+                <a:solidFill>
+                  <a:srgbClr val="3A4556"/>
+                </a:solidFill>
+                <a:latin typeface="Arial" pitchFamily="34" charset="0"/>
+                <a:ea typeface="Arial" pitchFamily="34" charset="-122"/>
+                <a:cs typeface="Arial" pitchFamily="34" charset="-120"/>
+              </a:rPr>
+              <a:t>Blank AGENTS.md + README.md + SPEC skeletons you fill in per use case. We provide these plus three filled AGENTS.md versions (CS1, CS2, CS3) as a base.</a:t>
+            </a:r>
+            <a:endParaRPr lang="en-US" sz="1400" dirty="0"/>
           </a:p>
         </p:txBody>
       </p:sp>
@@ -4473,7 +4851,7 @@
                 <a:ea typeface="Arial" pitchFamily="34" charset="-122"/>
                 <a:cs typeface="Arial" pitchFamily="34" charset="-120"/>
               </a:rPr>
-              <a:t>AGENTS.md Skeleton (2 of 2)</a:t>
+              <a:t>AGENTS.md Skeleton (1 of 2)</a:t>
             </a:r>
             <a:endParaRPr lang="en-US" sz="2500" dirty="0"/>
           </a:p>
@@ -4672,7 +5050,7 @@
                 <a:ea typeface="Arial" pitchFamily="34" charset="-122"/>
                 <a:cs typeface="Arial" pitchFamily="34" charset="-120"/>
               </a:rPr>
-              <a:t>AGENTS.md (continued)</a:t>
+              <a:t>AGENTS.md</a:t>
             </a:r>
             <a:endParaRPr lang="en-US" sz="900" dirty="0"/>
           </a:p>
@@ -4701,12 +5079,12 @@
           <a:p>
             <a:pPr indent="0" marL="0">
               <a:lnSpc>
-                <a:spcPts val="1372"/>
-              </a:lnSpc>
-              <a:buNone/>
-            </a:pPr>
-            <a:r>
-              <a:rPr lang="en-US" sz="980" dirty="0">
+                <a:spcPts val="1470"/>
+              </a:lnSpc>
+              <a:buNone/>
+            </a:pPr>
+            <a:r>
+              <a:rPr lang="en-US" sz="1050" dirty="0">
                 <a:solidFill>
                   <a:srgbClr val="E7EEF2"/>
                 </a:solidFill>
@@ -4714,19 +5092,28 @@
                 <a:ea typeface="Courier New" pitchFamily="34" charset="-122"/>
                 <a:cs typeface="Courier New" pitchFamily="34" charset="-120"/>
               </a:rPr>
-              <a:t>## 7. MCP server build requirements</a:t>
-            </a:r>
-            <a:endParaRPr lang="en-US" sz="980" dirty="0"/>
-          </a:p>
-          <a:p>
-            <a:pPr indent="0" marL="0">
-              <a:lnSpc>
-                <a:spcPts val="1372"/>
-              </a:lnSpc>
-              <a:buNone/>
-            </a:pPr>
-            <a:r>
-              <a:rPr lang="en-US" sz="980" dirty="0">
+              <a:t># AGENTS.md — &lt;USE CASE NAME&gt;</a:t>
+            </a:r>
+            <a:endParaRPr lang="en-US" sz="1050" dirty="0"/>
+          </a:p>
+          <a:p>
+            <a:pPr indent="0" marL="0">
+              <a:lnSpc>
+                <a:spcPts val="1470"/>
+              </a:lnSpc>
+              <a:buNone/>
+            </a:pPr>
+            <a:endParaRPr lang="en-US" sz="1050" dirty="0"/>
+          </a:p>
+          <a:p>
+            <a:pPr indent="0" marL="0">
+              <a:lnSpc>
+                <a:spcPts val="1470"/>
+              </a:lnSpc>
+              <a:buNone/>
+            </a:pPr>
+            <a:r>
+              <a:rPr lang="en-US" sz="1050" dirty="0">
                 <a:solidFill>
                   <a:srgbClr val="E7EEF2"/>
                 </a:solidFill>
@@ -4734,19 +5121,19 @@
                 <a:ea typeface="Courier New" pitchFamily="34" charset="-122"/>
                 <a:cs typeface="Courier New" pitchFamily="34" charset="-120"/>
               </a:rPr>
-              <a:t>- HTTP transport; tools: &lt;list, mark destructive&gt;</a:t>
-            </a:r>
-            <a:endParaRPr lang="en-US" sz="980" dirty="0"/>
-          </a:p>
-          <a:p>
-            <a:pPr indent="0" marL="0">
-              <a:lnSpc>
-                <a:spcPts val="1372"/>
-              </a:lnSpc>
-              <a:buNone/>
-            </a:pPr>
-            <a:r>
-              <a:rPr lang="en-US" sz="980" dirty="0">
+              <a:t>## 1. Project</a:t>
+            </a:r>
+            <a:endParaRPr lang="en-US" sz="1050" dirty="0"/>
+          </a:p>
+          <a:p>
+            <a:pPr indent="0" marL="0">
+              <a:lnSpc>
+                <a:spcPts val="1470"/>
+              </a:lnSpc>
+              <a:buNone/>
+            </a:pPr>
+            <a:r>
+              <a:rPr lang="en-US" sz="1050" dirty="0">
                 <a:solidFill>
                   <a:srgbClr val="E7EEF2"/>
                 </a:solidFill>
@@ -4754,28 +5141,19 @@
                 <a:ea typeface="Courier New" pitchFamily="34" charset="-122"/>
                 <a:cs typeface="Courier New" pitchFamily="34" charset="-120"/>
               </a:rPr>
-              <a:t>- Every tool: typed I/O · auth · rate limit · audit · validated calls</a:t>
-            </a:r>
-            <a:endParaRPr lang="en-US" sz="980" dirty="0"/>
-          </a:p>
-          <a:p>
-            <a:pPr indent="0" marL="0">
-              <a:lnSpc>
-                <a:spcPts val="1372"/>
-              </a:lnSpc>
-              <a:buNone/>
-            </a:pPr>
-            <a:endParaRPr lang="en-US" sz="980" dirty="0"/>
-          </a:p>
-          <a:p>
-            <a:pPr indent="0" marL="0">
-              <a:lnSpc>
-                <a:spcPts val="1372"/>
-              </a:lnSpc>
-              <a:buNone/>
-            </a:pPr>
-            <a:r>
-              <a:rPr lang="en-US" sz="980" dirty="0">
+              <a:t>- Goal (one line): &lt;what this system does&gt;</a:t>
+            </a:r>
+            <a:endParaRPr lang="en-US" sz="1050" dirty="0"/>
+          </a:p>
+          <a:p>
+            <a:pPr indent="0" marL="0">
+              <a:lnSpc>
+                <a:spcPts val="1470"/>
+              </a:lnSpc>
+              <a:buNone/>
+            </a:pPr>
+            <a:r>
+              <a:rPr lang="en-US" sz="1050" dirty="0">
                 <a:solidFill>
                   <a:srgbClr val="E7EEF2"/>
                 </a:solidFill>
@@ -4783,19 +5161,28 @@
                 <a:ea typeface="Courier New" pitchFamily="34" charset="-122"/>
                 <a:cs typeface="Courier New" pitchFamily="34" charset="-120"/>
               </a:rPr>
-              <a:t>## 8. Project layout  (hexagonal — keep the core pure)</a:t>
-            </a:r>
-            <a:endParaRPr lang="en-US" sz="980" dirty="0"/>
-          </a:p>
-          <a:p>
-            <a:pPr indent="0" marL="0">
-              <a:lnSpc>
-                <a:spcPts val="1372"/>
-              </a:lnSpc>
-              <a:buNone/>
-            </a:pPr>
-            <a:r>
-              <a:rPr lang="en-US" sz="980" dirty="0">
+              <a:t>- Use case: &lt;CS1/CS2/CS3&gt;   Owner: &lt;name&gt;</a:t>
+            </a:r>
+            <a:endParaRPr lang="en-US" sz="1050" dirty="0"/>
+          </a:p>
+          <a:p>
+            <a:pPr indent="0" marL="0">
+              <a:lnSpc>
+                <a:spcPts val="1470"/>
+              </a:lnSpc>
+              <a:buNone/>
+            </a:pPr>
+            <a:endParaRPr lang="en-US" sz="1050" dirty="0"/>
+          </a:p>
+          <a:p>
+            <a:pPr indent="0" marL="0">
+              <a:lnSpc>
+                <a:spcPts val="1470"/>
+              </a:lnSpc>
+              <a:buNone/>
+            </a:pPr>
+            <a:r>
+              <a:rPr lang="en-US" sz="1050" dirty="0">
                 <a:solidFill>
                   <a:srgbClr val="E7EEF2"/>
                 </a:solidFill>
@@ -4803,19 +5190,19 @@
                 <a:ea typeface="Courier New" pitchFamily="34" charset="-122"/>
                 <a:cs typeface="Courier New" pitchFamily="34" charset="-120"/>
               </a:rPr>
-              <a:t>  app/core/      PURE: models.py ports.py agents.py guardrails.py</a:t>
-            </a:r>
-            <a:endParaRPr lang="en-US" sz="980" dirty="0"/>
-          </a:p>
-          <a:p>
-            <a:pPr indent="0" marL="0">
-              <a:lnSpc>
-                <a:spcPts val="1372"/>
-              </a:lnSpc>
-              <a:buNone/>
-            </a:pPr>
-            <a:r>
-              <a:rPr lang="en-US" sz="980" dirty="0">
+              <a:t>## 2. Tech stack &amp; runtime</a:t>
+            </a:r>
+            <a:endParaRPr lang="en-US" sz="1050" dirty="0"/>
+          </a:p>
+          <a:p>
+            <a:pPr indent="0" marL="0">
+              <a:lnSpc>
+                <a:spcPts val="1470"/>
+              </a:lnSpc>
+              <a:buNone/>
+            </a:pPr>
+            <a:r>
+              <a:rPr lang="en-US" sz="1050" dirty="0">
                 <a:solidFill>
                   <a:srgbClr val="E7EEF2"/>
                 </a:solidFill>
@@ -4823,19 +5210,19 @@
                 <a:ea typeface="Courier New" pitchFamily="34" charset="-122"/>
                 <a:cs typeface="Courier New" pitchFamily="34" charset="-120"/>
               </a:rPr>
-              <a:t>  app/adapters/  llm_client.py  mcp_tools.py</a:t>
-            </a:r>
-            <a:endParaRPr lang="en-US" sz="980" dirty="0"/>
-          </a:p>
-          <a:p>
-            <a:pPr indent="0" marL="0">
-              <a:lnSpc>
-                <a:spcPts val="1372"/>
-              </a:lnSpc>
-              <a:buNone/>
-            </a:pPr>
-            <a:r>
-              <a:rPr lang="en-US" sz="980" dirty="0">
+              <a:t>- Python 3.11 · uv (uv sync --frozen) · FastAPI (async) · &lt;LangGraph/CrewAI&gt;</a:t>
+            </a:r>
+            <a:endParaRPr lang="en-US" sz="1050" dirty="0"/>
+          </a:p>
+          <a:p>
+            <a:pPr indent="0" marL="0">
+              <a:lnSpc>
+                <a:spcPts val="1470"/>
+              </a:lnSpc>
+              <a:buNone/>
+            </a:pPr>
+            <a:r>
+              <a:rPr lang="en-US" sz="1050" dirty="0">
                 <a:solidFill>
                   <a:srgbClr val="E7EEF2"/>
                 </a:solidFill>
@@ -4843,19 +5230,19 @@
                 <a:ea typeface="Courier New" pitchFamily="34" charset="-122"/>
                 <a:cs typeface="Courier New" pitchFamily="34" charset="-120"/>
               </a:rPr>
-              <a:t>  app/api/       server.py  (FastAPI MCP server)</a:t>
-            </a:r>
-            <a:endParaRPr lang="en-US" sz="980" dirty="0"/>
-          </a:p>
-          <a:p>
-            <a:pPr indent="0" marL="0">
-              <a:lnSpc>
-                <a:spcPts val="1372"/>
-              </a:lnSpc>
-              <a:buNone/>
-            </a:pPr>
-            <a:r>
-              <a:rPr lang="en-US" sz="980" dirty="0">
+              <a:t>- Runtime model: LiteLLM gateway http://&lt;gateway&gt;:4000/v1  (NO external APIs)</a:t>
+            </a:r>
+            <a:endParaRPr lang="en-US" sz="1050" dirty="0"/>
+          </a:p>
+          <a:p>
+            <a:pPr indent="0" marL="0">
+              <a:lnSpc>
+                <a:spcPts val="1470"/>
+              </a:lnSpc>
+              <a:buNone/>
+            </a:pPr>
+            <a:r>
+              <a:rPr lang="en-US" sz="1050" dirty="0">
                 <a:solidFill>
                   <a:srgbClr val="E7EEF2"/>
                 </a:solidFill>
@@ -4863,19 +5250,28 @@
                 <a:ea typeface="Courier New" pitchFamily="34" charset="-122"/>
                 <a:cs typeface="Courier New" pitchFamily="34" charset="-120"/>
               </a:rPr>
-              <a:t>  app/tests/     contract + property tests (LLM mocked)</a:t>
-            </a:r>
-            <a:endParaRPr lang="en-US" sz="980" dirty="0"/>
-          </a:p>
-          <a:p>
-            <a:pPr indent="0" marL="0">
-              <a:lnSpc>
-                <a:spcPts val="1372"/>
-              </a:lnSpc>
-              <a:buNone/>
-            </a:pPr>
-            <a:r>
-              <a:rPr lang="en-US" sz="980" dirty="0">
+              <a:t>- Coding agent: OpenCode + Kimi-K2.5 · Secrets from .env only</a:t>
+            </a:r>
+            <a:endParaRPr lang="en-US" sz="1050" dirty="0"/>
+          </a:p>
+          <a:p>
+            <a:pPr indent="0" marL="0">
+              <a:lnSpc>
+                <a:spcPts val="1470"/>
+              </a:lnSpc>
+              <a:buNone/>
+            </a:pPr>
+            <a:endParaRPr lang="en-US" sz="1050" dirty="0"/>
+          </a:p>
+          <a:p>
+            <a:pPr indent="0" marL="0">
+              <a:lnSpc>
+                <a:spcPts val="1470"/>
+              </a:lnSpc>
+              <a:buNone/>
+            </a:pPr>
+            <a:r>
+              <a:rPr lang="en-US" sz="1050" dirty="0">
                 <a:solidFill>
                   <a:srgbClr val="E7EEF2"/>
                 </a:solidFill>
@@ -4883,28 +5279,19 @@
                 <a:ea typeface="Courier New" pitchFamily="34" charset="-122"/>
                 <a:cs typeface="Courier New" pitchFamily="34" charset="-120"/>
               </a:rPr>
-              <a:t>  .github/workflows/security.yml   (CI gate)</a:t>
-            </a:r>
-            <a:endParaRPr lang="en-US" sz="980" dirty="0"/>
-          </a:p>
-          <a:p>
-            <a:pPr indent="0" marL="0">
-              <a:lnSpc>
-                <a:spcPts val="1372"/>
-              </a:lnSpc>
-              <a:buNone/>
-            </a:pPr>
-            <a:endParaRPr lang="en-US" sz="980" dirty="0"/>
-          </a:p>
-          <a:p>
-            <a:pPr indent="0" marL="0">
-              <a:lnSpc>
-                <a:spcPts val="1372"/>
-              </a:lnSpc>
-              <a:buNone/>
-            </a:pPr>
-            <a:r>
-              <a:rPr lang="en-US" sz="980" dirty="0">
+              <a:t>## 3. Golden rules for the coding agent</a:t>
+            </a:r>
+            <a:endParaRPr lang="en-US" sz="1050" dirty="0"/>
+          </a:p>
+          <a:p>
+            <a:pPr indent="0" marL="0">
+              <a:lnSpc>
+                <a:spcPts val="1470"/>
+              </a:lnSpc>
+              <a:buNone/>
+            </a:pPr>
+            <a:r>
+              <a:rPr lang="en-US" sz="1050" dirty="0">
                 <a:solidFill>
                   <a:srgbClr val="E7EEF2"/>
                 </a:solidFill>
@@ -4912,19 +5299,28 @@
                 <a:ea typeface="Courier New" pitchFamily="34" charset="-122"/>
                 <a:cs typeface="Courier New" pitchFamily="34" charset="-120"/>
               </a:rPr>
-              <a:t>## 9. Commands</a:t>
-            </a:r>
-            <a:endParaRPr lang="en-US" sz="980" dirty="0"/>
-          </a:p>
-          <a:p>
-            <a:pPr indent="0" marL="0">
-              <a:lnSpc>
-                <a:spcPts val="1372"/>
-              </a:lnSpc>
-              <a:buNone/>
-            </a:pPr>
-            <a:r>
-              <a:rPr lang="en-US" sz="980" dirty="0">
+              <a:t>- Spec-first (§13) · build first · never blind-accept · 6-step cycle · scaffold non-negotiable</a:t>
+            </a:r>
+            <a:endParaRPr lang="en-US" sz="1050" dirty="0"/>
+          </a:p>
+          <a:p>
+            <a:pPr indent="0" marL="0">
+              <a:lnSpc>
+                <a:spcPts val="1470"/>
+              </a:lnSpc>
+              <a:buNone/>
+            </a:pPr>
+            <a:endParaRPr lang="en-US" sz="1050" dirty="0"/>
+          </a:p>
+          <a:p>
+            <a:pPr indent="0" marL="0">
+              <a:lnSpc>
+                <a:spcPts val="1470"/>
+              </a:lnSpc>
+              <a:buNone/>
+            </a:pPr>
+            <a:r>
+              <a:rPr lang="en-US" sz="1050" dirty="0">
                 <a:solidFill>
                   <a:srgbClr val="E7EEF2"/>
                 </a:solidFill>
@@ -4932,19 +5328,19 @@
                 <a:ea typeface="Courier New" pitchFamily="34" charset="-122"/>
                 <a:cs typeface="Courier New" pitchFamily="34" charset="-120"/>
               </a:rPr>
-              <a:t>  uv sync --frozen</a:t>
-            </a:r>
-            <a:endParaRPr lang="en-US" sz="980" dirty="0"/>
-          </a:p>
-          <a:p>
-            <a:pPr indent="0" marL="0">
-              <a:lnSpc>
-                <a:spcPts val="1372"/>
-              </a:lnSpc>
-              <a:buNone/>
-            </a:pPr>
-            <a:r>
-              <a:rPr lang="en-US" sz="980" dirty="0">
+              <a:t>## 4. Architecture to build</a:t>
+            </a:r>
+            <a:endParaRPr lang="en-US" sz="1050" dirty="0"/>
+          </a:p>
+          <a:p>
+            <a:pPr indent="0" marL="0">
+              <a:lnSpc>
+                <a:spcPts val="1470"/>
+              </a:lnSpc>
+              <a:buNone/>
+            </a:pPr>
+            <a:r>
+              <a:rPr lang="en-US" sz="1050" dirty="0">
                 <a:solidFill>
                   <a:srgbClr val="E7EEF2"/>
                 </a:solidFill>
@@ -4952,19 +5348,28 @@
                 <a:ea typeface="Courier New" pitchFamily="34" charset="-122"/>
                 <a:cs typeface="Courier New" pitchFamily="34" charset="-120"/>
               </a:rPr>
-              <a:t>  uv run uvicorn app.api.server:app --reload</a:t>
-            </a:r>
-            <a:endParaRPr lang="en-US" sz="980" dirty="0"/>
-          </a:p>
-          <a:p>
-            <a:pPr indent="0" marL="0">
-              <a:lnSpc>
-                <a:spcPts val="1372"/>
-              </a:lnSpc>
-              <a:buNone/>
-            </a:pPr>
-            <a:r>
-              <a:rPr lang="en-US" sz="980" dirty="0">
+              <a:t>- Orchestrator -&gt; domain agents &lt;list&gt; with typed hand-offs; bound the loop</a:t>
+            </a:r>
+            <a:endParaRPr lang="en-US" sz="1050" dirty="0"/>
+          </a:p>
+          <a:p>
+            <a:pPr indent="0" marL="0">
+              <a:lnSpc>
+                <a:spcPts val="1470"/>
+              </a:lnSpc>
+              <a:buNone/>
+            </a:pPr>
+            <a:endParaRPr lang="en-US" sz="1050" dirty="0"/>
+          </a:p>
+          <a:p>
+            <a:pPr indent="0" marL="0">
+              <a:lnSpc>
+                <a:spcPts val="1470"/>
+              </a:lnSpc>
+              <a:buNone/>
+            </a:pPr>
+            <a:r>
+              <a:rPr lang="en-US" sz="1050" dirty="0">
                 <a:solidFill>
                   <a:srgbClr val="E7EEF2"/>
                 </a:solidFill>
@@ -4972,28 +5377,19 @@
                 <a:ea typeface="Courier New" pitchFamily="34" charset="-122"/>
                 <a:cs typeface="Courier New" pitchFamily="34" charset="-120"/>
               </a:rPr>
-              <a:t>  uv run pytest</a:t>
-            </a:r>
-            <a:endParaRPr lang="en-US" sz="980" dirty="0"/>
-          </a:p>
-          <a:p>
-            <a:pPr indent="0" marL="0">
-              <a:lnSpc>
-                <a:spcPts val="1372"/>
-              </a:lnSpc>
-              <a:buNone/>
-            </a:pPr>
-            <a:endParaRPr lang="en-US" sz="980" dirty="0"/>
-          </a:p>
-          <a:p>
-            <a:pPr indent="0" marL="0">
-              <a:lnSpc>
-                <a:spcPts val="1372"/>
-              </a:lnSpc>
-              <a:buNone/>
-            </a:pPr>
-            <a:r>
-              <a:rPr lang="en-US" sz="980" dirty="0">
+              <a:t>## 5. The 10-point scaffold — MUST pass  (list all ten)</a:t>
+            </a:r>
+            <a:endParaRPr lang="en-US" sz="1050" dirty="0"/>
+          </a:p>
+          <a:p>
+            <a:pPr indent="0" marL="0">
+              <a:lnSpc>
+                <a:spcPts val="1470"/>
+              </a:lnSpc>
+              <a:buNone/>
+            </a:pPr>
+            <a:r>
+              <a:rPr lang="en-US" sz="1050" dirty="0">
                 <a:solidFill>
                   <a:srgbClr val="E7EEF2"/>
                 </a:solidFill>
@@ -5001,49 +5397,9 @@
                 <a:ea typeface="Courier New" pitchFamily="34" charset="-122"/>
                 <a:cs typeface="Courier New" pitchFamily="34" charset="-120"/>
               </a:rPr>
-              <a:t>## 10. Definition of Done  (pipeline runs · 4 layers · 🔒 attacks blocked · CI green · README current)</a:t>
-            </a:r>
-            <a:endParaRPr lang="en-US" sz="980" dirty="0"/>
-          </a:p>
-          <a:p>
-            <a:pPr indent="0" marL="0">
-              <a:lnSpc>
-                <a:spcPts val="1372"/>
-              </a:lnSpc>
-              <a:buNone/>
-            </a:pPr>
-            <a:r>
-              <a:rPr lang="en-US" sz="980" dirty="0">
-                <a:solidFill>
-                  <a:srgbClr val="E7EEF2"/>
-                </a:solidFill>
-                <a:latin typeface="Courier New" pitchFamily="34" charset="0"/>
-                <a:ea typeface="Courier New" pitchFamily="34" charset="-122"/>
-                <a:cs typeface="Courier New" pitchFamily="34" charset="-120"/>
-              </a:rPr>
-              <a:t>## 11. Do / Don't  (explicit guardrails for the coding agent)</a:t>
-            </a:r>
-            <a:endParaRPr lang="en-US" sz="980" dirty="0"/>
-          </a:p>
-          <a:p>
-            <a:pPr indent="0" marL="0">
-              <a:lnSpc>
-                <a:spcPts val="1372"/>
-              </a:lnSpc>
-              <a:buNone/>
-            </a:pPr>
-            <a:r>
-              <a:rPr lang="en-US" sz="980" dirty="0">
-                <a:solidFill>
-                  <a:srgbClr val="E7EEF2"/>
-                </a:solidFill>
-                <a:latin typeface="Courier New" pitchFamily="34" charset="0"/>
-                <a:ea typeface="Courier New" pitchFamily="34" charset="-122"/>
-                <a:cs typeface="Courier New" pitchFamily="34" charset="-120"/>
-              </a:rPr>
-              <a:t>## 12. Documentation — README.md  (create + keep in sync with the code, every step)</a:t>
-            </a:r>
-            <a:endParaRPr lang="en-US" sz="980" dirty="0"/>
+              <a:t>## 6. Guardrails — the 4 layers  (L1 input · L2 tool · L3 output · L4 gate)</a:t>
+            </a:r>
+            <a:endParaRPr lang="en-US" sz="1050" dirty="0"/>
           </a:p>
         </p:txBody>
       </p:sp>
@@ -5081,49 +5437,108 @@
       </p:grpSpPr>
       <p:sp>
         <p:nvSpPr>
-          <p:cNvPr id="2" name="Shape 0"/>
-          <p:cNvSpPr/>
-          <p:nvPr/>
-        </p:nvSpPr>
-        <p:spPr>
-          <a:xfrm>
-            <a:off x="0" y="0"/>
-            <a:ext cx="7406640" cy="6858000"/>
-          </a:xfrm>
-          <a:prstGeom prst="rect">
-            <a:avLst/>
-          </a:prstGeom>
-          <a:solidFill>
-            <a:srgbClr val="E8460E"/>
-          </a:solidFill>
-          <a:ln/>
-        </p:spPr>
-      </p:sp>
-      <p:sp>
-        <p:nvSpPr>
-          <p:cNvPr id="3" name="Shape 1"/>
-          <p:cNvSpPr/>
-          <p:nvPr/>
-        </p:nvSpPr>
-        <p:spPr>
-          <a:xfrm>
-            <a:off x="5394960" y="0"/>
-            <a:ext cx="2011680" cy="6858000"/>
-          </a:xfrm>
-          <a:prstGeom prst="rect">
-            <a:avLst/>
-          </a:prstGeom>
-          <a:solidFill>
-            <a:srgbClr val="FF6600">
-              <a:alpha val="70000"/>
-            </a:srgbClr>
-          </a:solidFill>
-          <a:ln/>
+          <p:cNvPr id="2" name="Text 0"/>
+          <p:cNvSpPr/>
+          <p:nvPr/>
+        </p:nvSpPr>
+        <p:spPr>
+          <a:xfrm>
+            <a:off x="548640" y="384048"/>
+            <a:ext cx="10058400" cy="274320"/>
+          </a:xfrm>
+          <a:prstGeom prst="rect">
+            <a:avLst/>
+          </a:prstGeom>
+          <a:noFill/>
+          <a:ln/>
+        </p:spPr>
+        <p:txBody>
+          <a:bodyPr wrap="square" rtlCol="0" anchor="ctr"/>
+          <a:lstStyle/>
+          <a:p>
+            <a:pPr indent="0" marL="0">
+              <a:buNone/>
+            </a:pPr>
+            <a:r>
+              <a:rPr lang="en-US" sz="1100" b="1" spc="200" kern="0" dirty="0">
+                <a:solidFill>
+                  <a:srgbClr val="E8460E"/>
+                </a:solidFill>
+                <a:latin typeface="Arial" pitchFamily="34" charset="0"/>
+                <a:ea typeface="Arial" pitchFamily="34" charset="-122"/>
+                <a:cs typeface="Arial" pitchFamily="34" charset="-120"/>
+              </a:rPr>
+              <a:t>SKELETON</a:t>
+            </a:r>
+            <a:endParaRPr lang="en-US" sz="1100" dirty="0"/>
+          </a:p>
+        </p:txBody>
+      </p:sp>
+      <p:sp>
+        <p:nvSpPr>
+          <p:cNvPr id="3" name="Text 1"/>
+          <p:cNvSpPr/>
+          <p:nvPr/>
+        </p:nvSpPr>
+        <p:spPr>
+          <a:xfrm>
+            <a:off x="548640" y="621792"/>
+            <a:ext cx="10515600" cy="640080"/>
+          </a:xfrm>
+          <a:prstGeom prst="rect">
+            <a:avLst/>
+          </a:prstGeom>
+          <a:noFill/>
+          <a:ln/>
+        </p:spPr>
+        <p:txBody>
+          <a:bodyPr wrap="square" rtlCol="0" anchor="t"/>
+          <a:lstStyle/>
+          <a:p>
+            <a:pPr indent="0" marL="0">
+              <a:buNone/>
+            </a:pPr>
+            <a:r>
+              <a:rPr lang="en-US" sz="2500" b="1" dirty="0">
+                <a:solidFill>
+                  <a:srgbClr val="2E4552"/>
+                </a:solidFill>
+                <a:latin typeface="Arial" pitchFamily="34" charset="0"/>
+                <a:ea typeface="Arial" pitchFamily="34" charset="-122"/>
+                <a:cs typeface="Arial" pitchFamily="34" charset="-120"/>
+              </a:rPr>
+              <a:t>AGENTS.md Skeleton (2 of 2)</a:t>
+            </a:r>
+            <a:endParaRPr lang="en-US" sz="2500" dirty="0"/>
+          </a:p>
+        </p:txBody>
+      </p:sp>
+      <p:sp>
+        <p:nvSpPr>
+          <p:cNvPr id="4" name="Shape 2"/>
+          <p:cNvSpPr/>
+          <p:nvPr/>
+        </p:nvSpPr>
+        <p:spPr>
+          <a:xfrm>
+            <a:off x="548640" y="1298448"/>
+            <a:ext cx="11064240" cy="0"/>
+          </a:xfrm>
+          <a:prstGeom prst="line">
+            <a:avLst/>
+          </a:prstGeom>
+          <a:noFill/>
+          <a:ln w="19050">
+            <a:solidFill>
+              <a:srgbClr val="FF6600"/>
+            </a:solidFill>
+            <a:prstDash val="solid"/>
+          </a:ln>
         </p:spPr>
       </p:sp>
       <p:pic>
         <p:nvPicPr>
-          <p:cNvPr id="4" name="Image 0" descr="unext_white_lockup.png">    </p:cNvPr>
+          <p:cNvPr id="5" name="Image 0" descr="unext_icon.png">    </p:cNvPr>
           <p:cNvPicPr>
             <a:picLocks noChangeAspect="1"/>
           </p:cNvPicPr>
@@ -5137,17 +5552,79 @@
         </p:blipFill>
         <p:spPr>
           <a:xfrm>
-            <a:off x="502920" y="457200"/>
-            <a:ext cx="2194560" cy="457200"/>
+            <a:off x="11430000" y="365760"/>
+            <a:ext cx="329184" cy="493776"/>
           </a:xfrm>
           <a:prstGeom prst="rect">
             <a:avLst/>
           </a:prstGeom>
         </p:spPr>
       </p:pic>
+      <p:sp>
+        <p:nvSpPr>
+          <p:cNvPr id="6" name="Shape 3"/>
+          <p:cNvSpPr/>
+          <p:nvPr/>
+        </p:nvSpPr>
+        <p:spPr>
+          <a:xfrm>
+            <a:off x="548640" y="6400800"/>
+            <a:ext cx="9418320" cy="0"/>
+          </a:xfrm>
+          <a:prstGeom prst="line">
+            <a:avLst/>
+          </a:prstGeom>
+          <a:noFill/>
+          <a:ln w="9525">
+            <a:solidFill>
+              <a:srgbClr val="F0DCB8"/>
+            </a:solidFill>
+            <a:prstDash val="solid"/>
+          </a:ln>
+        </p:spPr>
+      </p:sp>
+      <p:sp>
+        <p:nvSpPr>
+          <p:cNvPr id="7" name="Text 4"/>
+          <p:cNvSpPr/>
+          <p:nvPr/>
+        </p:nvSpPr>
+        <p:spPr>
+          <a:xfrm>
+            <a:off x="548640" y="6437376"/>
+            <a:ext cx="9326880" cy="365760"/>
+          </a:xfrm>
+          <a:prstGeom prst="rect">
+            <a:avLst/>
+          </a:prstGeom>
+          <a:noFill/>
+          <a:ln/>
+        </p:spPr>
+        <p:txBody>
+          <a:bodyPr wrap="square" rtlCol="0" anchor="t"/>
+          <a:lstStyle/>
+          <a:p>
+            <a:pPr indent="0" marL="0">
+              <a:buNone/>
+            </a:pPr>
+            <a:r>
+              <a:rPr lang="en-US" sz="700" dirty="0">
+                <a:solidFill>
+                  <a:srgbClr val="767171"/>
+                </a:solidFill>
+                <a:latin typeface="Arial" pitchFamily="34" charset="0"/>
+                <a:ea typeface="Arial" pitchFamily="34" charset="-122"/>
+                <a:cs typeface="Arial" pitchFamily="34" charset="-120"/>
+              </a:rPr>
+              <a:t>The content and the program approach is strictly confidential. It is strictly forbidden to share any part of this program design approach with any third party</a:t>
+            </a:r>
+            <a:endParaRPr lang="en-US" sz="700" dirty="0"/>
+          </a:p>
+        </p:txBody>
+      </p:sp>
       <p:pic>
         <p:nvPicPr>
-          <p:cNvPr id="5" name="Image 1" descr="unext_icon.png">    </p:cNvPr>
+          <p:cNvPr id="8" name="Image 1" descr="unext_dark_lockup.png">    </p:cNvPr>
           <p:cNvPicPr>
             <a:picLocks noChangeAspect="1"/>
           </p:cNvPicPr>
@@ -5161,8 +5638,8 @@
         </p:blipFill>
         <p:spPr>
           <a:xfrm>
-            <a:off x="9646920" y="502920"/>
-            <a:ext cx="457200" cy="685800"/>
+            <a:off x="10195560" y="6419088"/>
+            <a:ext cx="1417320" cy="301752"/>
           </a:xfrm>
           <a:prstGeom prst="rect">
             <a:avLst/>
@@ -5171,103 +5648,26 @@
       </p:pic>
       <p:sp>
         <p:nvSpPr>
-          <p:cNvPr id="6" name="Text 2"/>
-          <p:cNvSpPr/>
-          <p:nvPr/>
-        </p:nvSpPr>
-        <p:spPr>
-          <a:xfrm>
-            <a:off x="548640" y="2514600"/>
-            <a:ext cx="6400800" cy="365760"/>
-          </a:xfrm>
-          <a:prstGeom prst="rect">
-            <a:avLst/>
-          </a:prstGeom>
-          <a:noFill/>
-          <a:ln/>
-        </p:spPr>
-        <p:txBody>
-          <a:bodyPr wrap="square" rtlCol="0" anchor="ctr"/>
-          <a:lstStyle/>
-          <a:p>
-            <a:pPr indent="0" marL="0">
-              <a:buNone/>
-            </a:pPr>
-            <a:r>
-              <a:rPr lang="en-US" sz="1400" b="1" spc="300" kern="0" dirty="0">
-                <a:solidFill>
-                  <a:srgbClr val="FFE9DC"/>
-                </a:solidFill>
-                <a:latin typeface="Arial" pitchFamily="34" charset="0"/>
-                <a:ea typeface="Arial" pitchFamily="34" charset="-122"/>
-                <a:cs typeface="Arial" pitchFamily="34" charset="-120"/>
-              </a:rPr>
-              <a:t>PART 4</a:t>
-            </a:r>
-            <a:endParaRPr lang="en-US" sz="1400" dirty="0"/>
-          </a:p>
-        </p:txBody>
-      </p:sp>
-      <p:sp>
-        <p:nvSpPr>
-          <p:cNvPr id="7" name="Text 3"/>
-          <p:cNvSpPr/>
-          <p:nvPr/>
-        </p:nvSpPr>
-        <p:spPr>
-          <a:xfrm>
-            <a:off x="548640" y="2880360"/>
-            <a:ext cx="6492240" cy="1463040"/>
-          </a:xfrm>
-          <a:prstGeom prst="rect">
-            <a:avLst/>
-          </a:prstGeom>
-          <a:noFill/>
-          <a:ln/>
-        </p:spPr>
-        <p:txBody>
-          <a:bodyPr wrap="square" rtlCol="0" anchor="t"/>
-          <a:lstStyle/>
-          <a:p>
-            <a:pPr indent="0" marL="0">
-              <a:lnSpc>
-                <a:spcPts val="3600"/>
-              </a:lnSpc>
-              <a:buNone/>
-            </a:pPr>
-            <a:r>
-              <a:rPr lang="en-US" sz="3200" b="1" dirty="0">
-                <a:solidFill>
-                  <a:srgbClr val="FFFFFF"/>
-                </a:solidFill>
-                <a:latin typeface="Arial" pitchFamily="34" charset="0"/>
-                <a:ea typeface="Arial" pitchFamily="34" charset="-122"/>
-                <a:cs typeface="Arial" pitchFamily="34" charset="-120"/>
-              </a:rPr>
-              <a:t>Using It Across the Two Days</a:t>
-            </a:r>
-            <a:endParaRPr lang="en-US" sz="3200" dirty="0"/>
-          </a:p>
-        </p:txBody>
-      </p:sp>
-      <p:sp>
-        <p:nvSpPr>
-          <p:cNvPr id="8" name="Shape 4"/>
-          <p:cNvSpPr/>
-          <p:nvPr/>
-        </p:nvSpPr>
-        <p:spPr>
-          <a:xfrm>
-            <a:off x="566928" y="4343400"/>
-            <a:ext cx="2926080" cy="0"/>
-          </a:xfrm>
-          <a:prstGeom prst="line">
-            <a:avLst/>
-          </a:prstGeom>
-          <a:noFill/>
-          <a:ln w="19050">
+          <p:cNvPr id="9" name="Shape 5"/>
+          <p:cNvSpPr/>
+          <p:nvPr/>
+        </p:nvSpPr>
+        <p:spPr>
+          <a:xfrm>
+            <a:off x="548640" y="1508760"/>
+            <a:ext cx="11064240" cy="4526280"/>
+          </a:xfrm>
+          <a:prstGeom prst="roundRect">
+            <a:avLst>
+              <a:gd name="adj" fmla="val 1212"/>
+            </a:avLst>
+          </a:prstGeom>
+          <a:solidFill>
+            <a:srgbClr val="13212B"/>
+          </a:solidFill>
+          <a:ln w="9525">
             <a:solidFill>
-              <a:srgbClr val="FFD9C2"/>
+              <a:srgbClr val="2C3E4A"/>
             </a:solidFill>
             <a:prstDash val="solid"/>
           </a:ln>
@@ -5275,14 +5675,53 @@
       </p:sp>
       <p:sp>
         <p:nvSpPr>
-          <p:cNvPr id="9" name="Text 5"/>
-          <p:cNvSpPr/>
-          <p:nvPr/>
-        </p:nvSpPr>
-        <p:spPr>
-          <a:xfrm>
-            <a:off x="7772400" y="2880360"/>
-            <a:ext cx="3931920" cy="2743200"/>
+          <p:cNvPr id="10" name="Text 6"/>
+          <p:cNvSpPr/>
+          <p:nvPr/>
+        </p:nvSpPr>
+        <p:spPr>
+          <a:xfrm>
+            <a:off x="685800" y="1581912"/>
+            <a:ext cx="10789920" cy="237744"/>
+          </a:xfrm>
+          <a:prstGeom prst="rect">
+            <a:avLst/>
+          </a:prstGeom>
+          <a:noFill/>
+          <a:ln/>
+        </p:spPr>
+        <p:txBody>
+          <a:bodyPr wrap="square" rtlCol="0" anchor="ctr"/>
+          <a:lstStyle/>
+          <a:p>
+            <a:pPr indent="0" marL="0">
+              <a:buNone/>
+            </a:pPr>
+            <a:r>
+              <a:rPr lang="en-US" sz="900" b="1" spc="100" kern="0" dirty="0">
+                <a:solidFill>
+                  <a:srgbClr val="7FA8BD"/>
+                </a:solidFill>
+                <a:latin typeface="Arial" pitchFamily="34" charset="0"/>
+                <a:ea typeface="Arial" pitchFamily="34" charset="-122"/>
+                <a:cs typeface="Arial" pitchFamily="34" charset="-120"/>
+              </a:rPr>
+              <a:t>AGENTS.md (continued)</a:t>
+            </a:r>
+            <a:endParaRPr lang="en-US" sz="900" dirty="0"/>
+          </a:p>
+        </p:txBody>
+      </p:sp>
+      <p:sp>
+        <p:nvSpPr>
+          <p:cNvPr id="11" name="Text 7"/>
+          <p:cNvSpPr/>
+          <p:nvPr/>
+        </p:nvSpPr>
+        <p:spPr>
+          <a:xfrm>
+            <a:off x="685800" y="1837944"/>
+            <a:ext cx="10789920" cy="4105656"/>
           </a:xfrm>
           <a:prstGeom prst="rect">
             <a:avLst/>
@@ -5296,22 +5735,369 @@
           <a:p>
             <a:pPr indent="0" marL="0">
               <a:lnSpc>
-                <a:spcPts val="2100"/>
-              </a:lnSpc>
-              <a:buNone/>
-            </a:pPr>
-            <a:r>
-              <a:rPr lang="en-US" sz="1400" dirty="0">
-                <a:solidFill>
-                  <a:srgbClr val="3A4556"/>
-                </a:solidFill>
-                <a:latin typeface="Arial" pitchFamily="34" charset="0"/>
-                <a:ea typeface="Arial" pitchFamily="34" charset="-122"/>
-                <a:cs typeface="Arial" pitchFamily="34" charset="-120"/>
-              </a:rPr>
-              <a:t>One AGENTS.md per use-case project. Three are provided as a base — start from the matching one, fill the &lt;placeholders&gt;, then build.</a:t>
-            </a:r>
-            <a:endParaRPr lang="en-US" sz="1400" dirty="0"/>
+                <a:spcPts val="1316"/>
+              </a:lnSpc>
+              <a:buNone/>
+            </a:pPr>
+            <a:r>
+              <a:rPr lang="en-US" sz="940" dirty="0">
+                <a:solidFill>
+                  <a:srgbClr val="E7EEF2"/>
+                </a:solidFill>
+                <a:latin typeface="Courier New" pitchFamily="34" charset="0"/>
+                <a:ea typeface="Courier New" pitchFamily="34" charset="-122"/>
+                <a:cs typeface="Courier New" pitchFamily="34" charset="-120"/>
+              </a:rPr>
+              <a:t>## 7. MCP server build requirements</a:t>
+            </a:r>
+            <a:endParaRPr lang="en-US" sz="940" dirty="0"/>
+          </a:p>
+          <a:p>
+            <a:pPr indent="0" marL="0">
+              <a:lnSpc>
+                <a:spcPts val="1316"/>
+              </a:lnSpc>
+              <a:buNone/>
+            </a:pPr>
+            <a:r>
+              <a:rPr lang="en-US" sz="940" dirty="0">
+                <a:solidFill>
+                  <a:srgbClr val="E7EEF2"/>
+                </a:solidFill>
+                <a:latin typeface="Courier New" pitchFamily="34" charset="0"/>
+                <a:ea typeface="Courier New" pitchFamily="34" charset="-122"/>
+                <a:cs typeface="Courier New" pitchFamily="34" charset="-120"/>
+              </a:rPr>
+              <a:t>- HTTP transport; tools: &lt;list, mark destructive&gt;</a:t>
+            </a:r>
+            <a:endParaRPr lang="en-US" sz="940" dirty="0"/>
+          </a:p>
+          <a:p>
+            <a:pPr indent="0" marL="0">
+              <a:lnSpc>
+                <a:spcPts val="1316"/>
+              </a:lnSpc>
+              <a:buNone/>
+            </a:pPr>
+            <a:r>
+              <a:rPr lang="en-US" sz="940" dirty="0">
+                <a:solidFill>
+                  <a:srgbClr val="E7EEF2"/>
+                </a:solidFill>
+                <a:latin typeface="Courier New" pitchFamily="34" charset="0"/>
+                <a:ea typeface="Courier New" pitchFamily="34" charset="-122"/>
+                <a:cs typeface="Courier New" pitchFamily="34" charset="-120"/>
+              </a:rPr>
+              <a:t>- Every tool: typed I/O · auth · rate limit · audit · validated calls</a:t>
+            </a:r>
+            <a:endParaRPr lang="en-US" sz="940" dirty="0"/>
+          </a:p>
+          <a:p>
+            <a:pPr indent="0" marL="0">
+              <a:lnSpc>
+                <a:spcPts val="1316"/>
+              </a:lnSpc>
+              <a:buNone/>
+            </a:pPr>
+            <a:endParaRPr lang="en-US" sz="940" dirty="0"/>
+          </a:p>
+          <a:p>
+            <a:pPr indent="0" marL="0">
+              <a:lnSpc>
+                <a:spcPts val="1316"/>
+              </a:lnSpc>
+              <a:buNone/>
+            </a:pPr>
+            <a:r>
+              <a:rPr lang="en-US" sz="940" dirty="0">
+                <a:solidFill>
+                  <a:srgbClr val="E7EEF2"/>
+                </a:solidFill>
+                <a:latin typeface="Courier New" pitchFamily="34" charset="0"/>
+                <a:ea typeface="Courier New" pitchFamily="34" charset="-122"/>
+                <a:cs typeface="Courier New" pitchFamily="34" charset="-120"/>
+              </a:rPr>
+              <a:t>## 8. Project layout  (hexagonal — keep the core pure)</a:t>
+            </a:r>
+            <a:endParaRPr lang="en-US" sz="940" dirty="0"/>
+          </a:p>
+          <a:p>
+            <a:pPr indent="0" marL="0">
+              <a:lnSpc>
+                <a:spcPts val="1316"/>
+              </a:lnSpc>
+              <a:buNone/>
+            </a:pPr>
+            <a:r>
+              <a:rPr lang="en-US" sz="940" dirty="0">
+                <a:solidFill>
+                  <a:srgbClr val="E7EEF2"/>
+                </a:solidFill>
+                <a:latin typeface="Courier New" pitchFamily="34" charset="0"/>
+                <a:ea typeface="Courier New" pitchFamily="34" charset="-122"/>
+                <a:cs typeface="Courier New" pitchFamily="34" charset="-120"/>
+              </a:rPr>
+              <a:t>  app/core/      PURE: models.py ports.py agents.py guardrails.py</a:t>
+            </a:r>
+            <a:endParaRPr lang="en-US" sz="940" dirty="0"/>
+          </a:p>
+          <a:p>
+            <a:pPr indent="0" marL="0">
+              <a:lnSpc>
+                <a:spcPts val="1316"/>
+              </a:lnSpc>
+              <a:buNone/>
+            </a:pPr>
+            <a:r>
+              <a:rPr lang="en-US" sz="940" dirty="0">
+                <a:solidFill>
+                  <a:srgbClr val="E7EEF2"/>
+                </a:solidFill>
+                <a:latin typeface="Courier New" pitchFamily="34" charset="0"/>
+                <a:ea typeface="Courier New" pitchFamily="34" charset="-122"/>
+                <a:cs typeface="Courier New" pitchFamily="34" charset="-120"/>
+              </a:rPr>
+              <a:t>  app/adapters/  llm_client.py  mcp_tools.py</a:t>
+            </a:r>
+            <a:endParaRPr lang="en-US" sz="940" dirty="0"/>
+          </a:p>
+          <a:p>
+            <a:pPr indent="0" marL="0">
+              <a:lnSpc>
+                <a:spcPts val="1316"/>
+              </a:lnSpc>
+              <a:buNone/>
+            </a:pPr>
+            <a:r>
+              <a:rPr lang="en-US" sz="940" dirty="0">
+                <a:solidFill>
+                  <a:srgbClr val="E7EEF2"/>
+                </a:solidFill>
+                <a:latin typeface="Courier New" pitchFamily="34" charset="0"/>
+                <a:ea typeface="Courier New" pitchFamily="34" charset="-122"/>
+                <a:cs typeface="Courier New" pitchFamily="34" charset="-120"/>
+              </a:rPr>
+              <a:t>  app/api/       server.py  (FastAPI MCP server)</a:t>
+            </a:r>
+            <a:endParaRPr lang="en-US" sz="940" dirty="0"/>
+          </a:p>
+          <a:p>
+            <a:pPr indent="0" marL="0">
+              <a:lnSpc>
+                <a:spcPts val="1316"/>
+              </a:lnSpc>
+              <a:buNone/>
+            </a:pPr>
+            <a:r>
+              <a:rPr lang="en-US" sz="940" dirty="0">
+                <a:solidFill>
+                  <a:srgbClr val="E7EEF2"/>
+                </a:solidFill>
+                <a:latin typeface="Courier New" pitchFamily="34" charset="0"/>
+                <a:ea typeface="Courier New" pitchFamily="34" charset="-122"/>
+                <a:cs typeface="Courier New" pitchFamily="34" charset="-120"/>
+              </a:rPr>
+              <a:t>  app/tests/     contract + property tests (LLM mocked)</a:t>
+            </a:r>
+            <a:endParaRPr lang="en-US" sz="940" dirty="0"/>
+          </a:p>
+          <a:p>
+            <a:pPr indent="0" marL="0">
+              <a:lnSpc>
+                <a:spcPts val="1316"/>
+              </a:lnSpc>
+              <a:buNone/>
+            </a:pPr>
+            <a:r>
+              <a:rPr lang="en-US" sz="940" dirty="0">
+                <a:solidFill>
+                  <a:srgbClr val="E7EEF2"/>
+                </a:solidFill>
+                <a:latin typeface="Courier New" pitchFamily="34" charset="0"/>
+                <a:ea typeface="Courier New" pitchFamily="34" charset="-122"/>
+                <a:cs typeface="Courier New" pitchFamily="34" charset="-120"/>
+              </a:rPr>
+              <a:t>  .github/workflows/security.yml   (CI gate)</a:t>
+            </a:r>
+            <a:endParaRPr lang="en-US" sz="940" dirty="0"/>
+          </a:p>
+          <a:p>
+            <a:pPr indent="0" marL="0">
+              <a:lnSpc>
+                <a:spcPts val="1316"/>
+              </a:lnSpc>
+              <a:buNone/>
+            </a:pPr>
+            <a:endParaRPr lang="en-US" sz="940" dirty="0"/>
+          </a:p>
+          <a:p>
+            <a:pPr indent="0" marL="0">
+              <a:lnSpc>
+                <a:spcPts val="1316"/>
+              </a:lnSpc>
+              <a:buNone/>
+            </a:pPr>
+            <a:r>
+              <a:rPr lang="en-US" sz="940" dirty="0">
+                <a:solidFill>
+                  <a:srgbClr val="E7EEF2"/>
+                </a:solidFill>
+                <a:latin typeface="Courier New" pitchFamily="34" charset="0"/>
+                <a:ea typeface="Courier New" pitchFamily="34" charset="-122"/>
+                <a:cs typeface="Courier New" pitchFamily="34" charset="-120"/>
+              </a:rPr>
+              <a:t>## 9. Commands</a:t>
+            </a:r>
+            <a:endParaRPr lang="en-US" sz="940" dirty="0"/>
+          </a:p>
+          <a:p>
+            <a:pPr indent="0" marL="0">
+              <a:lnSpc>
+                <a:spcPts val="1316"/>
+              </a:lnSpc>
+              <a:buNone/>
+            </a:pPr>
+            <a:r>
+              <a:rPr lang="en-US" sz="940" dirty="0">
+                <a:solidFill>
+                  <a:srgbClr val="E7EEF2"/>
+                </a:solidFill>
+                <a:latin typeface="Courier New" pitchFamily="34" charset="0"/>
+                <a:ea typeface="Courier New" pitchFamily="34" charset="-122"/>
+                <a:cs typeface="Courier New" pitchFamily="34" charset="-120"/>
+              </a:rPr>
+              <a:t>  uv sync --frozen</a:t>
+            </a:r>
+            <a:endParaRPr lang="en-US" sz="940" dirty="0"/>
+          </a:p>
+          <a:p>
+            <a:pPr indent="0" marL="0">
+              <a:lnSpc>
+                <a:spcPts val="1316"/>
+              </a:lnSpc>
+              <a:buNone/>
+            </a:pPr>
+            <a:r>
+              <a:rPr lang="en-US" sz="940" dirty="0">
+                <a:solidFill>
+                  <a:srgbClr val="E7EEF2"/>
+                </a:solidFill>
+                <a:latin typeface="Courier New" pitchFamily="34" charset="0"/>
+                <a:ea typeface="Courier New" pitchFamily="34" charset="-122"/>
+                <a:cs typeface="Courier New" pitchFamily="34" charset="-120"/>
+              </a:rPr>
+              <a:t>  uv run uvicorn app.api.server:app --reload</a:t>
+            </a:r>
+            <a:endParaRPr lang="en-US" sz="940" dirty="0"/>
+          </a:p>
+          <a:p>
+            <a:pPr indent="0" marL="0">
+              <a:lnSpc>
+                <a:spcPts val="1316"/>
+              </a:lnSpc>
+              <a:buNone/>
+            </a:pPr>
+            <a:r>
+              <a:rPr lang="en-US" sz="940" dirty="0">
+                <a:solidFill>
+                  <a:srgbClr val="E7EEF2"/>
+                </a:solidFill>
+                <a:latin typeface="Courier New" pitchFamily="34" charset="0"/>
+                <a:ea typeface="Courier New" pitchFamily="34" charset="-122"/>
+                <a:cs typeface="Courier New" pitchFamily="34" charset="-120"/>
+              </a:rPr>
+              <a:t>  uv run pytest</a:t>
+            </a:r>
+            <a:endParaRPr lang="en-US" sz="940" dirty="0"/>
+          </a:p>
+          <a:p>
+            <a:pPr indent="0" marL="0">
+              <a:lnSpc>
+                <a:spcPts val="1316"/>
+              </a:lnSpc>
+              <a:buNone/>
+            </a:pPr>
+            <a:endParaRPr lang="en-US" sz="940" dirty="0"/>
+          </a:p>
+          <a:p>
+            <a:pPr indent="0" marL="0">
+              <a:lnSpc>
+                <a:spcPts val="1316"/>
+              </a:lnSpc>
+              <a:buNone/>
+            </a:pPr>
+            <a:r>
+              <a:rPr lang="en-US" sz="940" dirty="0">
+                <a:solidFill>
+                  <a:srgbClr val="E7EEF2"/>
+                </a:solidFill>
+                <a:latin typeface="Courier New" pitchFamily="34" charset="0"/>
+                <a:ea typeface="Courier New" pitchFamily="34" charset="-122"/>
+                <a:cs typeface="Courier New" pitchFamily="34" charset="-120"/>
+              </a:rPr>
+              <a:t>## 10. Definition of Done  (pipeline · 4 layers · 🔒 attacks blocked · CI green · README + trace)</a:t>
+            </a:r>
+            <a:endParaRPr lang="en-US" sz="940" dirty="0"/>
+          </a:p>
+          <a:p>
+            <a:pPr indent="0" marL="0">
+              <a:lnSpc>
+                <a:spcPts val="1316"/>
+              </a:lnSpc>
+              <a:buNone/>
+            </a:pPr>
+            <a:r>
+              <a:rPr lang="en-US" sz="940" dirty="0">
+                <a:solidFill>
+                  <a:srgbClr val="E7EEF2"/>
+                </a:solidFill>
+                <a:latin typeface="Courier New" pitchFamily="34" charset="0"/>
+                <a:ea typeface="Courier New" pitchFamily="34" charset="-122"/>
+                <a:cs typeface="Courier New" pitchFamily="34" charset="-120"/>
+              </a:rPr>
+              <a:t>## 11. Do / Don't  (explicit guardrails for the coding agent)</a:t>
+            </a:r>
+            <a:endParaRPr lang="en-US" sz="940" dirty="0"/>
+          </a:p>
+          <a:p>
+            <a:pPr indent="0" marL="0">
+              <a:lnSpc>
+                <a:spcPts val="1316"/>
+              </a:lnSpc>
+              <a:buNone/>
+            </a:pPr>
+            <a:r>
+              <a:rPr lang="en-US" sz="940" dirty="0">
+                <a:solidFill>
+                  <a:srgbClr val="E7EEF2"/>
+                </a:solidFill>
+                <a:latin typeface="Courier New" pitchFamily="34" charset="0"/>
+                <a:ea typeface="Courier New" pitchFamily="34" charset="-122"/>
+                <a:cs typeface="Courier New" pitchFamily="34" charset="-120"/>
+              </a:rPr>
+              <a:t>## 12. Documentation — README.md  (create + keep in sync with the code, every step)</a:t>
+            </a:r>
+            <a:endParaRPr lang="en-US" sz="940" dirty="0"/>
+          </a:p>
+          <a:p>
+            <a:pPr indent="0" marL="0">
+              <a:lnSpc>
+                <a:spcPts val="1316"/>
+              </a:lnSpc>
+              <a:buNone/>
+            </a:pPr>
+            <a:r>
+              <a:rPr lang="en-US" sz="940" dirty="0">
+                <a:solidFill>
+                  <a:srgbClr val="E7EEF2"/>
+                </a:solidFill>
+                <a:latin typeface="Courier New" pitchFamily="34" charset="0"/>
+                <a:ea typeface="Courier New" pitchFamily="34" charset="-122"/>
+                <a:cs typeface="Courier New" pitchFamily="34" charset="-120"/>
+              </a:rPr>
+              <a:t>## 13. SDD &amp; Traceability  (spec-first · SPEC-&lt;CS&gt;-NNN carried spec -&gt; code -&gt; test -&gt; PR)</a:t>
+            </a:r>
+            <a:endParaRPr lang="en-US" sz="940" dirty="0"/>
           </a:p>
         </p:txBody>
       </p:sp>
@@ -5349,108 +6135,49 @@
       </p:grpSpPr>
       <p:sp>
         <p:nvSpPr>
-          <p:cNvPr id="2" name="Text 0"/>
-          <p:cNvSpPr/>
-          <p:nvPr/>
-        </p:nvSpPr>
-        <p:spPr>
-          <a:xfrm>
-            <a:off x="548640" y="384048"/>
-            <a:ext cx="10058400" cy="274320"/>
-          </a:xfrm>
-          <a:prstGeom prst="rect">
-            <a:avLst/>
-          </a:prstGeom>
-          <a:noFill/>
-          <a:ln/>
-        </p:spPr>
-        <p:txBody>
-          <a:bodyPr wrap="square" rtlCol="0" anchor="ctr"/>
-          <a:lstStyle/>
-          <a:p>
-            <a:pPr indent="0" marL="0">
-              <a:buNone/>
-            </a:pPr>
-            <a:r>
-              <a:rPr lang="en-US" sz="1100" b="1" spc="200" kern="0" dirty="0">
-                <a:solidFill>
-                  <a:srgbClr val="E8460E"/>
-                </a:solidFill>
-                <a:latin typeface="Arial" pitchFamily="34" charset="0"/>
-                <a:ea typeface="Arial" pitchFamily="34" charset="-122"/>
-                <a:cs typeface="Arial" pitchFamily="34" charset="-120"/>
-              </a:rPr>
-              <a:t>THE THREE FILES</a:t>
-            </a:r>
-            <a:endParaRPr lang="en-US" sz="1100" dirty="0"/>
-          </a:p>
-        </p:txBody>
-      </p:sp>
-      <p:sp>
-        <p:nvSpPr>
-          <p:cNvPr id="3" name="Text 1"/>
-          <p:cNvSpPr/>
-          <p:nvPr/>
-        </p:nvSpPr>
-        <p:spPr>
-          <a:xfrm>
-            <a:off x="548640" y="621792"/>
-            <a:ext cx="10515600" cy="640080"/>
-          </a:xfrm>
-          <a:prstGeom prst="rect">
-            <a:avLst/>
-          </a:prstGeom>
-          <a:noFill/>
-          <a:ln/>
-        </p:spPr>
-        <p:txBody>
-          <a:bodyPr wrap="square" rtlCol="0" anchor="t"/>
-          <a:lstStyle/>
-          <a:p>
-            <a:pPr indent="0" marL="0">
-              <a:buNone/>
-            </a:pPr>
-            <a:r>
-              <a:rPr lang="en-US" sz="2500" b="1" dirty="0">
-                <a:solidFill>
-                  <a:srgbClr val="2E4552"/>
-                </a:solidFill>
-                <a:latin typeface="Arial" pitchFamily="34" charset="0"/>
-                <a:ea typeface="Arial" pitchFamily="34" charset="-122"/>
-                <a:cs typeface="Arial" pitchFamily="34" charset="-120"/>
-              </a:rPr>
-              <a:t>Your Three Starting Files</a:t>
-            </a:r>
-            <a:endParaRPr lang="en-US" sz="2500" dirty="0"/>
-          </a:p>
-        </p:txBody>
-      </p:sp>
-      <p:sp>
-        <p:nvSpPr>
-          <p:cNvPr id="4" name="Shape 2"/>
-          <p:cNvSpPr/>
-          <p:nvPr/>
-        </p:nvSpPr>
-        <p:spPr>
-          <a:xfrm>
-            <a:off x="548640" y="1298448"/>
-            <a:ext cx="11064240" cy="0"/>
-          </a:xfrm>
-          <a:prstGeom prst="line">
-            <a:avLst/>
-          </a:prstGeom>
-          <a:noFill/>
-          <a:ln w="19050">
-            <a:solidFill>
-              <a:srgbClr val="FF6600"/>
-            </a:solidFill>
-            <a:prstDash val="solid"/>
-          </a:ln>
+          <p:cNvPr id="2" name="Shape 0"/>
+          <p:cNvSpPr/>
+          <p:nvPr/>
+        </p:nvSpPr>
+        <p:spPr>
+          <a:xfrm>
+            <a:off x="0" y="0"/>
+            <a:ext cx="7406640" cy="6858000"/>
+          </a:xfrm>
+          <a:prstGeom prst="rect">
+            <a:avLst/>
+          </a:prstGeom>
+          <a:solidFill>
+            <a:srgbClr val="E8460E"/>
+          </a:solidFill>
+          <a:ln/>
+        </p:spPr>
+      </p:sp>
+      <p:sp>
+        <p:nvSpPr>
+          <p:cNvPr id="3" name="Shape 1"/>
+          <p:cNvSpPr/>
+          <p:nvPr/>
+        </p:nvSpPr>
+        <p:spPr>
+          <a:xfrm>
+            <a:off x="5394960" y="0"/>
+            <a:ext cx="2011680" cy="6858000"/>
+          </a:xfrm>
+          <a:prstGeom prst="rect">
+            <a:avLst/>
+          </a:prstGeom>
+          <a:solidFill>
+            <a:srgbClr val="FF6600">
+              <a:alpha val="70000"/>
+            </a:srgbClr>
+          </a:solidFill>
+          <a:ln/>
         </p:spPr>
       </p:sp>
       <p:pic>
         <p:nvPicPr>
-          <p:cNvPr id="5" name="Image 0" descr="unext_icon.png">    </p:cNvPr>
+          <p:cNvPr id="4" name="Image 0" descr="unext_white_lockup.png">    </p:cNvPr>
           <p:cNvPicPr>
             <a:picLocks noChangeAspect="1"/>
           </p:cNvPicPr>
@@ -5464,79 +6191,17 @@
         </p:blipFill>
         <p:spPr>
           <a:xfrm>
-            <a:off x="11430000" y="365760"/>
-            <a:ext cx="329184" cy="493776"/>
+            <a:off x="502920" y="457200"/>
+            <a:ext cx="2194560" cy="457200"/>
           </a:xfrm>
           <a:prstGeom prst="rect">
             <a:avLst/>
           </a:prstGeom>
         </p:spPr>
       </p:pic>
-      <p:sp>
-        <p:nvSpPr>
-          <p:cNvPr id="6" name="Shape 3"/>
-          <p:cNvSpPr/>
-          <p:nvPr/>
-        </p:nvSpPr>
-        <p:spPr>
-          <a:xfrm>
-            <a:off x="548640" y="6400800"/>
-            <a:ext cx="9418320" cy="0"/>
-          </a:xfrm>
-          <a:prstGeom prst="line">
-            <a:avLst/>
-          </a:prstGeom>
-          <a:noFill/>
-          <a:ln w="9525">
-            <a:solidFill>
-              <a:srgbClr val="F0DCB8"/>
-            </a:solidFill>
-            <a:prstDash val="solid"/>
-          </a:ln>
-        </p:spPr>
-      </p:sp>
-      <p:sp>
-        <p:nvSpPr>
-          <p:cNvPr id="7" name="Text 4"/>
-          <p:cNvSpPr/>
-          <p:nvPr/>
-        </p:nvSpPr>
-        <p:spPr>
-          <a:xfrm>
-            <a:off x="548640" y="6437376"/>
-            <a:ext cx="9326880" cy="365760"/>
-          </a:xfrm>
-          <a:prstGeom prst="rect">
-            <a:avLst/>
-          </a:prstGeom>
-          <a:noFill/>
-          <a:ln/>
-        </p:spPr>
-        <p:txBody>
-          <a:bodyPr wrap="square" rtlCol="0" anchor="t"/>
-          <a:lstStyle/>
-          <a:p>
-            <a:pPr indent="0" marL="0">
-              <a:buNone/>
-            </a:pPr>
-            <a:r>
-              <a:rPr lang="en-US" sz="700" dirty="0">
-                <a:solidFill>
-                  <a:srgbClr val="767171"/>
-                </a:solidFill>
-                <a:latin typeface="Arial" pitchFamily="34" charset="0"/>
-                <a:ea typeface="Arial" pitchFamily="34" charset="-122"/>
-                <a:cs typeface="Arial" pitchFamily="34" charset="-120"/>
-              </a:rPr>
-              <a:t>The content and the program approach is strictly confidential. It is strictly forbidden to share any part of this program design approach with any third party</a:t>
-            </a:r>
-            <a:endParaRPr lang="en-US" sz="700" dirty="0"/>
-          </a:p>
-        </p:txBody>
-      </p:sp>
       <p:pic>
         <p:nvPicPr>
-          <p:cNvPr id="8" name="Image 1" descr="unext_dark_lockup.png">    </p:cNvPr>
+          <p:cNvPr id="5" name="Image 1" descr="unext_icon.png">    </p:cNvPr>
           <p:cNvPicPr>
             <a:picLocks noChangeAspect="1"/>
           </p:cNvPicPr>
@@ -5550,8 +6215,8 @@
         </p:blipFill>
         <p:spPr>
           <a:xfrm>
-            <a:off x="10195560" y="6419088"/>
-            <a:ext cx="1417320" cy="301752"/>
+            <a:off x="9646920" y="502920"/>
+            <a:ext cx="457200" cy="685800"/>
           </a:xfrm>
           <a:prstGeom prst="rect">
             <a:avLst/>
@@ -5560,26 +6225,103 @@
       </p:pic>
       <p:sp>
         <p:nvSpPr>
-          <p:cNvPr id="9" name="Shape 5"/>
-          <p:cNvSpPr/>
-          <p:nvPr/>
-        </p:nvSpPr>
-        <p:spPr>
-          <a:xfrm>
-            <a:off x="548640" y="1828800"/>
-            <a:ext cx="3474720" cy="3200400"/>
-          </a:xfrm>
-          <a:prstGeom prst="roundRect">
-            <a:avLst>
-              <a:gd name="adj" fmla="val 2000"/>
-            </a:avLst>
-          </a:prstGeom>
-          <a:solidFill>
-            <a:srgbClr val="FDF1E7"/>
-          </a:solidFill>
-          <a:ln w="9525">
+          <p:cNvPr id="6" name="Text 2"/>
+          <p:cNvSpPr/>
+          <p:nvPr/>
+        </p:nvSpPr>
+        <p:spPr>
+          <a:xfrm>
+            <a:off x="548640" y="2514600"/>
+            <a:ext cx="6400800" cy="365760"/>
+          </a:xfrm>
+          <a:prstGeom prst="rect">
+            <a:avLst/>
+          </a:prstGeom>
+          <a:noFill/>
+          <a:ln/>
+        </p:spPr>
+        <p:txBody>
+          <a:bodyPr wrap="square" rtlCol="0" anchor="ctr"/>
+          <a:lstStyle/>
+          <a:p>
+            <a:pPr indent="0" marL="0">
+              <a:buNone/>
+            </a:pPr>
+            <a:r>
+              <a:rPr lang="en-US" sz="1400" b="1" spc="300" kern="0" dirty="0">
+                <a:solidFill>
+                  <a:srgbClr val="FFE9DC"/>
+                </a:solidFill>
+                <a:latin typeface="Arial" pitchFamily="34" charset="0"/>
+                <a:ea typeface="Arial" pitchFamily="34" charset="-122"/>
+                <a:cs typeface="Arial" pitchFamily="34" charset="-120"/>
+              </a:rPr>
+              <a:t>PART 4</a:t>
+            </a:r>
+            <a:endParaRPr lang="en-US" sz="1400" dirty="0"/>
+          </a:p>
+        </p:txBody>
+      </p:sp>
+      <p:sp>
+        <p:nvSpPr>
+          <p:cNvPr id="7" name="Text 3"/>
+          <p:cNvSpPr/>
+          <p:nvPr/>
+        </p:nvSpPr>
+        <p:spPr>
+          <a:xfrm>
+            <a:off x="548640" y="2880360"/>
+            <a:ext cx="6492240" cy="1463040"/>
+          </a:xfrm>
+          <a:prstGeom prst="rect">
+            <a:avLst/>
+          </a:prstGeom>
+          <a:noFill/>
+          <a:ln/>
+        </p:spPr>
+        <p:txBody>
+          <a:bodyPr wrap="square" rtlCol="0" anchor="t"/>
+          <a:lstStyle/>
+          <a:p>
+            <a:pPr indent="0" marL="0">
+              <a:lnSpc>
+                <a:spcPts val="3600"/>
+              </a:lnSpc>
+              <a:buNone/>
+            </a:pPr>
+            <a:r>
+              <a:rPr lang="en-US" sz="3200" b="1" dirty="0">
+                <a:solidFill>
+                  <a:srgbClr val="FFFFFF"/>
+                </a:solidFill>
+                <a:latin typeface="Arial" pitchFamily="34" charset="0"/>
+                <a:ea typeface="Arial" pitchFamily="34" charset="-122"/>
+                <a:cs typeface="Arial" pitchFamily="34" charset="-120"/>
+              </a:rPr>
+              <a:t>Using It Across the Two Days</a:t>
+            </a:r>
+            <a:endParaRPr lang="en-US" sz="3200" dirty="0"/>
+          </a:p>
+        </p:txBody>
+      </p:sp>
+      <p:sp>
+        <p:nvSpPr>
+          <p:cNvPr id="8" name="Shape 4"/>
+          <p:cNvSpPr/>
+          <p:nvPr/>
+        </p:nvSpPr>
+        <p:spPr>
+          <a:xfrm>
+            <a:off x="566928" y="4343400"/>
+            <a:ext cx="2926080" cy="0"/>
+          </a:xfrm>
+          <a:prstGeom prst="line">
+            <a:avLst/>
+          </a:prstGeom>
+          <a:noFill/>
+          <a:ln w="19050">
             <a:solidFill>
-              <a:srgbClr val="F0DCB8"/>
+              <a:srgbClr val="FFD9C2"/>
             </a:solidFill>
             <a:prstDash val="solid"/>
           </a:ln>
@@ -5587,14 +6329,14 @@
       </p:sp>
       <p:sp>
         <p:nvSpPr>
-          <p:cNvPr id="10" name="Text 6"/>
-          <p:cNvSpPr/>
-          <p:nvPr/>
-        </p:nvSpPr>
-        <p:spPr>
-          <a:xfrm>
-            <a:off x="685800" y="2011680"/>
-            <a:ext cx="3200400" cy="640080"/>
+          <p:cNvPr id="9" name="Text 5"/>
+          <p:cNvSpPr/>
+          <p:nvPr/>
+        </p:nvSpPr>
+        <p:spPr>
+          <a:xfrm>
+            <a:off x="7772400" y="2880360"/>
+            <a:ext cx="3931920" cy="2743200"/>
           </a:xfrm>
           <a:prstGeom prst="rect">
             <a:avLst/>
@@ -5606,456 +6348,24 @@
           <a:bodyPr wrap="square" rtlCol="0" anchor="t"/>
           <a:lstStyle/>
           <a:p>
-            <a:pPr algn="ctr" indent="0" marL="0">
-              <a:lnSpc>
-                <a:spcPts val="1600"/>
-              </a:lnSpc>
-              <a:buNone/>
-            </a:pPr>
-            <a:r>
-              <a:rPr lang="en-US" sz="1400" b="1" dirty="0">
-                <a:solidFill>
-                  <a:srgbClr val="E8460E"/>
-                </a:solidFill>
-                <a:latin typeface="Arial" pitchFamily="34" charset="0"/>
-                <a:ea typeface="Arial" pitchFamily="34" charset="-122"/>
-                <a:cs typeface="Arial" pitchFamily="34" charset="-120"/>
-              </a:rPr>
-              <a:t>CS1 · Documentation Automation</a:t>
+            <a:pPr indent="0" marL="0">
+              <a:lnSpc>
+                <a:spcPts val="2100"/>
+              </a:lnSpc>
+              <a:buNone/>
+            </a:pPr>
+            <a:r>
+              <a:rPr lang="en-US" sz="1400" dirty="0">
+                <a:solidFill>
+                  <a:srgbClr val="3A4556"/>
+                </a:solidFill>
+                <a:latin typeface="Arial" pitchFamily="34" charset="0"/>
+                <a:ea typeface="Arial" pitchFamily="34" charset="-122"/>
+                <a:cs typeface="Arial" pitchFamily="34" charset="-120"/>
+              </a:rPr>
+              <a:t>One AGENTS.md per use-case project. Three are provided as a base — start from the matching one, fill the &lt;placeholders&gt;, then build.</a:t>
             </a:r>
             <a:endParaRPr lang="en-US" sz="1400" dirty="0"/>
-          </a:p>
-        </p:txBody>
-      </p:sp>
-      <p:sp>
-        <p:nvSpPr>
-          <p:cNvPr id="11" name="Text 7"/>
-          <p:cNvSpPr/>
-          <p:nvPr/>
-        </p:nvSpPr>
-        <p:spPr>
-          <a:xfrm>
-            <a:off x="731520" y="2743200"/>
-            <a:ext cx="3108960" cy="822960"/>
-          </a:xfrm>
-          <a:prstGeom prst="rect">
-            <a:avLst/>
-          </a:prstGeom>
-          <a:noFill/>
-          <a:ln/>
-        </p:spPr>
-        <p:txBody>
-          <a:bodyPr wrap="square" rtlCol="0" anchor="t"/>
-          <a:lstStyle/>
-          <a:p>
-            <a:pPr algn="ctr" indent="0" marL="0">
-              <a:lnSpc>
-                <a:spcPts val="1500"/>
-              </a:lnSpc>
-              <a:buNone/>
-            </a:pPr>
-            <a:r>
-              <a:rPr lang="en-US" sz="1150" b="1" dirty="0">
-                <a:solidFill>
-                  <a:srgbClr val="1F2937"/>
-                </a:solidFill>
-                <a:latin typeface="Arial" pitchFamily="34" charset="0"/>
-                <a:ea typeface="Arial" pitchFamily="34" charset="-122"/>
-                <a:cs typeface="Arial" pitchFamily="34" charset="-120"/>
-              </a:rPr>
-              <a:t>Ingest → Structure → Draft → Review Routing</a:t>
-            </a:r>
-            <a:endParaRPr lang="en-US" sz="1150" dirty="0"/>
-          </a:p>
-        </p:txBody>
-      </p:sp>
-      <p:sp>
-        <p:nvSpPr>
-          <p:cNvPr id="12" name="Text 8"/>
-          <p:cNvSpPr/>
-          <p:nvPr/>
-        </p:nvSpPr>
-        <p:spPr>
-          <a:xfrm>
-            <a:off x="731520" y="3657600"/>
-            <a:ext cx="3108960" cy="1280160"/>
-          </a:xfrm>
-          <a:prstGeom prst="rect">
-            <a:avLst/>
-          </a:prstGeom>
-          <a:noFill/>
-          <a:ln/>
-        </p:spPr>
-        <p:txBody>
-          <a:bodyPr wrap="square" rtlCol="0" anchor="t"/>
-          <a:lstStyle/>
-          <a:p>
-            <a:pPr algn="ctr" indent="0" marL="0">
-              <a:lnSpc>
-                <a:spcPts val="1400"/>
-              </a:lnSpc>
-              <a:buNone/>
-            </a:pPr>
-            <a:r>
-              <a:rPr lang="en-US" sz="1050" dirty="0">
-                <a:solidFill>
-                  <a:srgbClr val="3A4556"/>
-                </a:solidFill>
-                <a:latin typeface="Arial" pitchFamily="34" charset="0"/>
-                <a:ea typeface="Arial" pitchFamily="34" charset="-122"/>
-                <a:cs typeface="Arial" pitchFamily="34" charset="-120"/>
-              </a:rPr>
-              <a:t>Tools: file_reader, template_library, version_control, approval_workflow</a:t>
-            </a:r>
-            <a:endParaRPr lang="en-US" sz="1050" dirty="0"/>
-          </a:p>
-        </p:txBody>
-      </p:sp>
-      <p:sp>
-        <p:nvSpPr>
-          <p:cNvPr id="13" name="Shape 9"/>
-          <p:cNvSpPr/>
-          <p:nvPr/>
-        </p:nvSpPr>
-        <p:spPr>
-          <a:xfrm>
-            <a:off x="4343400" y="1828800"/>
-            <a:ext cx="3474720" cy="3200400"/>
-          </a:xfrm>
-          <a:prstGeom prst="roundRect">
-            <a:avLst>
-              <a:gd name="adj" fmla="val 2000"/>
-            </a:avLst>
-          </a:prstGeom>
-          <a:solidFill>
-            <a:srgbClr val="F5F7FA"/>
-          </a:solidFill>
-          <a:ln w="9525">
-            <a:solidFill>
-              <a:srgbClr val="D7DEE8"/>
-            </a:solidFill>
-            <a:prstDash val="solid"/>
-          </a:ln>
-        </p:spPr>
-      </p:sp>
-      <p:sp>
-        <p:nvSpPr>
-          <p:cNvPr id="14" name="Text 10"/>
-          <p:cNvSpPr/>
-          <p:nvPr/>
-        </p:nvSpPr>
-        <p:spPr>
-          <a:xfrm>
-            <a:off x="4480560" y="2011680"/>
-            <a:ext cx="3200400" cy="640080"/>
-          </a:xfrm>
-          <a:prstGeom prst="rect">
-            <a:avLst/>
-          </a:prstGeom>
-          <a:noFill/>
-          <a:ln/>
-        </p:spPr>
-        <p:txBody>
-          <a:bodyPr wrap="square" rtlCol="0" anchor="t"/>
-          <a:lstStyle/>
-          <a:p>
-            <a:pPr algn="ctr" indent="0" marL="0">
-              <a:lnSpc>
-                <a:spcPts val="1600"/>
-              </a:lnSpc>
-              <a:buNone/>
-            </a:pPr>
-            <a:r>
-              <a:rPr lang="en-US" sz="1400" b="1" dirty="0">
-                <a:solidFill>
-                  <a:srgbClr val="0E7C7B"/>
-                </a:solidFill>
-                <a:latin typeface="Arial" pitchFamily="34" charset="0"/>
-                <a:ea typeface="Arial" pitchFamily="34" charset="-122"/>
-                <a:cs typeface="Arial" pitchFamily="34" charset="-120"/>
-              </a:rPr>
-              <a:t>CS2 · Content Creation</a:t>
-            </a:r>
-            <a:endParaRPr lang="en-US" sz="1400" dirty="0"/>
-          </a:p>
-        </p:txBody>
-      </p:sp>
-      <p:sp>
-        <p:nvSpPr>
-          <p:cNvPr id="15" name="Text 11"/>
-          <p:cNvSpPr/>
-          <p:nvPr/>
-        </p:nvSpPr>
-        <p:spPr>
-          <a:xfrm>
-            <a:off x="4526280" y="2743200"/>
-            <a:ext cx="3108960" cy="822960"/>
-          </a:xfrm>
-          <a:prstGeom prst="rect">
-            <a:avLst/>
-          </a:prstGeom>
-          <a:noFill/>
-          <a:ln/>
-        </p:spPr>
-        <p:txBody>
-          <a:bodyPr wrap="square" rtlCol="0" anchor="t"/>
-          <a:lstStyle/>
-          <a:p>
-            <a:pPr algn="ctr" indent="0" marL="0">
-              <a:lnSpc>
-                <a:spcPts val="1500"/>
-              </a:lnSpc>
-              <a:buNone/>
-            </a:pPr>
-            <a:r>
-              <a:rPr lang="en-US" sz="1150" b="1" dirty="0">
-                <a:solidFill>
-                  <a:srgbClr val="1F2937"/>
-                </a:solidFill>
-                <a:latin typeface="Arial" pitchFamily="34" charset="0"/>
-                <a:ea typeface="Arial" pitchFamily="34" charset="-122"/>
-                <a:cs typeface="Arial" pitchFamily="34" charset="-120"/>
-              </a:rPr>
-              <a:t>Brief → Draft → Style/Brand → Fact-Check</a:t>
-            </a:r>
-            <a:endParaRPr lang="en-US" sz="1150" dirty="0"/>
-          </a:p>
-        </p:txBody>
-      </p:sp>
-      <p:sp>
-        <p:nvSpPr>
-          <p:cNvPr id="16" name="Text 12"/>
-          <p:cNvSpPr/>
-          <p:nvPr/>
-        </p:nvSpPr>
-        <p:spPr>
-          <a:xfrm>
-            <a:off x="4526280" y="3657600"/>
-            <a:ext cx="3108960" cy="1280160"/>
-          </a:xfrm>
-          <a:prstGeom prst="rect">
-            <a:avLst/>
-          </a:prstGeom>
-          <a:noFill/>
-          <a:ln/>
-        </p:spPr>
-        <p:txBody>
-          <a:bodyPr wrap="square" rtlCol="0" anchor="t"/>
-          <a:lstStyle/>
-          <a:p>
-            <a:pPr algn="ctr" indent="0" marL="0">
-              <a:lnSpc>
-                <a:spcPts val="1400"/>
-              </a:lnSpc>
-              <a:buNone/>
-            </a:pPr>
-            <a:r>
-              <a:rPr lang="en-US" sz="1050" dirty="0">
-                <a:solidFill>
-                  <a:srgbClr val="3A4556"/>
-                </a:solidFill>
-                <a:latin typeface="Arial" pitchFamily="34" charset="0"/>
-                <a:ea typeface="Arial" pitchFamily="34" charset="-122"/>
-                <a:cs typeface="Arial" pitchFamily="34" charset="-120"/>
-              </a:rPr>
-              <a:t>Tools: knowledge_base, style_guide, asset_fetcher, publish_workflow</a:t>
-            </a:r>
-            <a:endParaRPr lang="en-US" sz="1050" dirty="0"/>
-          </a:p>
-        </p:txBody>
-      </p:sp>
-      <p:sp>
-        <p:nvSpPr>
-          <p:cNvPr id="17" name="Shape 13"/>
-          <p:cNvSpPr/>
-          <p:nvPr/>
-        </p:nvSpPr>
-        <p:spPr>
-          <a:xfrm>
-            <a:off x="8138160" y="1828800"/>
-            <a:ext cx="3474720" cy="3200400"/>
-          </a:xfrm>
-          <a:prstGeom prst="roundRect">
-            <a:avLst>
-              <a:gd name="adj" fmla="val 2000"/>
-            </a:avLst>
-          </a:prstGeom>
-          <a:solidFill>
-            <a:srgbClr val="F5F7FA"/>
-          </a:solidFill>
-          <a:ln w="9525">
-            <a:solidFill>
-              <a:srgbClr val="D7DEE8"/>
-            </a:solidFill>
-            <a:prstDash val="solid"/>
-          </a:ln>
-        </p:spPr>
-      </p:sp>
-      <p:sp>
-        <p:nvSpPr>
-          <p:cNvPr id="18" name="Text 14"/>
-          <p:cNvSpPr/>
-          <p:nvPr/>
-        </p:nvSpPr>
-        <p:spPr>
-          <a:xfrm>
-            <a:off x="8275320" y="2011680"/>
-            <a:ext cx="3200400" cy="640080"/>
-          </a:xfrm>
-          <a:prstGeom prst="rect">
-            <a:avLst/>
-          </a:prstGeom>
-          <a:noFill/>
-          <a:ln/>
-        </p:spPr>
-        <p:txBody>
-          <a:bodyPr wrap="square" rtlCol="0" anchor="t"/>
-          <a:lstStyle/>
-          <a:p>
-            <a:pPr algn="ctr" indent="0" marL="0">
-              <a:lnSpc>
-                <a:spcPts val="1600"/>
-              </a:lnSpc>
-              <a:buNone/>
-            </a:pPr>
-            <a:r>
-              <a:rPr lang="en-US" sz="1400" b="1" dirty="0">
-                <a:solidFill>
-                  <a:srgbClr val="2E4552"/>
-                </a:solidFill>
-                <a:latin typeface="Arial" pitchFamily="34" charset="0"/>
-                <a:ea typeface="Arial" pitchFamily="34" charset="-122"/>
-                <a:cs typeface="Arial" pitchFamily="34" charset="-120"/>
-              </a:rPr>
-              <a:t>CS3 · Self-Healing System</a:t>
-            </a:r>
-            <a:endParaRPr lang="en-US" sz="1400" dirty="0"/>
-          </a:p>
-        </p:txBody>
-      </p:sp>
-      <p:sp>
-        <p:nvSpPr>
-          <p:cNvPr id="19" name="Text 15"/>
-          <p:cNvSpPr/>
-          <p:nvPr/>
-        </p:nvSpPr>
-        <p:spPr>
-          <a:xfrm>
-            <a:off x="8321040" y="2743200"/>
-            <a:ext cx="3108960" cy="822960"/>
-          </a:xfrm>
-          <a:prstGeom prst="rect">
-            <a:avLst/>
-          </a:prstGeom>
-          <a:noFill/>
-          <a:ln/>
-        </p:spPr>
-        <p:txBody>
-          <a:bodyPr wrap="square" rtlCol="0" anchor="t"/>
-          <a:lstStyle/>
-          <a:p>
-            <a:pPr algn="ctr" indent="0" marL="0">
-              <a:lnSpc>
-                <a:spcPts val="1500"/>
-              </a:lnSpc>
-              <a:buNone/>
-            </a:pPr>
-            <a:r>
-              <a:rPr lang="en-US" sz="1150" b="1" dirty="0">
-                <a:solidFill>
-                  <a:srgbClr val="1F2937"/>
-                </a:solidFill>
-                <a:latin typeface="Arial" pitchFamily="34" charset="0"/>
-                <a:ea typeface="Arial" pitchFamily="34" charset="-122"/>
-                <a:cs typeface="Arial" pitchFamily="34" charset="-120"/>
-              </a:rPr>
-              <a:t>Monitor → Diagnose → Remediate → Validate</a:t>
-            </a:r>
-            <a:endParaRPr lang="en-US" sz="1150" dirty="0"/>
-          </a:p>
-        </p:txBody>
-      </p:sp>
-      <p:sp>
-        <p:nvSpPr>
-          <p:cNvPr id="20" name="Text 16"/>
-          <p:cNvSpPr/>
-          <p:nvPr/>
-        </p:nvSpPr>
-        <p:spPr>
-          <a:xfrm>
-            <a:off x="8321040" y="3657600"/>
-            <a:ext cx="3108960" cy="1280160"/>
-          </a:xfrm>
-          <a:prstGeom prst="rect">
-            <a:avLst/>
-          </a:prstGeom>
-          <a:noFill/>
-          <a:ln/>
-        </p:spPr>
-        <p:txBody>
-          <a:bodyPr wrap="square" rtlCol="0" anchor="t"/>
-          <a:lstStyle/>
-          <a:p>
-            <a:pPr algn="ctr" indent="0" marL="0">
-              <a:lnSpc>
-                <a:spcPts val="1400"/>
-              </a:lnSpc>
-              <a:buNone/>
-            </a:pPr>
-            <a:r>
-              <a:rPr lang="en-US" sz="1050" dirty="0">
-                <a:solidFill>
-                  <a:srgbClr val="3A4556"/>
-                </a:solidFill>
-                <a:latin typeface="Arial" pitchFamily="34" charset="0"/>
-                <a:ea typeface="Arial" pitchFamily="34" charset="-122"/>
-                <a:cs typeface="Arial" pitchFamily="34" charset="-120"/>
-              </a:rPr>
-              <a:t>Tools: log_metrics, alerting, runbook_executor, ticket_rollback</a:t>
-            </a:r>
-            <a:endParaRPr lang="en-US" sz="1050" dirty="0"/>
-          </a:p>
-        </p:txBody>
-      </p:sp>
-      <p:sp>
-        <p:nvSpPr>
-          <p:cNvPr id="21" name="Text 17"/>
-          <p:cNvSpPr/>
-          <p:nvPr/>
-        </p:nvSpPr>
-        <p:spPr>
-          <a:xfrm>
-            <a:off x="548640" y="5257800"/>
-            <a:ext cx="11064240" cy="640080"/>
-          </a:xfrm>
-          <a:prstGeom prst="rect">
-            <a:avLst/>
-          </a:prstGeom>
-          <a:noFill/>
-          <a:ln/>
-        </p:spPr>
-        <p:txBody>
-          <a:bodyPr wrap="square" rtlCol="0" anchor="ctr"/>
-          <a:lstStyle/>
-          <a:p>
-            <a:pPr algn="ctr" indent="0" marL="0">
-              <a:lnSpc>
-                <a:spcPts val="1600"/>
-              </a:lnSpc>
-              <a:buNone/>
-            </a:pPr>
-            <a:r>
-              <a:rPr lang="en-US" sz="1200" i="1" dirty="0">
-                <a:solidFill>
-                  <a:srgbClr val="0E7C7B"/>
-                </a:solidFill>
-                <a:latin typeface="Arial" pitchFamily="34" charset="0"/>
-                <a:ea typeface="Arial" pitchFamily="34" charset="-122"/>
-                <a:cs typeface="Arial" pitchFamily="34" charset="-120"/>
-              </a:rPr>
-              <a:t>Each is a complete, filled AGENTS.md — the agents, tools, domain guardrails and the 🔒 red-team check are already written. You fill the &lt;gateway&gt;, &lt;model&gt; and &lt;name&gt; placeholders and start building.</a:t>
-            </a:r>
-            <a:endParaRPr lang="en-US" sz="1200" dirty="0"/>
           </a:p>
         </p:txBody>
       </p:sp>
@@ -6124,7 +6434,7 @@
                 <a:ea typeface="Arial" pitchFamily="34" charset="-122"/>
                 <a:cs typeface="Arial" pitchFamily="34" charset="-120"/>
               </a:rPr>
-              <a:t>WORKFLOW</a:t>
+              <a:t>THE THREE FILES</a:t>
             </a:r>
             <a:endParaRPr lang="en-US" sz="1100" dirty="0"/>
           </a:p>
@@ -6163,7 +6473,7 @@
                 <a:ea typeface="Arial" pitchFamily="34" charset="-122"/>
                 <a:cs typeface="Arial" pitchFamily="34" charset="-120"/>
               </a:rPr>
-              <a:t>The Build Loop With OpenCode</a:t>
+              <a:t>Your Three Starting Files</a:t>
             </a:r>
             <a:endParaRPr lang="en-US" sz="2500" dirty="0"/>
           </a:p>
@@ -6310,12 +6620,165 @@
         </p:nvSpPr>
         <p:spPr>
           <a:xfrm>
-            <a:off x="548640" y="1554480"/>
-            <a:ext cx="6675120" cy="4480560"/>
+            <a:off x="548640" y="1828800"/>
+            <a:ext cx="3474720" cy="3200400"/>
           </a:xfrm>
           <a:prstGeom prst="roundRect">
             <a:avLst>
-              <a:gd name="adj" fmla="val 1429"/>
+              <a:gd name="adj" fmla="val 2000"/>
+            </a:avLst>
+          </a:prstGeom>
+          <a:solidFill>
+            <a:srgbClr val="FDF1E7"/>
+          </a:solidFill>
+          <a:ln w="9525">
+            <a:solidFill>
+              <a:srgbClr val="F0DCB8"/>
+            </a:solidFill>
+            <a:prstDash val="solid"/>
+          </a:ln>
+        </p:spPr>
+      </p:sp>
+      <p:sp>
+        <p:nvSpPr>
+          <p:cNvPr id="10" name="Text 6"/>
+          <p:cNvSpPr/>
+          <p:nvPr/>
+        </p:nvSpPr>
+        <p:spPr>
+          <a:xfrm>
+            <a:off x="685800" y="2011680"/>
+            <a:ext cx="3200400" cy="640080"/>
+          </a:xfrm>
+          <a:prstGeom prst="rect">
+            <a:avLst/>
+          </a:prstGeom>
+          <a:noFill/>
+          <a:ln/>
+        </p:spPr>
+        <p:txBody>
+          <a:bodyPr wrap="square" rtlCol="0" anchor="t"/>
+          <a:lstStyle/>
+          <a:p>
+            <a:pPr algn="ctr" indent="0" marL="0">
+              <a:lnSpc>
+                <a:spcPts val="1600"/>
+              </a:lnSpc>
+              <a:buNone/>
+            </a:pPr>
+            <a:r>
+              <a:rPr lang="en-US" sz="1400" b="1" dirty="0">
+                <a:solidFill>
+                  <a:srgbClr val="E8460E"/>
+                </a:solidFill>
+                <a:latin typeface="Arial" pitchFamily="34" charset="0"/>
+                <a:ea typeface="Arial" pitchFamily="34" charset="-122"/>
+                <a:cs typeface="Arial" pitchFamily="34" charset="-120"/>
+              </a:rPr>
+              <a:t>CS1 · Documentation Automation</a:t>
+            </a:r>
+            <a:endParaRPr lang="en-US" sz="1400" dirty="0"/>
+          </a:p>
+        </p:txBody>
+      </p:sp>
+      <p:sp>
+        <p:nvSpPr>
+          <p:cNvPr id="11" name="Text 7"/>
+          <p:cNvSpPr/>
+          <p:nvPr/>
+        </p:nvSpPr>
+        <p:spPr>
+          <a:xfrm>
+            <a:off x="731520" y="2743200"/>
+            <a:ext cx="3108960" cy="822960"/>
+          </a:xfrm>
+          <a:prstGeom prst="rect">
+            <a:avLst/>
+          </a:prstGeom>
+          <a:noFill/>
+          <a:ln/>
+        </p:spPr>
+        <p:txBody>
+          <a:bodyPr wrap="square" rtlCol="0" anchor="t"/>
+          <a:lstStyle/>
+          <a:p>
+            <a:pPr algn="ctr" indent="0" marL="0">
+              <a:lnSpc>
+                <a:spcPts val="1500"/>
+              </a:lnSpc>
+              <a:buNone/>
+            </a:pPr>
+            <a:r>
+              <a:rPr lang="en-US" sz="1150" b="1" dirty="0">
+                <a:solidFill>
+                  <a:srgbClr val="1F2937"/>
+                </a:solidFill>
+                <a:latin typeface="Arial" pitchFamily="34" charset="0"/>
+                <a:ea typeface="Arial" pitchFamily="34" charset="-122"/>
+                <a:cs typeface="Arial" pitchFamily="34" charset="-120"/>
+              </a:rPr>
+              <a:t>Ingest → Structure → Draft → Review Routing</a:t>
+            </a:r>
+            <a:endParaRPr lang="en-US" sz="1150" dirty="0"/>
+          </a:p>
+        </p:txBody>
+      </p:sp>
+      <p:sp>
+        <p:nvSpPr>
+          <p:cNvPr id="12" name="Text 8"/>
+          <p:cNvSpPr/>
+          <p:nvPr/>
+        </p:nvSpPr>
+        <p:spPr>
+          <a:xfrm>
+            <a:off x="731520" y="3657600"/>
+            <a:ext cx="3108960" cy="1280160"/>
+          </a:xfrm>
+          <a:prstGeom prst="rect">
+            <a:avLst/>
+          </a:prstGeom>
+          <a:noFill/>
+          <a:ln/>
+        </p:spPr>
+        <p:txBody>
+          <a:bodyPr wrap="square" rtlCol="0" anchor="t"/>
+          <a:lstStyle/>
+          <a:p>
+            <a:pPr algn="ctr" indent="0" marL="0">
+              <a:lnSpc>
+                <a:spcPts val="1400"/>
+              </a:lnSpc>
+              <a:buNone/>
+            </a:pPr>
+            <a:r>
+              <a:rPr lang="en-US" sz="1050" dirty="0">
+                <a:solidFill>
+                  <a:srgbClr val="3A4556"/>
+                </a:solidFill>
+                <a:latin typeface="Arial" pitchFamily="34" charset="0"/>
+                <a:ea typeface="Arial" pitchFamily="34" charset="-122"/>
+                <a:cs typeface="Arial" pitchFamily="34" charset="-120"/>
+              </a:rPr>
+              <a:t>Tools: file_reader, template_library, version_control, approval_workflow</a:t>
+            </a:r>
+            <a:endParaRPr lang="en-US" sz="1050" dirty="0"/>
+          </a:p>
+        </p:txBody>
+      </p:sp>
+      <p:sp>
+        <p:nvSpPr>
+          <p:cNvPr id="13" name="Shape 9"/>
+          <p:cNvSpPr/>
+          <p:nvPr/>
+        </p:nvSpPr>
+        <p:spPr>
+          <a:xfrm>
+            <a:off x="4343400" y="1828800"/>
+            <a:ext cx="3474720" cy="3200400"/>
+          </a:xfrm>
+          <a:prstGeom prst="roundRect">
+            <a:avLst>
+              <a:gd name="adj" fmla="val 2000"/>
             </a:avLst>
           </a:prstGeom>
           <a:solidFill>
@@ -6331,53 +6794,14 @@
       </p:sp>
       <p:sp>
         <p:nvSpPr>
-          <p:cNvPr id="10" name="Text 6"/>
-          <p:cNvSpPr/>
-          <p:nvPr/>
-        </p:nvSpPr>
-        <p:spPr>
-          <a:xfrm>
-            <a:off x="777240" y="1737360"/>
-            <a:ext cx="6217920" cy="365760"/>
-          </a:xfrm>
-          <a:prstGeom prst="rect">
-            <a:avLst/>
-          </a:prstGeom>
-          <a:noFill/>
-          <a:ln/>
-        </p:spPr>
-        <p:txBody>
-          <a:bodyPr wrap="square" rtlCol="0" anchor="ctr"/>
-          <a:lstStyle/>
-          <a:p>
-            <a:pPr indent="0" marL="0">
-              <a:buNone/>
-            </a:pPr>
-            <a:r>
-              <a:rPr lang="en-US" sz="1500" b="1" dirty="0">
-                <a:solidFill>
-                  <a:srgbClr val="E8460E"/>
-                </a:solidFill>
-                <a:latin typeface="Arial" pitchFamily="34" charset="0"/>
-                <a:ea typeface="Arial" pitchFamily="34" charset="-122"/>
-                <a:cs typeface="Arial" pitchFamily="34" charset="-120"/>
-              </a:rPr>
-              <a:t>Step by step</a:t>
-            </a:r>
-            <a:endParaRPr lang="en-US" sz="1500" dirty="0"/>
-          </a:p>
-        </p:txBody>
-      </p:sp>
-      <p:sp>
-        <p:nvSpPr>
-          <p:cNvPr id="11" name="Text 7"/>
-          <p:cNvSpPr/>
-          <p:nvPr/>
-        </p:nvSpPr>
-        <p:spPr>
-          <a:xfrm>
-            <a:off x="777240" y="2194560"/>
-            <a:ext cx="6309360" cy="3749040"/>
+          <p:cNvPr id="14" name="Text 10"/>
+          <p:cNvSpPr/>
+          <p:nvPr/>
+        </p:nvSpPr>
+        <p:spPr>
+          <a:xfrm>
+            <a:off x="4480560" y="2011680"/>
+            <a:ext cx="3200400" cy="640080"/>
           </a:xfrm>
           <a:prstGeom prst="rect">
             <a:avLst/>
@@ -6389,18 +6813,98 @@
           <a:bodyPr wrap="square" rtlCol="0" anchor="t"/>
           <a:lstStyle/>
           <a:p>
-            <a:pPr marL="203200" indent="-203200">
+            <a:pPr algn="ctr" indent="0" marL="0">
+              <a:lnSpc>
+                <a:spcPts val="1600"/>
+              </a:lnSpc>
+              <a:buNone/>
+            </a:pPr>
+            <a:r>
+              <a:rPr lang="en-US" sz="1400" b="1" dirty="0">
+                <a:solidFill>
+                  <a:srgbClr val="0E7C7B"/>
+                </a:solidFill>
+                <a:latin typeface="Arial" pitchFamily="34" charset="0"/>
+                <a:ea typeface="Arial" pitchFamily="34" charset="-122"/>
+                <a:cs typeface="Arial" pitchFamily="34" charset="-120"/>
+              </a:rPr>
+              <a:t>CS2 · Content Creation</a:t>
+            </a:r>
+            <a:endParaRPr lang="en-US" sz="1400" dirty="0"/>
+          </a:p>
+        </p:txBody>
+      </p:sp>
+      <p:sp>
+        <p:nvSpPr>
+          <p:cNvPr id="15" name="Text 11"/>
+          <p:cNvSpPr/>
+          <p:nvPr/>
+        </p:nvSpPr>
+        <p:spPr>
+          <a:xfrm>
+            <a:off x="4526280" y="2743200"/>
+            <a:ext cx="3108960" cy="822960"/>
+          </a:xfrm>
+          <a:prstGeom prst="rect">
+            <a:avLst/>
+          </a:prstGeom>
+          <a:noFill/>
+          <a:ln/>
+        </p:spPr>
+        <p:txBody>
+          <a:bodyPr wrap="square" rtlCol="0" anchor="t"/>
+          <a:lstStyle/>
+          <a:p>
+            <a:pPr algn="ctr" indent="0" marL="0">
               <a:lnSpc>
                 <a:spcPts val="1500"/>
               </a:lnSpc>
-              <a:spcAft>
-                <a:spcPts val="600"/>
-              </a:spcAft>
-              <a:buSzPct val="100000"/>
-              <a:buChar char="•"/>
-            </a:pPr>
-            <a:r>
-              <a:rPr lang="en-US" sz="1200" b="1" dirty="0">
+              <a:buNone/>
+            </a:pPr>
+            <a:r>
+              <a:rPr lang="en-US" sz="1150" b="1" dirty="0">
+                <a:solidFill>
+                  <a:srgbClr val="1F2937"/>
+                </a:solidFill>
+                <a:latin typeface="Arial" pitchFamily="34" charset="0"/>
+                <a:ea typeface="Arial" pitchFamily="34" charset="-122"/>
+                <a:cs typeface="Arial" pitchFamily="34" charset="-120"/>
+              </a:rPr>
+              <a:t>Brief → Draft → Style/Brand → Fact-Check</a:t>
+            </a:r>
+            <a:endParaRPr lang="en-US" sz="1150" dirty="0"/>
+          </a:p>
+        </p:txBody>
+      </p:sp>
+      <p:sp>
+        <p:nvSpPr>
+          <p:cNvPr id="16" name="Text 12"/>
+          <p:cNvSpPr/>
+          <p:nvPr/>
+        </p:nvSpPr>
+        <p:spPr>
+          <a:xfrm>
+            <a:off x="4526280" y="3657600"/>
+            <a:ext cx="3108960" cy="1280160"/>
+          </a:xfrm>
+          <a:prstGeom prst="rect">
+            <a:avLst/>
+          </a:prstGeom>
+          <a:noFill/>
+          <a:ln/>
+        </p:spPr>
+        <p:txBody>
+          <a:bodyPr wrap="square" rtlCol="0" anchor="t"/>
+          <a:lstStyle/>
+          <a:p>
+            <a:pPr algn="ctr" indent="0" marL="0">
+              <a:lnSpc>
+                <a:spcPts val="1400"/>
+              </a:lnSpc>
+              <a:buNone/>
+            </a:pPr>
+            <a:r>
+              <a:rPr lang="en-US" sz="1050" dirty="0">
                 <a:solidFill>
                   <a:srgbClr val="3A4556"/>
                 </a:solidFill>
@@ -6408,250 +6912,34 @@
                 <a:ea typeface="Arial" pitchFamily="34" charset="-122"/>
                 <a:cs typeface="Arial" pitchFamily="34" charset="-120"/>
               </a:rPr>
-              <a:t>1 · Put AGENTS.md at your project root</a:t>
-            </a:r>
-            <a:endParaRPr lang="en-US" sz="1200" dirty="0"/>
-          </a:p>
-          <a:p>
-            <a:pPr marL="203200" indent="-203200">
-              <a:lnSpc>
-                <a:spcPts val="1500"/>
-              </a:lnSpc>
-              <a:spcAft>
-                <a:spcPts val="600"/>
-              </a:spcAft>
-              <a:buSzPct val="100000"/>
-              <a:buChar char="•"/>
-            </a:pPr>
-            <a:r>
-              <a:rPr lang="en-US" sz="1200" dirty="0">
-                <a:solidFill>
-                  <a:srgbClr val="3A4556"/>
-                </a:solidFill>
-                <a:latin typeface="Arial" pitchFamily="34" charset="0"/>
-                <a:ea typeface="Arial" pitchFamily="34" charset="-122"/>
-                <a:cs typeface="Arial" pitchFamily="34" charset="-120"/>
-              </a:rPr>
-              <a:t>   OpenCode reads it automatically — no flag needed</a:t>
-            </a:r>
-            <a:endParaRPr lang="en-US" sz="1200" dirty="0"/>
-          </a:p>
-          <a:p>
-            <a:pPr marL="203200" indent="-203200">
-              <a:lnSpc>
-                <a:spcPts val="1500"/>
-              </a:lnSpc>
-              <a:spcAft>
-                <a:spcPts val="600"/>
-              </a:spcAft>
-              <a:buSzPct val="100000"/>
-              <a:buChar char="•"/>
-            </a:pPr>
-            <a:r>
-              <a:rPr lang="en-US" sz="1200" b="1" dirty="0">
-                <a:solidFill>
-                  <a:srgbClr val="3A4556"/>
-                </a:solidFill>
-                <a:latin typeface="Arial" pitchFamily="34" charset="0"/>
-                <a:ea typeface="Arial" pitchFamily="34" charset="-122"/>
-                <a:cs typeface="Arial" pitchFamily="34" charset="-120"/>
-              </a:rPr>
-              <a:t>2 · Fill the placeholders</a:t>
-            </a:r>
-            <a:endParaRPr lang="en-US" sz="1200" dirty="0"/>
-          </a:p>
-          <a:p>
-            <a:pPr marL="203200" indent="-203200">
-              <a:lnSpc>
-                <a:spcPts val="1500"/>
-              </a:lnSpc>
-              <a:spcAft>
-                <a:spcPts val="600"/>
-              </a:spcAft>
-              <a:buSzPct val="100000"/>
-              <a:buChar char="•"/>
-            </a:pPr>
-            <a:r>
-              <a:rPr lang="en-US" sz="1200" dirty="0">
-                <a:solidFill>
-                  <a:srgbClr val="3A4556"/>
-                </a:solidFill>
-                <a:latin typeface="Arial" pitchFamily="34" charset="0"/>
-                <a:ea typeface="Arial" pitchFamily="34" charset="-122"/>
-                <a:cs typeface="Arial" pitchFamily="34" charset="-120"/>
-              </a:rPr>
-              <a:t>   &lt;gateway&gt; IP, &lt;model&gt;, your name, framework choice</a:t>
-            </a:r>
-            <a:endParaRPr lang="en-US" sz="1200" dirty="0"/>
-          </a:p>
-          <a:p>
-            <a:pPr marL="203200" indent="-203200">
-              <a:lnSpc>
-                <a:spcPts val="1500"/>
-              </a:lnSpc>
-              <a:spcAft>
-                <a:spcPts val="600"/>
-              </a:spcAft>
-              <a:buSzPct val="100000"/>
-              <a:buChar char="•"/>
-            </a:pPr>
-            <a:r>
-              <a:rPr lang="en-US" sz="1200" b="1" dirty="0">
-                <a:solidFill>
-                  <a:srgbClr val="3A4556"/>
-                </a:solidFill>
-                <a:latin typeface="Arial" pitchFamily="34" charset="0"/>
-                <a:ea typeface="Arial" pitchFamily="34" charset="-122"/>
-                <a:cs typeface="Arial" pitchFamily="34" charset="-120"/>
-              </a:rPr>
-              <a:t>3 · Prompt in plain English, one agent at a time</a:t>
-            </a:r>
-            <a:endParaRPr lang="en-US" sz="1200" dirty="0"/>
-          </a:p>
-          <a:p>
-            <a:pPr marL="203200" indent="-203200">
-              <a:lnSpc>
-                <a:spcPts val="1500"/>
-              </a:lnSpc>
-              <a:spcAft>
-                <a:spcPts val="600"/>
-              </a:spcAft>
-              <a:buSzPct val="100000"/>
-              <a:buChar char="•"/>
-            </a:pPr>
-            <a:r>
-              <a:rPr lang="en-US" sz="1200" dirty="0">
-                <a:solidFill>
-                  <a:srgbClr val="3A4556"/>
-                </a:solidFill>
-                <a:latin typeface="Arial" pitchFamily="34" charset="0"/>
-                <a:ea typeface="Arial" pitchFamily="34" charset="-122"/>
-                <a:cs typeface="Arial" pitchFamily="34" charset="-120"/>
-              </a:rPr>
-              <a:t>   "Build the Ingest agent and its pre-hook"</a:t>
-            </a:r>
-            <a:endParaRPr lang="en-US" sz="1200" dirty="0"/>
-          </a:p>
-          <a:p>
-            <a:pPr marL="203200" indent="-203200">
-              <a:lnSpc>
-                <a:spcPts val="1500"/>
-              </a:lnSpc>
-              <a:spcAft>
-                <a:spcPts val="600"/>
-              </a:spcAft>
-              <a:buSzPct val="100000"/>
-              <a:buChar char="•"/>
-            </a:pPr>
-            <a:r>
-              <a:rPr lang="en-US" sz="1200" b="1" dirty="0">
-                <a:solidFill>
-                  <a:srgbClr val="3A4556"/>
-                </a:solidFill>
-                <a:latin typeface="Arial" pitchFamily="34" charset="0"/>
-                <a:ea typeface="Arial" pitchFamily="34" charset="-122"/>
-                <a:cs typeface="Arial" pitchFamily="34" charset="-120"/>
-              </a:rPr>
-              <a:t>4 · Review every change before you accept it</a:t>
-            </a:r>
-            <a:endParaRPr lang="en-US" sz="1200" dirty="0"/>
-          </a:p>
-          <a:p>
-            <a:pPr marL="203200" indent="-203200">
-              <a:lnSpc>
-                <a:spcPts val="1500"/>
-              </a:lnSpc>
-              <a:spcAft>
-                <a:spcPts val="600"/>
-              </a:spcAft>
-              <a:buSzPct val="100000"/>
-              <a:buChar char="•"/>
-            </a:pPr>
-            <a:r>
-              <a:rPr lang="en-US" sz="1200" dirty="0">
-                <a:solidFill>
-                  <a:srgbClr val="3A4556"/>
-                </a:solidFill>
-                <a:latin typeface="Arial" pitchFamily="34" charset="0"/>
-                <a:ea typeface="Arial" pitchFamily="34" charset="-122"/>
-                <a:cs typeface="Arial" pitchFamily="34" charset="-120"/>
-              </a:rPr>
-              <a:t>   the scaffold rules make the diff easy to trust</a:t>
-            </a:r>
-            <a:endParaRPr lang="en-US" sz="1200" dirty="0"/>
-          </a:p>
-          <a:p>
-            <a:pPr marL="203200" indent="-203200">
-              <a:lnSpc>
-                <a:spcPts val="1500"/>
-              </a:lnSpc>
-              <a:spcAft>
-                <a:spcPts val="600"/>
-              </a:spcAft>
-              <a:buSzPct val="100000"/>
-              <a:buChar char="•"/>
-            </a:pPr>
-            <a:r>
-              <a:rPr lang="en-US" sz="1200" b="1" dirty="0">
-                <a:solidFill>
-                  <a:srgbClr val="3A4556"/>
-                </a:solidFill>
-                <a:latin typeface="Arial" pitchFamily="34" charset="0"/>
-                <a:ea typeface="Arial" pitchFamily="34" charset="-122"/>
-                <a:cs typeface="Arial" pitchFamily="34" charset="-120"/>
-              </a:rPr>
-              <a:t>5 · Run the loop: Define → … → Attack → Commit</a:t>
-            </a:r>
-            <a:endParaRPr lang="en-US" sz="1200" dirty="0"/>
-          </a:p>
-          <a:p>
-            <a:pPr marL="203200" indent="-203200">
-              <a:lnSpc>
-                <a:spcPts val="1500"/>
-              </a:lnSpc>
-              <a:spcAft>
-                <a:spcPts val="600"/>
-              </a:spcAft>
-              <a:buSzPct val="100000"/>
-              <a:buChar char="•"/>
-            </a:pPr>
-            <a:r>
-              <a:rPr lang="en-US" sz="1200" dirty="0">
-                <a:solidFill>
-                  <a:srgbClr val="3A4556"/>
-                </a:solidFill>
-                <a:latin typeface="Arial" pitchFamily="34" charset="0"/>
-                <a:ea typeface="Arial" pitchFamily="34" charset="-122"/>
-                <a:cs typeface="Arial" pitchFamily="34" charset="-120"/>
-              </a:rPr>
-              <a:t>   re-run the red-team checks; commit when green</a:t>
-            </a:r>
-            <a:endParaRPr lang="en-US" sz="1200" dirty="0"/>
-          </a:p>
-        </p:txBody>
-      </p:sp>
-      <p:sp>
-        <p:nvSpPr>
-          <p:cNvPr id="12" name="Shape 8"/>
-          <p:cNvSpPr/>
-          <p:nvPr/>
-        </p:nvSpPr>
-        <p:spPr>
-          <a:xfrm>
-            <a:off x="7406640" y="1554480"/>
-            <a:ext cx="4206240" cy="4480560"/>
+              <a:t>Tools: knowledge_base, style_guide, asset_fetcher, publish_workflow</a:t>
+            </a:r>
+            <a:endParaRPr lang="en-US" sz="1050" dirty="0"/>
+          </a:p>
+        </p:txBody>
+      </p:sp>
+      <p:sp>
+        <p:nvSpPr>
+          <p:cNvPr id="17" name="Shape 13"/>
+          <p:cNvSpPr/>
+          <p:nvPr/>
+        </p:nvSpPr>
+        <p:spPr>
+          <a:xfrm>
+            <a:off x="8138160" y="1828800"/>
+            <a:ext cx="3474720" cy="3200400"/>
           </a:xfrm>
           <a:prstGeom prst="roundRect">
             <a:avLst>
-              <a:gd name="adj" fmla="val 1522"/>
+              <a:gd name="adj" fmla="val 2000"/>
             </a:avLst>
           </a:prstGeom>
           <a:solidFill>
-            <a:srgbClr val="FDF1E7"/>
+            <a:srgbClr val="F5F7FA"/>
           </a:solidFill>
           <a:ln w="9525">
             <a:solidFill>
-              <a:srgbClr val="F0DCB8"/>
+              <a:srgbClr val="D7DEE8"/>
             </a:solidFill>
             <a:prstDash val="solid"/>
           </a:ln>
@@ -6659,14 +6947,140 @@
       </p:sp>
       <p:sp>
         <p:nvSpPr>
-          <p:cNvPr id="13" name="Text 9"/>
-          <p:cNvSpPr/>
-          <p:nvPr/>
-        </p:nvSpPr>
-        <p:spPr>
-          <a:xfrm>
-            <a:off x="7635240" y="1737360"/>
-            <a:ext cx="3749040" cy="365760"/>
+          <p:cNvPr id="18" name="Text 14"/>
+          <p:cNvSpPr/>
+          <p:nvPr/>
+        </p:nvSpPr>
+        <p:spPr>
+          <a:xfrm>
+            <a:off x="8275320" y="2011680"/>
+            <a:ext cx="3200400" cy="640080"/>
+          </a:xfrm>
+          <a:prstGeom prst="rect">
+            <a:avLst/>
+          </a:prstGeom>
+          <a:noFill/>
+          <a:ln/>
+        </p:spPr>
+        <p:txBody>
+          <a:bodyPr wrap="square" rtlCol="0" anchor="t"/>
+          <a:lstStyle/>
+          <a:p>
+            <a:pPr algn="ctr" indent="0" marL="0">
+              <a:lnSpc>
+                <a:spcPts val="1600"/>
+              </a:lnSpc>
+              <a:buNone/>
+            </a:pPr>
+            <a:r>
+              <a:rPr lang="en-US" sz="1400" b="1" dirty="0">
+                <a:solidFill>
+                  <a:srgbClr val="2E4552"/>
+                </a:solidFill>
+                <a:latin typeface="Arial" pitchFamily="34" charset="0"/>
+                <a:ea typeface="Arial" pitchFamily="34" charset="-122"/>
+                <a:cs typeface="Arial" pitchFamily="34" charset="-120"/>
+              </a:rPr>
+              <a:t>CS3 · Self-Healing System</a:t>
+            </a:r>
+            <a:endParaRPr lang="en-US" sz="1400" dirty="0"/>
+          </a:p>
+        </p:txBody>
+      </p:sp>
+      <p:sp>
+        <p:nvSpPr>
+          <p:cNvPr id="19" name="Text 15"/>
+          <p:cNvSpPr/>
+          <p:nvPr/>
+        </p:nvSpPr>
+        <p:spPr>
+          <a:xfrm>
+            <a:off x="8321040" y="2743200"/>
+            <a:ext cx="3108960" cy="822960"/>
+          </a:xfrm>
+          <a:prstGeom prst="rect">
+            <a:avLst/>
+          </a:prstGeom>
+          <a:noFill/>
+          <a:ln/>
+        </p:spPr>
+        <p:txBody>
+          <a:bodyPr wrap="square" rtlCol="0" anchor="t"/>
+          <a:lstStyle/>
+          <a:p>
+            <a:pPr algn="ctr" indent="0" marL="0">
+              <a:lnSpc>
+                <a:spcPts val="1500"/>
+              </a:lnSpc>
+              <a:buNone/>
+            </a:pPr>
+            <a:r>
+              <a:rPr lang="en-US" sz="1150" b="1" dirty="0">
+                <a:solidFill>
+                  <a:srgbClr val="1F2937"/>
+                </a:solidFill>
+                <a:latin typeface="Arial" pitchFamily="34" charset="0"/>
+                <a:ea typeface="Arial" pitchFamily="34" charset="-122"/>
+                <a:cs typeface="Arial" pitchFamily="34" charset="-120"/>
+              </a:rPr>
+              <a:t>Monitor → Diagnose → Remediate → Validate</a:t>
+            </a:r>
+            <a:endParaRPr lang="en-US" sz="1150" dirty="0"/>
+          </a:p>
+        </p:txBody>
+      </p:sp>
+      <p:sp>
+        <p:nvSpPr>
+          <p:cNvPr id="20" name="Text 16"/>
+          <p:cNvSpPr/>
+          <p:nvPr/>
+        </p:nvSpPr>
+        <p:spPr>
+          <a:xfrm>
+            <a:off x="8321040" y="3657600"/>
+            <a:ext cx="3108960" cy="1280160"/>
+          </a:xfrm>
+          <a:prstGeom prst="rect">
+            <a:avLst/>
+          </a:prstGeom>
+          <a:noFill/>
+          <a:ln/>
+        </p:spPr>
+        <p:txBody>
+          <a:bodyPr wrap="square" rtlCol="0" anchor="t"/>
+          <a:lstStyle/>
+          <a:p>
+            <a:pPr algn="ctr" indent="0" marL="0">
+              <a:lnSpc>
+                <a:spcPts val="1400"/>
+              </a:lnSpc>
+              <a:buNone/>
+            </a:pPr>
+            <a:r>
+              <a:rPr lang="en-US" sz="1050" dirty="0">
+                <a:solidFill>
+                  <a:srgbClr val="3A4556"/>
+                </a:solidFill>
+                <a:latin typeface="Arial" pitchFamily="34" charset="0"/>
+                <a:ea typeface="Arial" pitchFamily="34" charset="-122"/>
+                <a:cs typeface="Arial" pitchFamily="34" charset="-120"/>
+              </a:rPr>
+              <a:t>Tools: log_metrics, alerting, runbook_executor, ticket_rollback</a:t>
+            </a:r>
+            <a:endParaRPr lang="en-US" sz="1050" dirty="0"/>
+          </a:p>
+        </p:txBody>
+      </p:sp>
+      <p:sp>
+        <p:nvSpPr>
+          <p:cNvPr id="21" name="Text 17"/>
+          <p:cNvSpPr/>
+          <p:nvPr/>
+        </p:nvSpPr>
+        <p:spPr>
+          <a:xfrm>
+            <a:off x="548640" y="5257800"/>
+            <a:ext cx="11064240" cy="640080"/>
           </a:xfrm>
           <a:prstGeom prst="rect">
             <a:avLst/>
@@ -6678,139 +7092,24 @@
           <a:bodyPr wrap="square" rtlCol="0" anchor="ctr"/>
           <a:lstStyle/>
           <a:p>
-            <a:pPr indent="0" marL="0">
-              <a:buNone/>
-            </a:pPr>
-            <a:r>
-              <a:rPr lang="en-US" sz="1400" b="1" dirty="0">
-                <a:solidFill>
-                  <a:srgbClr val="2E4552"/>
-                </a:solidFill>
-                <a:latin typeface="Arial" pitchFamily="34" charset="0"/>
-                <a:ea typeface="Arial" pitchFamily="34" charset="-122"/>
-                <a:cs typeface="Arial" pitchFamily="34" charset="-120"/>
-              </a:rPr>
-              <a:t>Keep AGENTS.md alive</a:t>
-            </a:r>
-            <a:endParaRPr lang="en-US" sz="1400" dirty="0"/>
-          </a:p>
-        </p:txBody>
-      </p:sp>
-      <p:sp>
-        <p:nvSpPr>
-          <p:cNvPr id="14" name="Text 10"/>
-          <p:cNvSpPr/>
-          <p:nvPr/>
-        </p:nvSpPr>
-        <p:spPr>
-          <a:xfrm>
-            <a:off x="7635240" y="2194560"/>
-            <a:ext cx="3749040" cy="3749040"/>
-          </a:xfrm>
-          <a:prstGeom prst="rect">
-            <a:avLst/>
-          </a:prstGeom>
-          <a:noFill/>
-          <a:ln/>
-        </p:spPr>
-        <p:txBody>
-          <a:bodyPr wrap="square" rtlCol="0" anchor="t"/>
-          <a:lstStyle/>
-          <a:p>
-            <a:pPr marL="203200" indent="-203200">
-              <a:lnSpc>
-                <a:spcPts val="1500"/>
-              </a:lnSpc>
-              <a:spcAft>
-                <a:spcPts val="1000"/>
-              </a:spcAft>
-              <a:buSzPct val="100000"/>
-              <a:buChar char="•"/>
-            </a:pPr>
-            <a:r>
-              <a:rPr lang="en-US" sz="1150" b="1" dirty="0">
-                <a:solidFill>
-                  <a:srgbClr val="1F2937"/>
-                </a:solidFill>
-                <a:latin typeface="Arial" pitchFamily="34" charset="0"/>
-                <a:ea typeface="Arial" pitchFamily="34" charset="-122"/>
-                <a:cs typeface="Arial" pitchFamily="34" charset="-120"/>
-              </a:rPr>
-              <a:t>Edit it as the design changes — it's the source of truth</a:t>
-            </a:r>
-            <a:endParaRPr lang="en-US" sz="1150" dirty="0"/>
-          </a:p>
-          <a:p>
-            <a:pPr marL="203200" indent="-203200">
-              <a:lnSpc>
-                <a:spcPts val="1500"/>
-              </a:lnSpc>
-              <a:spcAft>
-                <a:spcPts val="1000"/>
-              </a:spcAft>
-              <a:buSzPct val="100000"/>
-              <a:buChar char="•"/>
-            </a:pPr>
-            <a:r>
-              <a:rPr lang="en-US" sz="1150" dirty="0">
-                <a:solidFill>
-                  <a:srgbClr val="1F2937"/>
-                </a:solidFill>
-                <a:latin typeface="Arial" pitchFamily="34" charset="0"/>
-                <a:ea typeface="Arial" pitchFamily="34" charset="-122"/>
-                <a:cs typeface="Arial" pitchFamily="34" charset="-120"/>
-              </a:rPr>
-              <a:t>If the agent does something wrong, the fix usually belongs in AGENTS.md, not the prompt</a:t>
-            </a:r>
-            <a:endParaRPr lang="en-US" sz="1150" dirty="0"/>
-          </a:p>
-          <a:p>
-            <a:pPr marL="203200" indent="-203200">
-              <a:lnSpc>
-                <a:spcPts val="1500"/>
-              </a:lnSpc>
-              <a:spcAft>
-                <a:spcPts val="1000"/>
-              </a:spcAft>
-              <a:buSzPct val="100000"/>
-              <a:buChar char="•"/>
-            </a:pPr>
-            <a:r>
-              <a:rPr lang="en-US" sz="1150" dirty="0">
-                <a:solidFill>
-                  <a:srgbClr val="1F2937"/>
-                </a:solidFill>
-                <a:latin typeface="Arial" pitchFamily="34" charset="0"/>
-                <a:ea typeface="Arial" pitchFamily="34" charset="-122"/>
-                <a:cs typeface="Arial" pitchFamily="34" charset="-120"/>
-              </a:rPr>
-              <a:t>Add a project-specific Do/Don't the moment you hit a sharp edge</a:t>
-            </a:r>
-            <a:endParaRPr lang="en-US" sz="1150" dirty="0"/>
-          </a:p>
-          <a:p>
-            <a:pPr marL="203200" indent="-203200">
-              <a:lnSpc>
-                <a:spcPts val="1500"/>
-              </a:lnSpc>
-              <a:spcAft>
-                <a:spcPts val="1000"/>
-              </a:spcAft>
-              <a:buSzPct val="100000"/>
-              <a:buChar char="•"/>
-            </a:pPr>
-            <a:r>
-              <a:rPr lang="en-US" sz="1150" dirty="0">
-                <a:solidFill>
-                  <a:srgbClr val="1F2937"/>
-                </a:solidFill>
-                <a:latin typeface="Arial" pitchFamily="34" charset="0"/>
-                <a:ea typeface="Arial" pitchFamily="34" charset="-122"/>
-                <a:cs typeface="Arial" pitchFamily="34" charset="-120"/>
-              </a:rPr>
-              <a:t>A short, accurate AGENTS.md beats a long, stale one</a:t>
-            </a:r>
-            <a:endParaRPr lang="en-US" sz="1150" dirty="0"/>
+            <a:pPr algn="ctr" indent="0" marL="0">
+              <a:lnSpc>
+                <a:spcPts val="1600"/>
+              </a:lnSpc>
+              <a:buNone/>
+            </a:pPr>
+            <a:r>
+              <a:rPr lang="en-US" sz="1200" i="1" dirty="0">
+                <a:solidFill>
+                  <a:srgbClr val="0E7C7B"/>
+                </a:solidFill>
+                <a:latin typeface="Arial" pitchFamily="34" charset="0"/>
+                <a:ea typeface="Arial" pitchFamily="34" charset="-122"/>
+                <a:cs typeface="Arial" pitchFamily="34" charset="-120"/>
+              </a:rPr>
+              <a:t>Each is a complete, filled AGENTS.md — the agents, tools, domain guardrails and the 🔒 red-team check are already written. You fill the &lt;gateway&gt;, &lt;model&gt; and &lt;name&gt; placeholders and start building.</a:t>
+            </a:r>
+            <a:endParaRPr lang="en-US" sz="1200" dirty="0"/>
           </a:p>
         </p:txBody>
       </p:sp>
@@ -6879,7 +7178,7 @@
                 <a:ea typeface="Arial" pitchFamily="34" charset="-122"/>
                 <a:cs typeface="Arial" pitchFamily="34" charset="-120"/>
               </a:rPr>
-              <a:t>TIPS</a:t>
+              <a:t>WORKFLOW</a:t>
             </a:r>
             <a:endParaRPr lang="en-US" sz="1100" dirty="0"/>
           </a:p>
@@ -6918,7 +7217,7 @@
                 <a:ea typeface="Arial" pitchFamily="34" charset="-122"/>
                 <a:cs typeface="Arial" pitchFamily="34" charset="-120"/>
               </a:rPr>
-              <a:t>A Good AGENTS.md vs a Weak One</a:t>
+              <a:t>The Build Loop With OpenCode</a:t>
             </a:r>
             <a:endParaRPr lang="en-US" sz="2500" dirty="0"/>
           </a:p>
@@ -7066,7 +7365,7 @@
         <p:spPr>
           <a:xfrm>
             <a:off x="548640" y="1554480"/>
-            <a:ext cx="5440680" cy="4480560"/>
+            <a:ext cx="6675120" cy="4480560"/>
           </a:xfrm>
           <a:prstGeom prst="roundRect">
             <a:avLst>
@@ -7093,7 +7392,7 @@
         <p:spPr>
           <a:xfrm>
             <a:off x="777240" y="1737360"/>
-            <a:ext cx="4937760" cy="365760"/>
+            <a:ext cx="6217920" cy="365760"/>
           </a:xfrm>
           <a:prstGeom prst="rect">
             <a:avLst/>
@@ -7111,13 +7410,13 @@
             <a:r>
               <a:rPr lang="en-US" sz="1500" b="1" dirty="0">
                 <a:solidFill>
-                  <a:srgbClr val="1E7F4F"/>
-                </a:solidFill>
-                <a:latin typeface="Arial" pitchFamily="34" charset="0"/>
-                <a:ea typeface="Arial" pitchFamily="34" charset="-122"/>
-                <a:cs typeface="Arial" pitchFamily="34" charset="-120"/>
-              </a:rPr>
-              <a:t>✓ A good one</a:t>
+                  <a:srgbClr val="E8460E"/>
+                </a:solidFill>
+                <a:latin typeface="Arial" pitchFamily="34" charset="0"/>
+                <a:ea typeface="Arial" pitchFamily="34" charset="-122"/>
+                <a:cs typeface="Arial" pitchFamily="34" charset="-120"/>
+              </a:rPr>
+              <a:t>Step by step</a:t>
             </a:r>
             <a:endParaRPr lang="en-US" sz="1500" dirty="0"/>
           </a:p>
@@ -7131,8 +7430,8 @@
         </p:nvSpPr>
         <p:spPr>
           <a:xfrm>
-            <a:off x="777240" y="2212848"/>
-            <a:ext cx="4983480" cy="3657600"/>
+            <a:off x="777240" y="2194560"/>
+            <a:ext cx="6309360" cy="3749040"/>
           </a:xfrm>
           <a:prstGeom prst="rect">
             <a:avLst/>
@@ -7146,7 +7445,335 @@
           <a:p>
             <a:pPr marL="203200" indent="-203200">
               <a:lnSpc>
-                <a:spcPts val="1700"/>
+                <a:spcPts val="1500"/>
+              </a:lnSpc>
+              <a:spcAft>
+                <a:spcPts val="600"/>
+              </a:spcAft>
+              <a:buSzPct val="100000"/>
+              <a:buChar char="•"/>
+            </a:pPr>
+            <a:r>
+              <a:rPr lang="en-US" sz="1200" b="1" dirty="0">
+                <a:solidFill>
+                  <a:srgbClr val="3A4556"/>
+                </a:solidFill>
+                <a:latin typeface="Arial" pitchFamily="34" charset="0"/>
+                <a:ea typeface="Arial" pitchFamily="34" charset="-122"/>
+                <a:cs typeface="Arial" pitchFamily="34" charset="-120"/>
+              </a:rPr>
+              <a:t>1 · Put AGENTS.md at your project root</a:t>
+            </a:r>
+            <a:endParaRPr lang="en-US" sz="1200" dirty="0"/>
+          </a:p>
+          <a:p>
+            <a:pPr marL="203200" indent="-203200">
+              <a:lnSpc>
+                <a:spcPts val="1500"/>
+              </a:lnSpc>
+              <a:spcAft>
+                <a:spcPts val="600"/>
+              </a:spcAft>
+              <a:buSzPct val="100000"/>
+              <a:buChar char="•"/>
+            </a:pPr>
+            <a:r>
+              <a:rPr lang="en-US" sz="1200" dirty="0">
+                <a:solidFill>
+                  <a:srgbClr val="3A4556"/>
+                </a:solidFill>
+                <a:latin typeface="Arial" pitchFamily="34" charset="0"/>
+                <a:ea typeface="Arial" pitchFamily="34" charset="-122"/>
+                <a:cs typeface="Arial" pitchFamily="34" charset="-120"/>
+              </a:rPr>
+              <a:t>   OpenCode reads it automatically — no flag needed</a:t>
+            </a:r>
+            <a:endParaRPr lang="en-US" sz="1200" dirty="0"/>
+          </a:p>
+          <a:p>
+            <a:pPr marL="203200" indent="-203200">
+              <a:lnSpc>
+                <a:spcPts val="1500"/>
+              </a:lnSpc>
+              <a:spcAft>
+                <a:spcPts val="600"/>
+              </a:spcAft>
+              <a:buSzPct val="100000"/>
+              <a:buChar char="•"/>
+            </a:pPr>
+            <a:r>
+              <a:rPr lang="en-US" sz="1200" b="1" dirty="0">
+                <a:solidFill>
+                  <a:srgbClr val="3A4556"/>
+                </a:solidFill>
+                <a:latin typeface="Arial" pitchFamily="34" charset="0"/>
+                <a:ea typeface="Arial" pitchFamily="34" charset="-122"/>
+                <a:cs typeface="Arial" pitchFamily="34" charset="-120"/>
+              </a:rPr>
+              <a:t>2 · Fill the placeholders</a:t>
+            </a:r>
+            <a:endParaRPr lang="en-US" sz="1200" dirty="0"/>
+          </a:p>
+          <a:p>
+            <a:pPr marL="203200" indent="-203200">
+              <a:lnSpc>
+                <a:spcPts val="1500"/>
+              </a:lnSpc>
+              <a:spcAft>
+                <a:spcPts val="600"/>
+              </a:spcAft>
+              <a:buSzPct val="100000"/>
+              <a:buChar char="•"/>
+            </a:pPr>
+            <a:r>
+              <a:rPr lang="en-US" sz="1200" dirty="0">
+                <a:solidFill>
+                  <a:srgbClr val="3A4556"/>
+                </a:solidFill>
+                <a:latin typeface="Arial" pitchFamily="34" charset="0"/>
+                <a:ea typeface="Arial" pitchFamily="34" charset="-122"/>
+                <a:cs typeface="Arial" pitchFamily="34" charset="-120"/>
+              </a:rPr>
+              <a:t>   &lt;gateway&gt; IP, &lt;model&gt;, your name, framework choice</a:t>
+            </a:r>
+            <a:endParaRPr lang="en-US" sz="1200" dirty="0"/>
+          </a:p>
+          <a:p>
+            <a:pPr marL="203200" indent="-203200">
+              <a:lnSpc>
+                <a:spcPts val="1500"/>
+              </a:lnSpc>
+              <a:spcAft>
+                <a:spcPts val="600"/>
+              </a:spcAft>
+              <a:buSzPct val="100000"/>
+              <a:buChar char="•"/>
+            </a:pPr>
+            <a:r>
+              <a:rPr lang="en-US" sz="1200" b="1" dirty="0">
+                <a:solidFill>
+                  <a:srgbClr val="3A4556"/>
+                </a:solidFill>
+                <a:latin typeface="Arial" pitchFamily="34" charset="0"/>
+                <a:ea typeface="Arial" pitchFamily="34" charset="-122"/>
+                <a:cs typeface="Arial" pitchFamily="34" charset="-120"/>
+              </a:rPr>
+              <a:t>3 · Prompt in plain English, one agent at a time</a:t>
+            </a:r>
+            <a:endParaRPr lang="en-US" sz="1200" dirty="0"/>
+          </a:p>
+          <a:p>
+            <a:pPr marL="203200" indent="-203200">
+              <a:lnSpc>
+                <a:spcPts val="1500"/>
+              </a:lnSpc>
+              <a:spcAft>
+                <a:spcPts val="600"/>
+              </a:spcAft>
+              <a:buSzPct val="100000"/>
+              <a:buChar char="•"/>
+            </a:pPr>
+            <a:r>
+              <a:rPr lang="en-US" sz="1200" dirty="0">
+                <a:solidFill>
+                  <a:srgbClr val="3A4556"/>
+                </a:solidFill>
+                <a:latin typeface="Arial" pitchFamily="34" charset="0"/>
+                <a:ea typeface="Arial" pitchFamily="34" charset="-122"/>
+                <a:cs typeface="Arial" pitchFamily="34" charset="-120"/>
+              </a:rPr>
+              <a:t>   "Build the Ingest agent and its pre-hook"</a:t>
+            </a:r>
+            <a:endParaRPr lang="en-US" sz="1200" dirty="0"/>
+          </a:p>
+          <a:p>
+            <a:pPr marL="203200" indent="-203200">
+              <a:lnSpc>
+                <a:spcPts val="1500"/>
+              </a:lnSpc>
+              <a:spcAft>
+                <a:spcPts val="600"/>
+              </a:spcAft>
+              <a:buSzPct val="100000"/>
+              <a:buChar char="•"/>
+            </a:pPr>
+            <a:r>
+              <a:rPr lang="en-US" sz="1200" b="1" dirty="0">
+                <a:solidFill>
+                  <a:srgbClr val="3A4556"/>
+                </a:solidFill>
+                <a:latin typeface="Arial" pitchFamily="34" charset="0"/>
+                <a:ea typeface="Arial" pitchFamily="34" charset="-122"/>
+                <a:cs typeface="Arial" pitchFamily="34" charset="-120"/>
+              </a:rPr>
+              <a:t>4 · Review every change before you accept it</a:t>
+            </a:r>
+            <a:endParaRPr lang="en-US" sz="1200" dirty="0"/>
+          </a:p>
+          <a:p>
+            <a:pPr marL="203200" indent="-203200">
+              <a:lnSpc>
+                <a:spcPts val="1500"/>
+              </a:lnSpc>
+              <a:spcAft>
+                <a:spcPts val="600"/>
+              </a:spcAft>
+              <a:buSzPct val="100000"/>
+              <a:buChar char="•"/>
+            </a:pPr>
+            <a:r>
+              <a:rPr lang="en-US" sz="1200" dirty="0">
+                <a:solidFill>
+                  <a:srgbClr val="3A4556"/>
+                </a:solidFill>
+                <a:latin typeface="Arial" pitchFamily="34" charset="0"/>
+                <a:ea typeface="Arial" pitchFamily="34" charset="-122"/>
+                <a:cs typeface="Arial" pitchFamily="34" charset="-120"/>
+              </a:rPr>
+              <a:t>   the scaffold rules make the diff easy to trust</a:t>
+            </a:r>
+            <a:endParaRPr lang="en-US" sz="1200" dirty="0"/>
+          </a:p>
+          <a:p>
+            <a:pPr marL="203200" indent="-203200">
+              <a:lnSpc>
+                <a:spcPts val="1500"/>
+              </a:lnSpc>
+              <a:spcAft>
+                <a:spcPts val="600"/>
+              </a:spcAft>
+              <a:buSzPct val="100000"/>
+              <a:buChar char="•"/>
+            </a:pPr>
+            <a:r>
+              <a:rPr lang="en-US" sz="1200" b="1" dirty="0">
+                <a:solidFill>
+                  <a:srgbClr val="3A4556"/>
+                </a:solidFill>
+                <a:latin typeface="Arial" pitchFamily="34" charset="0"/>
+                <a:ea typeface="Arial" pitchFamily="34" charset="-122"/>
+                <a:cs typeface="Arial" pitchFamily="34" charset="-120"/>
+              </a:rPr>
+              <a:t>5 · Run the loop: Define → … → Attack → Commit</a:t>
+            </a:r>
+            <a:endParaRPr lang="en-US" sz="1200" dirty="0"/>
+          </a:p>
+          <a:p>
+            <a:pPr marL="203200" indent="-203200">
+              <a:lnSpc>
+                <a:spcPts val="1500"/>
+              </a:lnSpc>
+              <a:spcAft>
+                <a:spcPts val="600"/>
+              </a:spcAft>
+              <a:buSzPct val="100000"/>
+              <a:buChar char="•"/>
+            </a:pPr>
+            <a:r>
+              <a:rPr lang="en-US" sz="1200" dirty="0">
+                <a:solidFill>
+                  <a:srgbClr val="3A4556"/>
+                </a:solidFill>
+                <a:latin typeface="Arial" pitchFamily="34" charset="0"/>
+                <a:ea typeface="Arial" pitchFamily="34" charset="-122"/>
+                <a:cs typeface="Arial" pitchFamily="34" charset="-120"/>
+              </a:rPr>
+              <a:t>   re-run the red-team checks; commit when green</a:t>
+            </a:r>
+            <a:endParaRPr lang="en-US" sz="1200" dirty="0"/>
+          </a:p>
+        </p:txBody>
+      </p:sp>
+      <p:sp>
+        <p:nvSpPr>
+          <p:cNvPr id="12" name="Shape 8"/>
+          <p:cNvSpPr/>
+          <p:nvPr/>
+        </p:nvSpPr>
+        <p:spPr>
+          <a:xfrm>
+            <a:off x="7406640" y="1554480"/>
+            <a:ext cx="4206240" cy="4480560"/>
+          </a:xfrm>
+          <a:prstGeom prst="roundRect">
+            <a:avLst>
+              <a:gd name="adj" fmla="val 1522"/>
+            </a:avLst>
+          </a:prstGeom>
+          <a:solidFill>
+            <a:srgbClr val="FDF1E7"/>
+          </a:solidFill>
+          <a:ln w="9525">
+            <a:solidFill>
+              <a:srgbClr val="F0DCB8"/>
+            </a:solidFill>
+            <a:prstDash val="solid"/>
+          </a:ln>
+        </p:spPr>
+      </p:sp>
+      <p:sp>
+        <p:nvSpPr>
+          <p:cNvPr id="13" name="Text 9"/>
+          <p:cNvSpPr/>
+          <p:nvPr/>
+        </p:nvSpPr>
+        <p:spPr>
+          <a:xfrm>
+            <a:off x="7635240" y="1737360"/>
+            <a:ext cx="3749040" cy="365760"/>
+          </a:xfrm>
+          <a:prstGeom prst="rect">
+            <a:avLst/>
+          </a:prstGeom>
+          <a:noFill/>
+          <a:ln/>
+        </p:spPr>
+        <p:txBody>
+          <a:bodyPr wrap="square" rtlCol="0" anchor="ctr"/>
+          <a:lstStyle/>
+          <a:p>
+            <a:pPr indent="0" marL="0">
+              <a:buNone/>
+            </a:pPr>
+            <a:r>
+              <a:rPr lang="en-US" sz="1400" b="1" dirty="0">
+                <a:solidFill>
+                  <a:srgbClr val="2E4552"/>
+                </a:solidFill>
+                <a:latin typeface="Arial" pitchFamily="34" charset="0"/>
+                <a:ea typeface="Arial" pitchFamily="34" charset="-122"/>
+                <a:cs typeface="Arial" pitchFamily="34" charset="-120"/>
+              </a:rPr>
+              <a:t>Keep AGENTS.md alive</a:t>
+            </a:r>
+            <a:endParaRPr lang="en-US" sz="1400" dirty="0"/>
+          </a:p>
+        </p:txBody>
+      </p:sp>
+      <p:sp>
+        <p:nvSpPr>
+          <p:cNvPr id="14" name="Text 10"/>
+          <p:cNvSpPr/>
+          <p:nvPr/>
+        </p:nvSpPr>
+        <p:spPr>
+          <a:xfrm>
+            <a:off x="7635240" y="2194560"/>
+            <a:ext cx="3749040" cy="3749040"/>
+          </a:xfrm>
+          <a:prstGeom prst="rect">
+            <a:avLst/>
+          </a:prstGeom>
+          <a:noFill/>
+          <a:ln/>
+        </p:spPr>
+        <p:txBody>
+          <a:bodyPr wrap="square" rtlCol="0" anchor="t"/>
+          <a:lstStyle/>
+          <a:p>
+            <a:pPr marL="203200" indent="-203200">
+              <a:lnSpc>
+                <a:spcPts val="1500"/>
               </a:lnSpc>
               <a:spcAft>
                 <a:spcPts val="1000"/>
@@ -7155,22 +7782,22 @@
               <a:buChar char="•"/>
             </a:pPr>
             <a:r>
-              <a:rPr lang="en-US" sz="1250" b="1" dirty="0">
-                <a:solidFill>
-                  <a:srgbClr val="3A4556"/>
-                </a:solidFill>
-                <a:latin typeface="Arial" pitchFamily="34" charset="0"/>
-                <a:ea typeface="Arial" pitchFamily="34" charset="-122"/>
-                <a:cs typeface="Arial" pitchFamily="34" charset="-120"/>
-              </a:rPr>
-              <a:t>Specific: names the agents, tools, and what each guardrail checks</a:t>
-            </a:r>
-            <a:endParaRPr lang="en-US" sz="1250" dirty="0"/>
+              <a:rPr lang="en-US" sz="1150" b="1" dirty="0">
+                <a:solidFill>
+                  <a:srgbClr val="1F2937"/>
+                </a:solidFill>
+                <a:latin typeface="Arial" pitchFamily="34" charset="0"/>
+                <a:ea typeface="Arial" pitchFamily="34" charset="-122"/>
+                <a:cs typeface="Arial" pitchFamily="34" charset="-120"/>
+              </a:rPr>
+              <a:t>Edit it as the design changes — it's the source of truth</a:t>
+            </a:r>
+            <a:endParaRPr lang="en-US" sz="1150" dirty="0"/>
           </a:p>
           <a:p>
             <a:pPr marL="203200" indent="-203200">
               <a:lnSpc>
-                <a:spcPts val="1700"/>
+                <a:spcPts val="1500"/>
               </a:lnSpc>
               <a:spcAft>
                 <a:spcPts val="1000"/>
@@ -7179,22 +7806,22 @@
               <a:buChar char="•"/>
             </a:pPr>
             <a:r>
-              <a:rPr lang="en-US" sz="1250" dirty="0">
-                <a:solidFill>
-                  <a:srgbClr val="3A4556"/>
-                </a:solidFill>
-                <a:latin typeface="Arial" pitchFamily="34" charset="0"/>
-                <a:ea typeface="Arial" pitchFamily="34" charset="-122"/>
-                <a:cs typeface="Arial" pitchFamily="34" charset="-120"/>
-              </a:rPr>
-              <a:t>Lists the 10 scaffold points explicitly</a:t>
-            </a:r>
-            <a:endParaRPr lang="en-US" sz="1250" dirty="0"/>
+              <a:rPr lang="en-US" sz="1150" dirty="0">
+                <a:solidFill>
+                  <a:srgbClr val="1F2937"/>
+                </a:solidFill>
+                <a:latin typeface="Arial" pitchFamily="34" charset="0"/>
+                <a:ea typeface="Arial" pitchFamily="34" charset="-122"/>
+                <a:cs typeface="Arial" pitchFamily="34" charset="-120"/>
+              </a:rPr>
+              <a:t>If the agent does something wrong, the fix usually belongs in AGENTS.md, not the prompt</a:t>
+            </a:r>
+            <a:endParaRPr lang="en-US" sz="1150" dirty="0"/>
           </a:p>
           <a:p>
             <a:pPr marL="203200" indent="-203200">
               <a:lnSpc>
-                <a:spcPts val="1700"/>
+                <a:spcPts val="1500"/>
               </a:lnSpc>
               <a:spcAft>
                 <a:spcPts val="1000"/>
@@ -7203,22 +7830,22 @@
               <a:buChar char="•"/>
             </a:pPr>
             <a:r>
-              <a:rPr lang="en-US" sz="1250" dirty="0">
-                <a:solidFill>
-                  <a:srgbClr val="3A4556"/>
-                </a:solidFill>
-                <a:latin typeface="Arial" pitchFamily="34" charset="0"/>
-                <a:ea typeface="Arial" pitchFamily="34" charset="-122"/>
-                <a:cs typeface="Arial" pitchFamily="34" charset="-120"/>
-              </a:rPr>
-              <a:t>Marks which tools are destructive</a:t>
-            </a:r>
-            <a:endParaRPr lang="en-US" sz="1250" dirty="0"/>
+              <a:rPr lang="en-US" sz="1150" dirty="0">
+                <a:solidFill>
+                  <a:srgbClr val="1F2937"/>
+                </a:solidFill>
+                <a:latin typeface="Arial" pitchFamily="34" charset="0"/>
+                <a:ea typeface="Arial" pitchFamily="34" charset="-122"/>
+                <a:cs typeface="Arial" pitchFamily="34" charset="-120"/>
+              </a:rPr>
+              <a:t>Add a project-specific Do/Don't the moment you hit a sharp edge</a:t>
+            </a:r>
+            <a:endParaRPr lang="en-US" sz="1150" dirty="0"/>
           </a:p>
           <a:p>
             <a:pPr marL="203200" indent="-203200">
               <a:lnSpc>
-                <a:spcPts val="1700"/>
+                <a:spcPts val="1500"/>
               </a:lnSpc>
               <a:spcAft>
                 <a:spcPts val="1000"/>
@@ -7227,297 +7854,17 @@
               <a:buChar char="•"/>
             </a:pPr>
             <a:r>
-              <a:rPr lang="en-US" sz="1250" dirty="0">
-                <a:solidFill>
-                  <a:srgbClr val="3A4556"/>
-                </a:solidFill>
-                <a:latin typeface="Arial" pitchFamily="34" charset="0"/>
-                <a:ea typeface="Arial" pitchFamily="34" charset="-122"/>
-                <a:cs typeface="Arial" pitchFamily="34" charset="-120"/>
-              </a:rPr>
-              <a:t>Has a concrete Definition of Done + 🔒 attack</a:t>
-            </a:r>
-            <a:endParaRPr lang="en-US" sz="1250" dirty="0"/>
-          </a:p>
-          <a:p>
-            <a:pPr marL="203200" indent="-203200">
-              <a:lnSpc>
-                <a:spcPts val="1700"/>
-              </a:lnSpc>
-              <a:spcAft>
-                <a:spcPts val="1000"/>
-              </a:spcAft>
-              <a:buSzPct val="100000"/>
-              <a:buChar char="•"/>
-            </a:pPr>
-            <a:r>
-              <a:rPr lang="en-US" sz="1250" dirty="0">
-                <a:solidFill>
-                  <a:srgbClr val="3A4556"/>
-                </a:solidFill>
-                <a:latin typeface="Arial" pitchFamily="34" charset="0"/>
-                <a:ea typeface="Arial" pitchFamily="34" charset="-122"/>
-                <a:cs typeface="Arial" pitchFamily="34" charset="-120"/>
-              </a:rPr>
-              <a:t>Short, accurate, and kept up to date</a:t>
-            </a:r>
-            <a:endParaRPr lang="en-US" sz="1250" dirty="0"/>
-          </a:p>
-          <a:p>
-            <a:pPr marL="203200" indent="-203200">
-              <a:lnSpc>
-                <a:spcPts val="1700"/>
-              </a:lnSpc>
-              <a:spcAft>
-                <a:spcPts val="1000"/>
-              </a:spcAft>
-              <a:buSzPct val="100000"/>
-              <a:buChar char="•"/>
-            </a:pPr>
-            <a:r>
-              <a:rPr lang="en-US" sz="1250" dirty="0">
-                <a:solidFill>
-                  <a:srgbClr val="3A4556"/>
-                </a:solidFill>
-                <a:latin typeface="Arial" pitchFamily="34" charset="0"/>
-                <a:ea typeface="Arial" pitchFamily="34" charset="-122"/>
-                <a:cs typeface="Arial" pitchFamily="34" charset="-120"/>
-              </a:rPr>
-              <a:t>Tells the agent what NOT to do</a:t>
-            </a:r>
-            <a:endParaRPr lang="en-US" sz="1250" dirty="0"/>
-          </a:p>
-        </p:txBody>
-      </p:sp>
-      <p:sp>
-        <p:nvSpPr>
-          <p:cNvPr id="12" name="Shape 8"/>
-          <p:cNvSpPr/>
-          <p:nvPr/>
-        </p:nvSpPr>
-        <p:spPr>
-          <a:xfrm>
-            <a:off x="6172200" y="1554480"/>
-            <a:ext cx="5440680" cy="4480560"/>
-          </a:xfrm>
-          <a:prstGeom prst="roundRect">
-            <a:avLst>
-              <a:gd name="adj" fmla="val 1429"/>
-            </a:avLst>
-          </a:prstGeom>
-          <a:solidFill>
-            <a:srgbClr val="F5F7FA"/>
-          </a:solidFill>
-          <a:ln w="9525">
-            <a:solidFill>
-              <a:srgbClr val="D7DEE8"/>
-            </a:solidFill>
-            <a:prstDash val="solid"/>
-          </a:ln>
-        </p:spPr>
-      </p:sp>
-      <p:sp>
-        <p:nvSpPr>
-          <p:cNvPr id="13" name="Text 9"/>
-          <p:cNvSpPr/>
-          <p:nvPr/>
-        </p:nvSpPr>
-        <p:spPr>
-          <a:xfrm>
-            <a:off x="6400800" y="1737360"/>
-            <a:ext cx="4937760" cy="365760"/>
-          </a:xfrm>
-          <a:prstGeom prst="rect">
-            <a:avLst/>
-          </a:prstGeom>
-          <a:noFill/>
-          <a:ln/>
-        </p:spPr>
-        <p:txBody>
-          <a:bodyPr wrap="square" rtlCol="0" anchor="ctr"/>
-          <a:lstStyle/>
-          <a:p>
-            <a:pPr indent="0" marL="0">
-              <a:buNone/>
-            </a:pPr>
-            <a:r>
-              <a:rPr lang="en-US" sz="1500" b="1" dirty="0">
-                <a:solidFill>
-                  <a:srgbClr val="E8460E"/>
-                </a:solidFill>
-                <a:latin typeface="Arial" pitchFamily="34" charset="0"/>
-                <a:ea typeface="Arial" pitchFamily="34" charset="-122"/>
-                <a:cs typeface="Arial" pitchFamily="34" charset="-120"/>
-              </a:rPr>
-              <a:t>✗ A weak one</a:t>
-            </a:r>
-            <a:endParaRPr lang="en-US" sz="1500" dirty="0"/>
-          </a:p>
-        </p:txBody>
-      </p:sp>
-      <p:sp>
-        <p:nvSpPr>
-          <p:cNvPr id="14" name="Text 10"/>
-          <p:cNvSpPr/>
-          <p:nvPr/>
-        </p:nvSpPr>
-        <p:spPr>
-          <a:xfrm>
-            <a:off x="6400800" y="2212848"/>
-            <a:ext cx="4983480" cy="3657600"/>
-          </a:xfrm>
-          <a:prstGeom prst="rect">
-            <a:avLst/>
-          </a:prstGeom>
-          <a:noFill/>
-          <a:ln/>
-        </p:spPr>
-        <p:txBody>
-          <a:bodyPr wrap="square" rtlCol="0" anchor="t"/>
-          <a:lstStyle/>
-          <a:p>
-            <a:pPr marL="203200" indent="-203200">
-              <a:lnSpc>
-                <a:spcPts val="1700"/>
-              </a:lnSpc>
-              <a:spcAft>
-                <a:spcPts val="1000"/>
-              </a:spcAft>
-              <a:buSzPct val="100000"/>
-              <a:buChar char="•"/>
-            </a:pPr>
-            <a:r>
-              <a:rPr lang="en-US" sz="1250" b="1" dirty="0">
-                <a:solidFill>
-                  <a:srgbClr val="3A4556"/>
-                </a:solidFill>
-                <a:latin typeface="Arial" pitchFamily="34" charset="0"/>
-                <a:ea typeface="Arial" pitchFamily="34" charset="-122"/>
-                <a:cs typeface="Arial" pitchFamily="34" charset="-120"/>
-              </a:rPr>
-              <a:t>Vague: "build a documentation system with guardrails"</a:t>
-            </a:r>
-            <a:endParaRPr lang="en-US" sz="1250" dirty="0"/>
-          </a:p>
-          <a:p>
-            <a:pPr marL="203200" indent="-203200">
-              <a:lnSpc>
-                <a:spcPts val="1700"/>
-              </a:lnSpc>
-              <a:spcAft>
-                <a:spcPts val="1000"/>
-              </a:spcAft>
-              <a:buSzPct val="100000"/>
-              <a:buChar char="•"/>
-            </a:pPr>
-            <a:r>
-              <a:rPr lang="en-US" sz="1250" dirty="0">
-                <a:solidFill>
-                  <a:srgbClr val="3A4556"/>
-                </a:solidFill>
-                <a:latin typeface="Arial" pitchFamily="34" charset="0"/>
-                <a:ea typeface="Arial" pitchFamily="34" charset="-122"/>
-                <a:cs typeface="Arial" pitchFamily="34" charset="-120"/>
-              </a:rPr>
-              <a:t>No scaffold rules → unsafe code by default</a:t>
-            </a:r>
-            <a:endParaRPr lang="en-US" sz="1250" dirty="0"/>
-          </a:p>
-          <a:p>
-            <a:pPr marL="203200" indent="-203200">
-              <a:lnSpc>
-                <a:spcPts val="1700"/>
-              </a:lnSpc>
-              <a:spcAft>
-                <a:spcPts val="1000"/>
-              </a:spcAft>
-              <a:buSzPct val="100000"/>
-              <a:buChar char="•"/>
-            </a:pPr>
-            <a:r>
-              <a:rPr lang="en-US" sz="1250" dirty="0">
-                <a:solidFill>
-                  <a:srgbClr val="3A4556"/>
-                </a:solidFill>
-                <a:latin typeface="Arial" pitchFamily="34" charset="0"/>
-                <a:ea typeface="Arial" pitchFamily="34" charset="-122"/>
-                <a:cs typeface="Arial" pitchFamily="34" charset="-120"/>
-              </a:rPr>
-              <a:t>No tool list → the agent invents tools</a:t>
-            </a:r>
-            <a:endParaRPr lang="en-US" sz="1250" dirty="0"/>
-          </a:p>
-          <a:p>
-            <a:pPr marL="203200" indent="-203200">
-              <a:lnSpc>
-                <a:spcPts val="1700"/>
-              </a:lnSpc>
-              <a:spcAft>
-                <a:spcPts val="1000"/>
-              </a:spcAft>
-              <a:buSzPct val="100000"/>
-              <a:buChar char="•"/>
-            </a:pPr>
-            <a:r>
-              <a:rPr lang="en-US" sz="1250" dirty="0">
-                <a:solidFill>
-                  <a:srgbClr val="3A4556"/>
-                </a:solidFill>
-                <a:latin typeface="Arial" pitchFamily="34" charset="0"/>
-                <a:ea typeface="Arial" pitchFamily="34" charset="-122"/>
-                <a:cs typeface="Arial" pitchFamily="34" charset="-120"/>
-              </a:rPr>
-              <a:t>No destructive-tool marking → unguarded actions</a:t>
-            </a:r>
-            <a:endParaRPr lang="en-US" sz="1250" dirty="0"/>
-          </a:p>
-          <a:p>
-            <a:pPr marL="203200" indent="-203200">
-              <a:lnSpc>
-                <a:spcPts val="1700"/>
-              </a:lnSpc>
-              <a:spcAft>
-                <a:spcPts val="1000"/>
-              </a:spcAft>
-              <a:buSzPct val="100000"/>
-              <a:buChar char="•"/>
-            </a:pPr>
-            <a:r>
-              <a:rPr lang="en-US" sz="1250" dirty="0">
-                <a:solidFill>
-                  <a:srgbClr val="3A4556"/>
-                </a:solidFill>
-                <a:latin typeface="Arial" pitchFamily="34" charset="0"/>
-                <a:ea typeface="Arial" pitchFamily="34" charset="-122"/>
-                <a:cs typeface="Arial" pitchFamily="34" charset="-120"/>
-              </a:rPr>
-              <a:t>No DoD → you never know when it's done</a:t>
-            </a:r>
-            <a:endParaRPr lang="en-US" sz="1250" dirty="0"/>
-          </a:p>
-          <a:p>
-            <a:pPr marL="203200" indent="-203200">
-              <a:lnSpc>
-                <a:spcPts val="1700"/>
-              </a:lnSpc>
-              <a:spcAft>
-                <a:spcPts val="1000"/>
-              </a:spcAft>
-              <a:buSzPct val="100000"/>
-              <a:buChar char="•"/>
-            </a:pPr>
-            <a:r>
-              <a:rPr lang="en-US" sz="1250" dirty="0">
-                <a:solidFill>
-                  <a:srgbClr val="3A4556"/>
-                </a:solidFill>
-                <a:latin typeface="Arial" pitchFamily="34" charset="0"/>
-                <a:ea typeface="Arial" pitchFamily="34" charset="-122"/>
-                <a:cs typeface="Arial" pitchFamily="34" charset="-120"/>
-              </a:rPr>
-              <a:t>Stale → the agent follows the wrong contract</a:t>
-            </a:r>
-            <a:endParaRPr lang="en-US" sz="1250" dirty="0"/>
+              <a:rPr lang="en-US" sz="1150" dirty="0">
+                <a:solidFill>
+                  <a:srgbClr val="1F2937"/>
+                </a:solidFill>
+                <a:latin typeface="Arial" pitchFamily="34" charset="0"/>
+                <a:ea typeface="Arial" pitchFamily="34" charset="-122"/>
+                <a:cs typeface="Arial" pitchFamily="34" charset="-120"/>
+              </a:rPr>
+              <a:t>A short, accurate AGENTS.md beats a long, stale one</a:t>
+            </a:r>
+            <a:endParaRPr lang="en-US" sz="1150" dirty="0"/>
           </a:p>
         </p:txBody>
       </p:sp>
@@ -7532,6 +7879,713 @@
 <file path=ppt/slides/slide18.xml><?xml version="1.0" encoding="utf-8"?>
 <p:sld xmlns:a="http://schemas.openxmlformats.org/drawingml/2006/main" xmlns:r="http://schemas.openxmlformats.org/officeDocument/2006/relationships" xmlns:p="http://schemas.openxmlformats.org/presentationml/2006/main">
   <p:cSld name="Slide 18">
+    <p:bg>
+      <p:bgPr>
+        <a:solidFill>
+          <a:srgbClr val="FFFFFF"/>
+        </a:solidFill>
+      </p:bgPr>
+    </p:bg>
+    <p:spTree>
+      <p:nvGrpSpPr>
+        <p:cNvPr id="1" name=""/>
+        <p:cNvGrpSpPr/>
+        <p:nvPr/>
+      </p:nvGrpSpPr>
+      <p:grpSpPr>
+        <a:xfrm>
+          <a:off x="0" y="0"/>
+          <a:ext cx="0" cy="0"/>
+          <a:chOff x="0" y="0"/>
+          <a:chExt cx="0" cy="0"/>
+        </a:xfrm>
+      </p:grpSpPr>
+      <p:sp>
+        <p:nvSpPr>
+          <p:cNvPr id="2" name="Text 0"/>
+          <p:cNvSpPr/>
+          <p:nvPr/>
+        </p:nvSpPr>
+        <p:spPr>
+          <a:xfrm>
+            <a:off x="548640" y="384048"/>
+            <a:ext cx="10058400" cy="274320"/>
+          </a:xfrm>
+          <a:prstGeom prst="rect">
+            <a:avLst/>
+          </a:prstGeom>
+          <a:noFill/>
+          <a:ln/>
+        </p:spPr>
+        <p:txBody>
+          <a:bodyPr wrap="square" rtlCol="0" anchor="ctr"/>
+          <a:lstStyle/>
+          <a:p>
+            <a:pPr indent="0" marL="0">
+              <a:buNone/>
+            </a:pPr>
+            <a:r>
+              <a:rPr lang="en-US" sz="1100" b="1" spc="200" kern="0" dirty="0">
+                <a:solidFill>
+                  <a:srgbClr val="E8460E"/>
+                </a:solidFill>
+                <a:latin typeface="Arial" pitchFamily="34" charset="0"/>
+                <a:ea typeface="Arial" pitchFamily="34" charset="-122"/>
+                <a:cs typeface="Arial" pitchFamily="34" charset="-120"/>
+              </a:rPr>
+              <a:t>TIPS</a:t>
+            </a:r>
+            <a:endParaRPr lang="en-US" sz="1100" dirty="0"/>
+          </a:p>
+        </p:txBody>
+      </p:sp>
+      <p:sp>
+        <p:nvSpPr>
+          <p:cNvPr id="3" name="Text 1"/>
+          <p:cNvSpPr/>
+          <p:nvPr/>
+        </p:nvSpPr>
+        <p:spPr>
+          <a:xfrm>
+            <a:off x="548640" y="621792"/>
+            <a:ext cx="10515600" cy="640080"/>
+          </a:xfrm>
+          <a:prstGeom prst="rect">
+            <a:avLst/>
+          </a:prstGeom>
+          <a:noFill/>
+          <a:ln/>
+        </p:spPr>
+        <p:txBody>
+          <a:bodyPr wrap="square" rtlCol="0" anchor="t"/>
+          <a:lstStyle/>
+          <a:p>
+            <a:pPr indent="0" marL="0">
+              <a:buNone/>
+            </a:pPr>
+            <a:r>
+              <a:rPr lang="en-US" sz="2500" b="1" dirty="0">
+                <a:solidFill>
+                  <a:srgbClr val="2E4552"/>
+                </a:solidFill>
+                <a:latin typeface="Arial" pitchFamily="34" charset="0"/>
+                <a:ea typeface="Arial" pitchFamily="34" charset="-122"/>
+                <a:cs typeface="Arial" pitchFamily="34" charset="-120"/>
+              </a:rPr>
+              <a:t>A Good AGENTS.md vs a Weak One</a:t>
+            </a:r>
+            <a:endParaRPr lang="en-US" sz="2500" dirty="0"/>
+          </a:p>
+        </p:txBody>
+      </p:sp>
+      <p:sp>
+        <p:nvSpPr>
+          <p:cNvPr id="4" name="Shape 2"/>
+          <p:cNvSpPr/>
+          <p:nvPr/>
+        </p:nvSpPr>
+        <p:spPr>
+          <a:xfrm>
+            <a:off x="548640" y="1298448"/>
+            <a:ext cx="11064240" cy="0"/>
+          </a:xfrm>
+          <a:prstGeom prst="line">
+            <a:avLst/>
+          </a:prstGeom>
+          <a:noFill/>
+          <a:ln w="19050">
+            <a:solidFill>
+              <a:srgbClr val="FF6600"/>
+            </a:solidFill>
+            <a:prstDash val="solid"/>
+          </a:ln>
+        </p:spPr>
+      </p:sp>
+      <p:pic>
+        <p:nvPicPr>
+          <p:cNvPr id="5" name="Image 0" descr="unext_icon.png">    </p:cNvPr>
+          <p:cNvPicPr>
+            <a:picLocks noChangeAspect="1"/>
+          </p:cNvPicPr>
+          <p:nvPr/>
+        </p:nvPicPr>
+        <p:blipFill>
+          <a:blip r:embed="rId1"/>
+          <a:stretch>
+            <a:fillRect/>
+          </a:stretch>
+        </p:blipFill>
+        <p:spPr>
+          <a:xfrm>
+            <a:off x="11430000" y="365760"/>
+            <a:ext cx="329184" cy="493776"/>
+          </a:xfrm>
+          <a:prstGeom prst="rect">
+            <a:avLst/>
+          </a:prstGeom>
+        </p:spPr>
+      </p:pic>
+      <p:sp>
+        <p:nvSpPr>
+          <p:cNvPr id="6" name="Shape 3"/>
+          <p:cNvSpPr/>
+          <p:nvPr/>
+        </p:nvSpPr>
+        <p:spPr>
+          <a:xfrm>
+            <a:off x="548640" y="6400800"/>
+            <a:ext cx="9418320" cy="0"/>
+          </a:xfrm>
+          <a:prstGeom prst="line">
+            <a:avLst/>
+          </a:prstGeom>
+          <a:noFill/>
+          <a:ln w="9525">
+            <a:solidFill>
+              <a:srgbClr val="F0DCB8"/>
+            </a:solidFill>
+            <a:prstDash val="solid"/>
+          </a:ln>
+        </p:spPr>
+      </p:sp>
+      <p:sp>
+        <p:nvSpPr>
+          <p:cNvPr id="7" name="Text 4"/>
+          <p:cNvSpPr/>
+          <p:nvPr/>
+        </p:nvSpPr>
+        <p:spPr>
+          <a:xfrm>
+            <a:off x="548640" y="6437376"/>
+            <a:ext cx="9326880" cy="365760"/>
+          </a:xfrm>
+          <a:prstGeom prst="rect">
+            <a:avLst/>
+          </a:prstGeom>
+          <a:noFill/>
+          <a:ln/>
+        </p:spPr>
+        <p:txBody>
+          <a:bodyPr wrap="square" rtlCol="0" anchor="t"/>
+          <a:lstStyle/>
+          <a:p>
+            <a:pPr indent="0" marL="0">
+              <a:buNone/>
+            </a:pPr>
+            <a:r>
+              <a:rPr lang="en-US" sz="700" dirty="0">
+                <a:solidFill>
+                  <a:srgbClr val="767171"/>
+                </a:solidFill>
+                <a:latin typeface="Arial" pitchFamily="34" charset="0"/>
+                <a:ea typeface="Arial" pitchFamily="34" charset="-122"/>
+                <a:cs typeface="Arial" pitchFamily="34" charset="-120"/>
+              </a:rPr>
+              <a:t>The content and the program approach is strictly confidential. It is strictly forbidden to share any part of this program design approach with any third party</a:t>
+            </a:r>
+            <a:endParaRPr lang="en-US" sz="700" dirty="0"/>
+          </a:p>
+        </p:txBody>
+      </p:sp>
+      <p:pic>
+        <p:nvPicPr>
+          <p:cNvPr id="8" name="Image 1" descr="unext_dark_lockup.png">    </p:cNvPr>
+          <p:cNvPicPr>
+            <a:picLocks noChangeAspect="1"/>
+          </p:cNvPicPr>
+          <p:nvPr/>
+        </p:nvPicPr>
+        <p:blipFill>
+          <a:blip r:embed="rId2"/>
+          <a:stretch>
+            <a:fillRect/>
+          </a:stretch>
+        </p:blipFill>
+        <p:spPr>
+          <a:xfrm>
+            <a:off x="10195560" y="6419088"/>
+            <a:ext cx="1417320" cy="301752"/>
+          </a:xfrm>
+          <a:prstGeom prst="rect">
+            <a:avLst/>
+          </a:prstGeom>
+        </p:spPr>
+      </p:pic>
+      <p:sp>
+        <p:nvSpPr>
+          <p:cNvPr id="9" name="Shape 5"/>
+          <p:cNvSpPr/>
+          <p:nvPr/>
+        </p:nvSpPr>
+        <p:spPr>
+          <a:xfrm>
+            <a:off x="548640" y="1554480"/>
+            <a:ext cx="5440680" cy="4480560"/>
+          </a:xfrm>
+          <a:prstGeom prst="roundRect">
+            <a:avLst>
+              <a:gd name="adj" fmla="val 1429"/>
+            </a:avLst>
+          </a:prstGeom>
+          <a:solidFill>
+            <a:srgbClr val="F5F7FA"/>
+          </a:solidFill>
+          <a:ln w="9525">
+            <a:solidFill>
+              <a:srgbClr val="D7DEE8"/>
+            </a:solidFill>
+            <a:prstDash val="solid"/>
+          </a:ln>
+        </p:spPr>
+      </p:sp>
+      <p:sp>
+        <p:nvSpPr>
+          <p:cNvPr id="10" name="Text 6"/>
+          <p:cNvSpPr/>
+          <p:nvPr/>
+        </p:nvSpPr>
+        <p:spPr>
+          <a:xfrm>
+            <a:off x="777240" y="1737360"/>
+            <a:ext cx="4937760" cy="365760"/>
+          </a:xfrm>
+          <a:prstGeom prst="rect">
+            <a:avLst/>
+          </a:prstGeom>
+          <a:noFill/>
+          <a:ln/>
+        </p:spPr>
+        <p:txBody>
+          <a:bodyPr wrap="square" rtlCol="0" anchor="ctr"/>
+          <a:lstStyle/>
+          <a:p>
+            <a:pPr indent="0" marL="0">
+              <a:buNone/>
+            </a:pPr>
+            <a:r>
+              <a:rPr lang="en-US" sz="1500" b="1" dirty="0">
+                <a:solidFill>
+                  <a:srgbClr val="1E7F4F"/>
+                </a:solidFill>
+                <a:latin typeface="Arial" pitchFamily="34" charset="0"/>
+                <a:ea typeface="Arial" pitchFamily="34" charset="-122"/>
+                <a:cs typeface="Arial" pitchFamily="34" charset="-120"/>
+              </a:rPr>
+              <a:t>✓ A good one</a:t>
+            </a:r>
+            <a:endParaRPr lang="en-US" sz="1500" dirty="0"/>
+          </a:p>
+        </p:txBody>
+      </p:sp>
+      <p:sp>
+        <p:nvSpPr>
+          <p:cNvPr id="11" name="Text 7"/>
+          <p:cNvSpPr/>
+          <p:nvPr/>
+        </p:nvSpPr>
+        <p:spPr>
+          <a:xfrm>
+            <a:off x="777240" y="2212848"/>
+            <a:ext cx="4983480" cy="3657600"/>
+          </a:xfrm>
+          <a:prstGeom prst="rect">
+            <a:avLst/>
+          </a:prstGeom>
+          <a:noFill/>
+          <a:ln/>
+        </p:spPr>
+        <p:txBody>
+          <a:bodyPr wrap="square" rtlCol="0" anchor="t"/>
+          <a:lstStyle/>
+          <a:p>
+            <a:pPr marL="203200" indent="-203200">
+              <a:lnSpc>
+                <a:spcPts val="1700"/>
+              </a:lnSpc>
+              <a:spcAft>
+                <a:spcPts val="1000"/>
+              </a:spcAft>
+              <a:buSzPct val="100000"/>
+              <a:buChar char="•"/>
+            </a:pPr>
+            <a:r>
+              <a:rPr lang="en-US" sz="1250" b="1" dirty="0">
+                <a:solidFill>
+                  <a:srgbClr val="3A4556"/>
+                </a:solidFill>
+                <a:latin typeface="Arial" pitchFamily="34" charset="0"/>
+                <a:ea typeface="Arial" pitchFamily="34" charset="-122"/>
+                <a:cs typeface="Arial" pitchFamily="34" charset="-120"/>
+              </a:rPr>
+              <a:t>Specific: names the agents, tools, and what each guardrail checks</a:t>
+            </a:r>
+            <a:endParaRPr lang="en-US" sz="1250" dirty="0"/>
+          </a:p>
+          <a:p>
+            <a:pPr marL="203200" indent="-203200">
+              <a:lnSpc>
+                <a:spcPts val="1700"/>
+              </a:lnSpc>
+              <a:spcAft>
+                <a:spcPts val="1000"/>
+              </a:spcAft>
+              <a:buSzPct val="100000"/>
+              <a:buChar char="•"/>
+            </a:pPr>
+            <a:r>
+              <a:rPr lang="en-US" sz="1250" dirty="0">
+                <a:solidFill>
+                  <a:srgbClr val="3A4556"/>
+                </a:solidFill>
+                <a:latin typeface="Arial" pitchFamily="34" charset="0"/>
+                <a:ea typeface="Arial" pitchFamily="34" charset="-122"/>
+                <a:cs typeface="Arial" pitchFamily="34" charset="-120"/>
+              </a:rPr>
+              <a:t>Lists the 10 scaffold points explicitly</a:t>
+            </a:r>
+            <a:endParaRPr lang="en-US" sz="1250" dirty="0"/>
+          </a:p>
+          <a:p>
+            <a:pPr marL="203200" indent="-203200">
+              <a:lnSpc>
+                <a:spcPts val="1700"/>
+              </a:lnSpc>
+              <a:spcAft>
+                <a:spcPts val="1000"/>
+              </a:spcAft>
+              <a:buSzPct val="100000"/>
+              <a:buChar char="•"/>
+            </a:pPr>
+            <a:r>
+              <a:rPr lang="en-US" sz="1250" dirty="0">
+                <a:solidFill>
+                  <a:srgbClr val="3A4556"/>
+                </a:solidFill>
+                <a:latin typeface="Arial" pitchFamily="34" charset="0"/>
+                <a:ea typeface="Arial" pitchFamily="34" charset="-122"/>
+                <a:cs typeface="Arial" pitchFamily="34" charset="-120"/>
+              </a:rPr>
+              <a:t>Marks which tools are destructive</a:t>
+            </a:r>
+            <a:endParaRPr lang="en-US" sz="1250" dirty="0"/>
+          </a:p>
+          <a:p>
+            <a:pPr marL="203200" indent="-203200">
+              <a:lnSpc>
+                <a:spcPts val="1700"/>
+              </a:lnSpc>
+              <a:spcAft>
+                <a:spcPts val="1000"/>
+              </a:spcAft>
+              <a:buSzPct val="100000"/>
+              <a:buChar char="•"/>
+            </a:pPr>
+            <a:r>
+              <a:rPr lang="en-US" sz="1250" dirty="0">
+                <a:solidFill>
+                  <a:srgbClr val="3A4556"/>
+                </a:solidFill>
+                <a:latin typeface="Arial" pitchFamily="34" charset="0"/>
+                <a:ea typeface="Arial" pitchFamily="34" charset="-122"/>
+                <a:cs typeface="Arial" pitchFamily="34" charset="-120"/>
+              </a:rPr>
+              <a:t>Has a concrete Definition of Done + 🔒 attack</a:t>
+            </a:r>
+            <a:endParaRPr lang="en-US" sz="1250" dirty="0"/>
+          </a:p>
+          <a:p>
+            <a:pPr marL="203200" indent="-203200">
+              <a:lnSpc>
+                <a:spcPts val="1700"/>
+              </a:lnSpc>
+              <a:spcAft>
+                <a:spcPts val="1000"/>
+              </a:spcAft>
+              <a:buSzPct val="100000"/>
+              <a:buChar char="•"/>
+            </a:pPr>
+            <a:r>
+              <a:rPr lang="en-US" sz="1250" dirty="0">
+                <a:solidFill>
+                  <a:srgbClr val="3A4556"/>
+                </a:solidFill>
+                <a:latin typeface="Arial" pitchFamily="34" charset="0"/>
+                <a:ea typeface="Arial" pitchFamily="34" charset="-122"/>
+                <a:cs typeface="Arial" pitchFamily="34" charset="-120"/>
+              </a:rPr>
+              <a:t>Short, accurate, and kept up to date</a:t>
+            </a:r>
+            <a:endParaRPr lang="en-US" sz="1250" dirty="0"/>
+          </a:p>
+          <a:p>
+            <a:pPr marL="203200" indent="-203200">
+              <a:lnSpc>
+                <a:spcPts val="1700"/>
+              </a:lnSpc>
+              <a:spcAft>
+                <a:spcPts val="1000"/>
+              </a:spcAft>
+              <a:buSzPct val="100000"/>
+              <a:buChar char="•"/>
+            </a:pPr>
+            <a:r>
+              <a:rPr lang="en-US" sz="1250" dirty="0">
+                <a:solidFill>
+                  <a:srgbClr val="3A4556"/>
+                </a:solidFill>
+                <a:latin typeface="Arial" pitchFamily="34" charset="0"/>
+                <a:ea typeface="Arial" pitchFamily="34" charset="-122"/>
+                <a:cs typeface="Arial" pitchFamily="34" charset="-120"/>
+              </a:rPr>
+              <a:t>Tells the agent what NOT to do</a:t>
+            </a:r>
+            <a:endParaRPr lang="en-US" sz="1250" dirty="0"/>
+          </a:p>
+        </p:txBody>
+      </p:sp>
+      <p:sp>
+        <p:nvSpPr>
+          <p:cNvPr id="12" name="Shape 8"/>
+          <p:cNvSpPr/>
+          <p:nvPr/>
+        </p:nvSpPr>
+        <p:spPr>
+          <a:xfrm>
+            <a:off x="6172200" y="1554480"/>
+            <a:ext cx="5440680" cy="4480560"/>
+          </a:xfrm>
+          <a:prstGeom prst="roundRect">
+            <a:avLst>
+              <a:gd name="adj" fmla="val 1429"/>
+            </a:avLst>
+          </a:prstGeom>
+          <a:solidFill>
+            <a:srgbClr val="F5F7FA"/>
+          </a:solidFill>
+          <a:ln w="9525">
+            <a:solidFill>
+              <a:srgbClr val="D7DEE8"/>
+            </a:solidFill>
+            <a:prstDash val="solid"/>
+          </a:ln>
+        </p:spPr>
+      </p:sp>
+      <p:sp>
+        <p:nvSpPr>
+          <p:cNvPr id="13" name="Text 9"/>
+          <p:cNvSpPr/>
+          <p:nvPr/>
+        </p:nvSpPr>
+        <p:spPr>
+          <a:xfrm>
+            <a:off x="6400800" y="1737360"/>
+            <a:ext cx="4937760" cy="365760"/>
+          </a:xfrm>
+          <a:prstGeom prst="rect">
+            <a:avLst/>
+          </a:prstGeom>
+          <a:noFill/>
+          <a:ln/>
+        </p:spPr>
+        <p:txBody>
+          <a:bodyPr wrap="square" rtlCol="0" anchor="ctr"/>
+          <a:lstStyle/>
+          <a:p>
+            <a:pPr indent="0" marL="0">
+              <a:buNone/>
+            </a:pPr>
+            <a:r>
+              <a:rPr lang="en-US" sz="1500" b="1" dirty="0">
+                <a:solidFill>
+                  <a:srgbClr val="E8460E"/>
+                </a:solidFill>
+                <a:latin typeface="Arial" pitchFamily="34" charset="0"/>
+                <a:ea typeface="Arial" pitchFamily="34" charset="-122"/>
+                <a:cs typeface="Arial" pitchFamily="34" charset="-120"/>
+              </a:rPr>
+              <a:t>✗ A weak one</a:t>
+            </a:r>
+            <a:endParaRPr lang="en-US" sz="1500" dirty="0"/>
+          </a:p>
+        </p:txBody>
+      </p:sp>
+      <p:sp>
+        <p:nvSpPr>
+          <p:cNvPr id="14" name="Text 10"/>
+          <p:cNvSpPr/>
+          <p:nvPr/>
+        </p:nvSpPr>
+        <p:spPr>
+          <a:xfrm>
+            <a:off x="6400800" y="2212848"/>
+            <a:ext cx="4983480" cy="3657600"/>
+          </a:xfrm>
+          <a:prstGeom prst="rect">
+            <a:avLst/>
+          </a:prstGeom>
+          <a:noFill/>
+          <a:ln/>
+        </p:spPr>
+        <p:txBody>
+          <a:bodyPr wrap="square" rtlCol="0" anchor="t"/>
+          <a:lstStyle/>
+          <a:p>
+            <a:pPr marL="203200" indent="-203200">
+              <a:lnSpc>
+                <a:spcPts val="1700"/>
+              </a:lnSpc>
+              <a:spcAft>
+                <a:spcPts val="1000"/>
+              </a:spcAft>
+              <a:buSzPct val="100000"/>
+              <a:buChar char="•"/>
+            </a:pPr>
+            <a:r>
+              <a:rPr lang="en-US" sz="1250" b="1" dirty="0">
+                <a:solidFill>
+                  <a:srgbClr val="3A4556"/>
+                </a:solidFill>
+                <a:latin typeface="Arial" pitchFamily="34" charset="0"/>
+                <a:ea typeface="Arial" pitchFamily="34" charset="-122"/>
+                <a:cs typeface="Arial" pitchFamily="34" charset="-120"/>
+              </a:rPr>
+              <a:t>Vague: "build a documentation system with guardrails"</a:t>
+            </a:r>
+            <a:endParaRPr lang="en-US" sz="1250" dirty="0"/>
+          </a:p>
+          <a:p>
+            <a:pPr marL="203200" indent="-203200">
+              <a:lnSpc>
+                <a:spcPts val="1700"/>
+              </a:lnSpc>
+              <a:spcAft>
+                <a:spcPts val="1000"/>
+              </a:spcAft>
+              <a:buSzPct val="100000"/>
+              <a:buChar char="•"/>
+            </a:pPr>
+            <a:r>
+              <a:rPr lang="en-US" sz="1250" dirty="0">
+                <a:solidFill>
+                  <a:srgbClr val="3A4556"/>
+                </a:solidFill>
+                <a:latin typeface="Arial" pitchFamily="34" charset="0"/>
+                <a:ea typeface="Arial" pitchFamily="34" charset="-122"/>
+                <a:cs typeface="Arial" pitchFamily="34" charset="-120"/>
+              </a:rPr>
+              <a:t>No scaffold rules → unsafe code by default</a:t>
+            </a:r>
+            <a:endParaRPr lang="en-US" sz="1250" dirty="0"/>
+          </a:p>
+          <a:p>
+            <a:pPr marL="203200" indent="-203200">
+              <a:lnSpc>
+                <a:spcPts val="1700"/>
+              </a:lnSpc>
+              <a:spcAft>
+                <a:spcPts val="1000"/>
+              </a:spcAft>
+              <a:buSzPct val="100000"/>
+              <a:buChar char="•"/>
+            </a:pPr>
+            <a:r>
+              <a:rPr lang="en-US" sz="1250" dirty="0">
+                <a:solidFill>
+                  <a:srgbClr val="3A4556"/>
+                </a:solidFill>
+                <a:latin typeface="Arial" pitchFamily="34" charset="0"/>
+                <a:ea typeface="Arial" pitchFamily="34" charset="-122"/>
+                <a:cs typeface="Arial" pitchFamily="34" charset="-120"/>
+              </a:rPr>
+              <a:t>No tool list → the agent invents tools</a:t>
+            </a:r>
+            <a:endParaRPr lang="en-US" sz="1250" dirty="0"/>
+          </a:p>
+          <a:p>
+            <a:pPr marL="203200" indent="-203200">
+              <a:lnSpc>
+                <a:spcPts val="1700"/>
+              </a:lnSpc>
+              <a:spcAft>
+                <a:spcPts val="1000"/>
+              </a:spcAft>
+              <a:buSzPct val="100000"/>
+              <a:buChar char="•"/>
+            </a:pPr>
+            <a:r>
+              <a:rPr lang="en-US" sz="1250" dirty="0">
+                <a:solidFill>
+                  <a:srgbClr val="3A4556"/>
+                </a:solidFill>
+                <a:latin typeface="Arial" pitchFamily="34" charset="0"/>
+                <a:ea typeface="Arial" pitchFamily="34" charset="-122"/>
+                <a:cs typeface="Arial" pitchFamily="34" charset="-120"/>
+              </a:rPr>
+              <a:t>No destructive-tool marking → unguarded actions</a:t>
+            </a:r>
+            <a:endParaRPr lang="en-US" sz="1250" dirty="0"/>
+          </a:p>
+          <a:p>
+            <a:pPr marL="203200" indent="-203200">
+              <a:lnSpc>
+                <a:spcPts val="1700"/>
+              </a:lnSpc>
+              <a:spcAft>
+                <a:spcPts val="1000"/>
+              </a:spcAft>
+              <a:buSzPct val="100000"/>
+              <a:buChar char="•"/>
+            </a:pPr>
+            <a:r>
+              <a:rPr lang="en-US" sz="1250" dirty="0">
+                <a:solidFill>
+                  <a:srgbClr val="3A4556"/>
+                </a:solidFill>
+                <a:latin typeface="Arial" pitchFamily="34" charset="0"/>
+                <a:ea typeface="Arial" pitchFamily="34" charset="-122"/>
+                <a:cs typeface="Arial" pitchFamily="34" charset="-120"/>
+              </a:rPr>
+              <a:t>No DoD → you never know when it's done</a:t>
+            </a:r>
+            <a:endParaRPr lang="en-US" sz="1250" dirty="0"/>
+          </a:p>
+          <a:p>
+            <a:pPr marL="203200" indent="-203200">
+              <a:lnSpc>
+                <a:spcPts val="1700"/>
+              </a:lnSpc>
+              <a:spcAft>
+                <a:spcPts val="1000"/>
+              </a:spcAft>
+              <a:buSzPct val="100000"/>
+              <a:buChar char="•"/>
+            </a:pPr>
+            <a:r>
+              <a:rPr lang="en-US" sz="1250" dirty="0">
+                <a:solidFill>
+                  <a:srgbClr val="3A4556"/>
+                </a:solidFill>
+                <a:latin typeface="Arial" pitchFamily="34" charset="0"/>
+                <a:ea typeface="Arial" pitchFamily="34" charset="-122"/>
+                <a:cs typeface="Arial" pitchFamily="34" charset="-120"/>
+              </a:rPr>
+              <a:t>Stale → the agent follows the wrong contract</a:t>
+            </a:r>
+            <a:endParaRPr lang="en-US" sz="1250" dirty="0"/>
+          </a:p>
+        </p:txBody>
+      </p:sp>
+    </p:spTree>
+  </p:cSld>
+  <p:clrMapOvr>
+    <a:masterClrMapping/>
+  </p:clrMapOvr>
+</p:sld>
+</file>
+
+<file path=ppt/slides/slide19.xml><?xml version="1.0" encoding="utf-8"?>
+<p:sld xmlns:a="http://schemas.openxmlformats.org/drawingml/2006/main" xmlns:r="http://schemas.openxmlformats.org/officeDocument/2006/relationships" xmlns:p="http://schemas.openxmlformats.org/presentationml/2006/main">
+  <p:cSld name="Slide 19">
     <p:bg>
       <p:bgPr>
         <a:solidFill>
@@ -9763,7 +10817,7 @@
                 <a:ea typeface="Arial" pitchFamily="34" charset="-122"/>
                 <a:cs typeface="Arial" pitchFamily="34" charset="-120"/>
               </a:rPr>
-              <a:t>The Structure — 12 Sections</a:t>
+              <a:t>The Structure — 13 Sections</a:t>
             </a:r>
             <a:endParaRPr lang="en-US" sz="3200" dirty="0"/>
           </a:p>
@@ -9828,7 +10882,7 @@
                 <a:ea typeface="Arial" pitchFamily="34" charset="-122"/>
                 <a:cs typeface="Arial" pitchFamily="34" charset="-120"/>
               </a:rPr>
-              <a:t>A complete AGENTS.md for this programme has twelve sections. Each one tells the coding agent something it must not guess.</a:t>
+              <a:t>A complete AGENTS.md for this programme has thirteen sections. Each one tells the coding agent something it must not guess.</a:t>
             </a:r>
             <a:endParaRPr lang="en-US" sz="1400" dirty="0"/>
           </a:p>
@@ -9938,7 +10992,7 @@
                 <a:ea typeface="Arial" pitchFamily="34" charset="-122"/>
                 <a:cs typeface="Arial" pitchFamily="34" charset="-120"/>
               </a:rPr>
-              <a:t>The 12 Sections at a Glance</a:t>
+              <a:t>The 13 Sections at a Glance</a:t>
             </a:r>
             <a:endParaRPr lang="en-US" sz="2500" dirty="0"/>
           </a:p>
@@ -10085,8 +11139,8 @@
         </p:nvSpPr>
         <p:spPr>
           <a:xfrm>
-            <a:off x="548640" y="1371600"/>
-            <a:ext cx="3657600" cy="393192"/>
+            <a:off x="548640" y="1280160"/>
+            <a:ext cx="3657600" cy="370332"/>
           </a:xfrm>
           <a:prstGeom prst="rect">
             <a:avLst/>
@@ -10110,8 +11164,8 @@
         </p:nvSpPr>
         <p:spPr>
           <a:xfrm>
-            <a:off x="658368" y="1371600"/>
-            <a:ext cx="3474720" cy="393192"/>
+            <a:off x="658368" y="1280160"/>
+            <a:ext cx="3474720" cy="370332"/>
           </a:xfrm>
           <a:prstGeom prst="rect">
             <a:avLst/>
@@ -10149,8 +11203,8 @@
         </p:nvSpPr>
         <p:spPr>
           <a:xfrm>
-            <a:off x="4206240" y="1371600"/>
-            <a:ext cx="7406640" cy="393192"/>
+            <a:off x="4206240" y="1280160"/>
+            <a:ext cx="7406640" cy="370332"/>
           </a:xfrm>
           <a:prstGeom prst="rect">
             <a:avLst/>
@@ -10174,8 +11228,8 @@
         </p:nvSpPr>
         <p:spPr>
           <a:xfrm>
-            <a:off x="4343400" y="1371600"/>
-            <a:ext cx="7223760" cy="393192"/>
+            <a:off x="4343400" y="1280160"/>
+            <a:ext cx="7223760" cy="370332"/>
           </a:xfrm>
           <a:prstGeom prst="rect">
             <a:avLst/>
@@ -10213,8 +11267,8 @@
         </p:nvSpPr>
         <p:spPr>
           <a:xfrm>
-            <a:off x="548640" y="1764792"/>
-            <a:ext cx="3657600" cy="393192"/>
+            <a:off x="548640" y="1650492"/>
+            <a:ext cx="3657600" cy="370332"/>
           </a:xfrm>
           <a:prstGeom prst="rect">
             <a:avLst/>
@@ -10238,8 +11292,8 @@
         </p:nvSpPr>
         <p:spPr>
           <a:xfrm>
-            <a:off x="658368" y="1764792"/>
-            <a:ext cx="3474720" cy="393192"/>
+            <a:off x="658368" y="1650492"/>
+            <a:ext cx="3474720" cy="370332"/>
           </a:xfrm>
           <a:prstGeom prst="rect">
             <a:avLst/>
@@ -10277,8 +11331,8 @@
         </p:nvSpPr>
         <p:spPr>
           <a:xfrm>
-            <a:off x="4206240" y="1764792"/>
-            <a:ext cx="7406640" cy="393192"/>
+            <a:off x="4206240" y="1650492"/>
+            <a:ext cx="7406640" cy="370332"/>
           </a:xfrm>
           <a:prstGeom prst="rect">
             <a:avLst/>
@@ -10302,8 +11356,8 @@
         </p:nvSpPr>
         <p:spPr>
           <a:xfrm>
-            <a:off x="4343400" y="1764792"/>
-            <a:ext cx="7223760" cy="393192"/>
+            <a:off x="4343400" y="1650492"/>
+            <a:ext cx="7223760" cy="370332"/>
           </a:xfrm>
           <a:prstGeom prst="rect">
             <a:avLst/>
@@ -10341,8 +11395,8 @@
         </p:nvSpPr>
         <p:spPr>
           <a:xfrm>
-            <a:off x="548640" y="2157984"/>
-            <a:ext cx="3657600" cy="393192"/>
+            <a:off x="548640" y="2020824"/>
+            <a:ext cx="3657600" cy="370332"/>
           </a:xfrm>
           <a:prstGeom prst="rect">
             <a:avLst/>
@@ -10366,8 +11420,8 @@
         </p:nvSpPr>
         <p:spPr>
           <a:xfrm>
-            <a:off x="658368" y="2157984"/>
-            <a:ext cx="3474720" cy="393192"/>
+            <a:off x="658368" y="2020824"/>
+            <a:ext cx="3474720" cy="370332"/>
           </a:xfrm>
           <a:prstGeom prst="rect">
             <a:avLst/>
@@ -10405,8 +11459,8 @@
         </p:nvSpPr>
         <p:spPr>
           <a:xfrm>
-            <a:off x="4206240" y="2157984"/>
-            <a:ext cx="7406640" cy="393192"/>
+            <a:off x="4206240" y="2020824"/>
+            <a:ext cx="7406640" cy="370332"/>
           </a:xfrm>
           <a:prstGeom prst="rect">
             <a:avLst/>
@@ -10430,8 +11484,8 @@
         </p:nvSpPr>
         <p:spPr>
           <a:xfrm>
-            <a:off x="4343400" y="2157984"/>
-            <a:ext cx="7223760" cy="393192"/>
+            <a:off x="4343400" y="2020824"/>
+            <a:ext cx="7223760" cy="370332"/>
           </a:xfrm>
           <a:prstGeom prst="rect">
             <a:avLst/>
@@ -10469,8 +11523,8 @@
         </p:nvSpPr>
         <p:spPr>
           <a:xfrm>
-            <a:off x="548640" y="2551176"/>
-            <a:ext cx="3657600" cy="393192"/>
+            <a:off x="548640" y="2391156"/>
+            <a:ext cx="3657600" cy="370332"/>
           </a:xfrm>
           <a:prstGeom prst="rect">
             <a:avLst/>
@@ -10494,8 +11548,8 @@
         </p:nvSpPr>
         <p:spPr>
           <a:xfrm>
-            <a:off x="658368" y="2551176"/>
-            <a:ext cx="3474720" cy="393192"/>
+            <a:off x="658368" y="2391156"/>
+            <a:ext cx="3474720" cy="370332"/>
           </a:xfrm>
           <a:prstGeom prst="rect">
             <a:avLst/>
@@ -10533,8 +11587,8 @@
         </p:nvSpPr>
         <p:spPr>
           <a:xfrm>
-            <a:off x="4206240" y="2551176"/>
-            <a:ext cx="7406640" cy="393192"/>
+            <a:off x="4206240" y="2391156"/>
+            <a:ext cx="7406640" cy="370332"/>
           </a:xfrm>
           <a:prstGeom prst="rect">
             <a:avLst/>
@@ -10558,8 +11612,8 @@
         </p:nvSpPr>
         <p:spPr>
           <a:xfrm>
-            <a:off x="4343400" y="2551176"/>
-            <a:ext cx="7223760" cy="393192"/>
+            <a:off x="4343400" y="2391156"/>
+            <a:ext cx="7223760" cy="370332"/>
           </a:xfrm>
           <a:prstGeom prst="rect">
             <a:avLst/>
@@ -10597,8 +11651,8 @@
         </p:nvSpPr>
         <p:spPr>
           <a:xfrm>
-            <a:off x="548640" y="2944368"/>
-            <a:ext cx="3657600" cy="393192"/>
+            <a:off x="548640" y="2761488"/>
+            <a:ext cx="3657600" cy="370332"/>
           </a:xfrm>
           <a:prstGeom prst="rect">
             <a:avLst/>
@@ -10622,8 +11676,8 @@
         </p:nvSpPr>
         <p:spPr>
           <a:xfrm>
-            <a:off x="658368" y="2944368"/>
-            <a:ext cx="3474720" cy="393192"/>
+            <a:off x="658368" y="2761488"/>
+            <a:ext cx="3474720" cy="370332"/>
           </a:xfrm>
           <a:prstGeom prst="rect">
             <a:avLst/>
@@ -10661,8 +11715,8 @@
         </p:nvSpPr>
         <p:spPr>
           <a:xfrm>
-            <a:off x="4206240" y="2944368"/>
-            <a:ext cx="7406640" cy="393192"/>
+            <a:off x="4206240" y="2761488"/>
+            <a:ext cx="7406640" cy="370332"/>
           </a:xfrm>
           <a:prstGeom prst="rect">
             <a:avLst/>
@@ -10686,8 +11740,8 @@
         </p:nvSpPr>
         <p:spPr>
           <a:xfrm>
-            <a:off x="4343400" y="2944368"/>
-            <a:ext cx="7223760" cy="393192"/>
+            <a:off x="4343400" y="2761488"/>
+            <a:ext cx="7223760" cy="370332"/>
           </a:xfrm>
           <a:prstGeom prst="rect">
             <a:avLst/>
@@ -10725,8 +11779,8 @@
         </p:nvSpPr>
         <p:spPr>
           <a:xfrm>
-            <a:off x="548640" y="3337560"/>
-            <a:ext cx="3657600" cy="393192"/>
+            <a:off x="548640" y="3131820"/>
+            <a:ext cx="3657600" cy="370332"/>
           </a:xfrm>
           <a:prstGeom prst="rect">
             <a:avLst/>
@@ -10750,8 +11804,8 @@
         </p:nvSpPr>
         <p:spPr>
           <a:xfrm>
-            <a:off x="658368" y="3337560"/>
-            <a:ext cx="3474720" cy="393192"/>
+            <a:off x="658368" y="3131820"/>
+            <a:ext cx="3474720" cy="370332"/>
           </a:xfrm>
           <a:prstGeom prst="rect">
             <a:avLst/>
@@ -10789,8 +11843,8 @@
         </p:nvSpPr>
         <p:spPr>
           <a:xfrm>
-            <a:off x="4206240" y="3337560"/>
-            <a:ext cx="7406640" cy="393192"/>
+            <a:off x="4206240" y="3131820"/>
+            <a:ext cx="7406640" cy="370332"/>
           </a:xfrm>
           <a:prstGeom prst="rect">
             <a:avLst/>
@@ -10814,8 +11868,8 @@
         </p:nvSpPr>
         <p:spPr>
           <a:xfrm>
-            <a:off x="4343400" y="3337560"/>
-            <a:ext cx="7223760" cy="393192"/>
+            <a:off x="4343400" y="3131820"/>
+            <a:ext cx="7223760" cy="370332"/>
           </a:xfrm>
           <a:prstGeom prst="rect">
             <a:avLst/>
@@ -10853,8 +11907,8 @@
         </p:nvSpPr>
         <p:spPr>
           <a:xfrm>
-            <a:off x="548640" y="3730752"/>
-            <a:ext cx="3657600" cy="393192"/>
+            <a:off x="548640" y="3502152"/>
+            <a:ext cx="3657600" cy="370332"/>
           </a:xfrm>
           <a:prstGeom prst="rect">
             <a:avLst/>
@@ -10878,8 +11932,8 @@
         </p:nvSpPr>
         <p:spPr>
           <a:xfrm>
-            <a:off x="658368" y="3730752"/>
-            <a:ext cx="3474720" cy="393192"/>
+            <a:off x="658368" y="3502152"/>
+            <a:ext cx="3474720" cy="370332"/>
           </a:xfrm>
           <a:prstGeom prst="rect">
             <a:avLst/>
@@ -10917,8 +11971,8 @@
         </p:nvSpPr>
         <p:spPr>
           <a:xfrm>
-            <a:off x="4206240" y="3730752"/>
-            <a:ext cx="7406640" cy="393192"/>
+            <a:off x="4206240" y="3502152"/>
+            <a:ext cx="7406640" cy="370332"/>
           </a:xfrm>
           <a:prstGeom prst="rect">
             <a:avLst/>
@@ -10942,8 +11996,8 @@
         </p:nvSpPr>
         <p:spPr>
           <a:xfrm>
-            <a:off x="4343400" y="3730752"/>
-            <a:ext cx="7223760" cy="393192"/>
+            <a:off x="4343400" y="3502152"/>
+            <a:ext cx="7223760" cy="370332"/>
           </a:xfrm>
           <a:prstGeom prst="rect">
             <a:avLst/>
@@ -10981,8 +12035,8 @@
         </p:nvSpPr>
         <p:spPr>
           <a:xfrm>
-            <a:off x="548640" y="4123944"/>
-            <a:ext cx="3657600" cy="393192"/>
+            <a:off x="548640" y="3872484"/>
+            <a:ext cx="3657600" cy="370332"/>
           </a:xfrm>
           <a:prstGeom prst="rect">
             <a:avLst/>
@@ -11006,8 +12060,8 @@
         </p:nvSpPr>
         <p:spPr>
           <a:xfrm>
-            <a:off x="658368" y="4123944"/>
-            <a:ext cx="3474720" cy="393192"/>
+            <a:off x="658368" y="3872484"/>
+            <a:ext cx="3474720" cy="370332"/>
           </a:xfrm>
           <a:prstGeom prst="rect">
             <a:avLst/>
@@ -11045,8 +12099,8 @@
         </p:nvSpPr>
         <p:spPr>
           <a:xfrm>
-            <a:off x="4206240" y="4123944"/>
-            <a:ext cx="7406640" cy="393192"/>
+            <a:off x="4206240" y="3872484"/>
+            <a:ext cx="7406640" cy="370332"/>
           </a:xfrm>
           <a:prstGeom prst="rect">
             <a:avLst/>
@@ -11070,8 +12124,8 @@
         </p:nvSpPr>
         <p:spPr>
           <a:xfrm>
-            <a:off x="4343400" y="4123944"/>
-            <a:ext cx="7223760" cy="393192"/>
+            <a:off x="4343400" y="3872484"/>
+            <a:ext cx="7223760" cy="370332"/>
           </a:xfrm>
           <a:prstGeom prst="rect">
             <a:avLst/>
@@ -11109,8 +12163,8 @@
         </p:nvSpPr>
         <p:spPr>
           <a:xfrm>
-            <a:off x="548640" y="4517136"/>
-            <a:ext cx="3657600" cy="393192"/>
+            <a:off x="548640" y="4242816"/>
+            <a:ext cx="3657600" cy="370332"/>
           </a:xfrm>
           <a:prstGeom prst="rect">
             <a:avLst/>
@@ -11134,8 +12188,8 @@
         </p:nvSpPr>
         <p:spPr>
           <a:xfrm>
-            <a:off x="658368" y="4517136"/>
-            <a:ext cx="3474720" cy="393192"/>
+            <a:off x="658368" y="4242816"/>
+            <a:ext cx="3474720" cy="370332"/>
           </a:xfrm>
           <a:prstGeom prst="rect">
             <a:avLst/>
@@ -11173,8 +12227,8 @@
         </p:nvSpPr>
         <p:spPr>
           <a:xfrm>
-            <a:off x="4206240" y="4517136"/>
-            <a:ext cx="7406640" cy="393192"/>
+            <a:off x="4206240" y="4242816"/>
+            <a:ext cx="7406640" cy="370332"/>
           </a:xfrm>
           <a:prstGeom prst="rect">
             <a:avLst/>
@@ -11198,8 +12252,8 @@
         </p:nvSpPr>
         <p:spPr>
           <a:xfrm>
-            <a:off x="4343400" y="4517136"/>
-            <a:ext cx="7223760" cy="393192"/>
+            <a:off x="4343400" y="4242816"/>
+            <a:ext cx="7223760" cy="370332"/>
           </a:xfrm>
           <a:prstGeom prst="rect">
             <a:avLst/>
@@ -11237,8 +12291,8 @@
         </p:nvSpPr>
         <p:spPr>
           <a:xfrm>
-            <a:off x="548640" y="4910328"/>
-            <a:ext cx="3657600" cy="393192"/>
+            <a:off x="548640" y="4613148"/>
+            <a:ext cx="3657600" cy="370332"/>
           </a:xfrm>
           <a:prstGeom prst="rect">
             <a:avLst/>
@@ -11262,8 +12316,8 @@
         </p:nvSpPr>
         <p:spPr>
           <a:xfrm>
-            <a:off x="658368" y="4910328"/>
-            <a:ext cx="3474720" cy="393192"/>
+            <a:off x="658368" y="4613148"/>
+            <a:ext cx="3474720" cy="370332"/>
           </a:xfrm>
           <a:prstGeom prst="rect">
             <a:avLst/>
@@ -11301,8 +12355,8 @@
         </p:nvSpPr>
         <p:spPr>
           <a:xfrm>
-            <a:off x="4206240" y="4910328"/>
-            <a:ext cx="7406640" cy="393192"/>
+            <a:off x="4206240" y="4613148"/>
+            <a:ext cx="7406640" cy="370332"/>
           </a:xfrm>
           <a:prstGeom prst="rect">
             <a:avLst/>
@@ -11326,8 +12380,8 @@
         </p:nvSpPr>
         <p:spPr>
           <a:xfrm>
-            <a:off x="4343400" y="4910328"/>
-            <a:ext cx="7223760" cy="393192"/>
+            <a:off x="4343400" y="4613148"/>
+            <a:ext cx="7223760" cy="370332"/>
           </a:xfrm>
           <a:prstGeom prst="rect">
             <a:avLst/>
@@ -11351,7 +12405,7 @@
                 <a:ea typeface="Arial" pitchFamily="34" charset="-122"/>
                 <a:cs typeface="Arial" pitchFamily="34" charset="-120"/>
               </a:rPr>
-              <a:t>The session deliverable + the 🔒 red-team check + README current</a:t>
+              <a:t>Deliverable + 🔒 red-team check + README current + trace check green</a:t>
             </a:r>
             <a:endParaRPr lang="en-US" sz="1100" dirty="0"/>
           </a:p>
@@ -11365,8 +12419,8 @@
         </p:nvSpPr>
         <p:spPr>
           <a:xfrm>
-            <a:off x="548640" y="5303520"/>
-            <a:ext cx="3657600" cy="393192"/>
+            <a:off x="548640" y="4983480"/>
+            <a:ext cx="3657600" cy="370332"/>
           </a:xfrm>
           <a:prstGeom prst="rect">
             <a:avLst/>
@@ -11390,8 +12444,8 @@
         </p:nvSpPr>
         <p:spPr>
           <a:xfrm>
-            <a:off x="658368" y="5303520"/>
-            <a:ext cx="3474720" cy="393192"/>
+            <a:off x="658368" y="4983480"/>
+            <a:ext cx="3474720" cy="370332"/>
           </a:xfrm>
           <a:prstGeom prst="rect">
             <a:avLst/>
@@ -11429,8 +12483,8 @@
         </p:nvSpPr>
         <p:spPr>
           <a:xfrm>
-            <a:off x="4206240" y="5303520"/>
-            <a:ext cx="7406640" cy="393192"/>
+            <a:off x="4206240" y="4983480"/>
+            <a:ext cx="7406640" cy="370332"/>
           </a:xfrm>
           <a:prstGeom prst="rect">
             <a:avLst/>
@@ -11454,8 +12508,8 @@
         </p:nvSpPr>
         <p:spPr>
           <a:xfrm>
-            <a:off x="4343400" y="5303520"/>
-            <a:ext cx="7223760" cy="393192"/>
+            <a:off x="4343400" y="4983480"/>
+            <a:ext cx="7223760" cy="370332"/>
           </a:xfrm>
           <a:prstGeom prst="rect">
             <a:avLst/>
@@ -11493,8 +12547,8 @@
         </p:nvSpPr>
         <p:spPr>
           <a:xfrm>
-            <a:off x="548640" y="5696712"/>
-            <a:ext cx="3657600" cy="393192"/>
+            <a:off x="548640" y="5353812"/>
+            <a:ext cx="3657600" cy="370332"/>
           </a:xfrm>
           <a:prstGeom prst="rect">
             <a:avLst/>
@@ -11518,8 +12572,8 @@
         </p:nvSpPr>
         <p:spPr>
           <a:xfrm>
-            <a:off x="658368" y="5696712"/>
-            <a:ext cx="3474720" cy="393192"/>
+            <a:off x="658368" y="5353812"/>
+            <a:ext cx="3474720" cy="370332"/>
           </a:xfrm>
           <a:prstGeom prst="rect">
             <a:avLst/>
@@ -11557,8 +12611,8 @@
         </p:nvSpPr>
         <p:spPr>
           <a:xfrm>
-            <a:off x="4206240" y="5696712"/>
-            <a:ext cx="7406640" cy="393192"/>
+            <a:off x="4206240" y="5353812"/>
+            <a:ext cx="7406640" cy="370332"/>
           </a:xfrm>
           <a:prstGeom prst="rect">
             <a:avLst/>
@@ -11582,8 +12636,8 @@
         </p:nvSpPr>
         <p:spPr>
           <a:xfrm>
-            <a:off x="4343400" y="5696712"/>
-            <a:ext cx="7223760" cy="393192"/>
+            <a:off x="4343400" y="5353812"/>
+            <a:ext cx="7223760" cy="370332"/>
           </a:xfrm>
           <a:prstGeom prst="rect">
             <a:avLst/>
@@ -11608,6 +12662,134 @@
                 <a:cs typeface="Arial" pitchFamily="34" charset="-120"/>
               </a:rPr>
               <a:t>Create a README and keep it in sync with the code, every step</a:t>
+            </a:r>
+            <a:endParaRPr lang="en-US" sz="1100" dirty="0"/>
+          </a:p>
+        </p:txBody>
+      </p:sp>
+      <p:sp>
+        <p:nvSpPr>
+          <p:cNvPr id="57" name="Shape 53"/>
+          <p:cNvSpPr/>
+          <p:nvPr/>
+        </p:nvSpPr>
+        <p:spPr>
+          <a:xfrm>
+            <a:off x="548640" y="5724144"/>
+            <a:ext cx="3657600" cy="370332"/>
+          </a:xfrm>
+          <a:prstGeom prst="rect">
+            <a:avLst/>
+          </a:prstGeom>
+          <a:solidFill>
+            <a:srgbClr val="F5F7FA"/>
+          </a:solidFill>
+          <a:ln w="6350">
+            <a:solidFill>
+              <a:srgbClr val="D7DEE8"/>
+            </a:solidFill>
+            <a:prstDash val="solid"/>
+          </a:ln>
+        </p:spPr>
+      </p:sp>
+      <p:sp>
+        <p:nvSpPr>
+          <p:cNvPr id="58" name="Text 54"/>
+          <p:cNvSpPr/>
+          <p:nvPr/>
+        </p:nvSpPr>
+        <p:spPr>
+          <a:xfrm>
+            <a:off x="658368" y="5724144"/>
+            <a:ext cx="3474720" cy="370332"/>
+          </a:xfrm>
+          <a:prstGeom prst="rect">
+            <a:avLst/>
+          </a:prstGeom>
+          <a:noFill/>
+          <a:ln/>
+        </p:spPr>
+        <p:txBody>
+          <a:bodyPr wrap="square" rtlCol="0" anchor="ctr"/>
+          <a:lstStyle/>
+          <a:p>
+            <a:pPr indent="0" marL="0">
+              <a:buNone/>
+            </a:pPr>
+            <a:r>
+              <a:rPr lang="en-US" sz="1150" b="1" dirty="0">
+                <a:solidFill>
+                  <a:srgbClr val="E8460E"/>
+                </a:solidFill>
+                <a:latin typeface="Arial" pitchFamily="34" charset="0"/>
+                <a:ea typeface="Arial" pitchFamily="34" charset="-122"/>
+                <a:cs typeface="Arial" pitchFamily="34" charset="-120"/>
+              </a:rPr>
+              <a:t>13 · SDD &amp; Traceability</a:t>
+            </a:r>
+            <a:endParaRPr lang="en-US" sz="1150" dirty="0"/>
+          </a:p>
+        </p:txBody>
+      </p:sp>
+      <p:sp>
+        <p:nvSpPr>
+          <p:cNvPr id="59" name="Shape 55"/>
+          <p:cNvSpPr/>
+          <p:nvPr/>
+        </p:nvSpPr>
+        <p:spPr>
+          <a:xfrm>
+            <a:off x="4206240" y="5724144"/>
+            <a:ext cx="7406640" cy="370332"/>
+          </a:xfrm>
+          <a:prstGeom prst="rect">
+            <a:avLst/>
+          </a:prstGeom>
+          <a:solidFill>
+            <a:srgbClr val="F5F7FA"/>
+          </a:solidFill>
+          <a:ln w="6350">
+            <a:solidFill>
+              <a:srgbClr val="D7DEE8"/>
+            </a:solidFill>
+            <a:prstDash val="solid"/>
+          </a:ln>
+        </p:spPr>
+      </p:sp>
+      <p:sp>
+        <p:nvSpPr>
+          <p:cNvPr id="60" name="Text 56"/>
+          <p:cNvSpPr/>
+          <p:nvPr/>
+        </p:nvSpPr>
+        <p:spPr>
+          <a:xfrm>
+            <a:off x="4343400" y="5724144"/>
+            <a:ext cx="7223760" cy="370332"/>
+          </a:xfrm>
+          <a:prstGeom prst="rect">
+            <a:avLst/>
+          </a:prstGeom>
+          <a:noFill/>
+          <a:ln/>
+        </p:spPr>
+        <p:txBody>
+          <a:bodyPr wrap="square" rtlCol="0" anchor="ctr"/>
+          <a:lstStyle/>
+          <a:p>
+            <a:pPr indent="0" marL="0">
+              <a:buNone/>
+            </a:pPr>
+            <a:r>
+              <a:rPr lang="en-US" sz="1100" dirty="0">
+                <a:solidFill>
+                  <a:srgbClr val="1F2937"/>
+                </a:solidFill>
+                <a:latin typeface="Arial" pitchFamily="34" charset="0"/>
+                <a:ea typeface="Arial" pitchFamily="34" charset="-122"/>
+                <a:cs typeface="Arial" pitchFamily="34" charset="-120"/>
+              </a:rPr>
+              <a:t>Spec-first: every behaviour gets a SPEC ID, carried spec → code → test → PR</a:t>
             </a:r>
             <a:endParaRPr lang="en-US" sz="1100" dirty="0"/>
           </a:p>
